--- a/Report Test subject/slides/Powered by GPT - Software Quality Verification - Presentation.pptx
+++ b/Report Test subject/slides/Powered by GPT - Software Quality Verification - Presentation.pptx
@@ -139,7 +139,7 @@
           <p:cNvPr id="2" name="Title 1">
             <a:extLst>
               <a:ext uri="{FF2B5EF4-FFF2-40B4-BE49-F238E27FC236}">
-                <a16:creationId xmlns:a16="http://schemas.microsoft.com/office/drawing/2014/main" id="{1807E9DB-6F4D-2E48-B762-4E815C9032A8}"/>
+                <a16:creationId xmlns:a16="http://schemas.microsoft.com/office/drawing/2014/main" id="{07165EDE-5D7C-E13C-C6A7-2BC671CE97E4}"/>
               </a:ext>
             </a:extLst>
           </p:cNvPr>
@@ -176,7 +176,7 @@
           <p:cNvPr id="3" name="Subtitle 2">
             <a:extLst>
               <a:ext uri="{FF2B5EF4-FFF2-40B4-BE49-F238E27FC236}">
-                <a16:creationId xmlns:a16="http://schemas.microsoft.com/office/drawing/2014/main" id="{A6D9FC15-4DED-304A-5BF5-30B191793F86}"/>
+                <a16:creationId xmlns:a16="http://schemas.microsoft.com/office/drawing/2014/main" id="{60F28F89-A668-276C-5260-8DC28CD170D3}"/>
               </a:ext>
             </a:extLst>
           </p:cNvPr>
@@ -246,7 +246,7 @@
           <p:cNvPr id="4" name="Date Placeholder 3">
             <a:extLst>
               <a:ext uri="{FF2B5EF4-FFF2-40B4-BE49-F238E27FC236}">
-                <a16:creationId xmlns:a16="http://schemas.microsoft.com/office/drawing/2014/main" id="{6993F9F2-568C-CE13-2DCA-26852F8C3EA3}"/>
+                <a16:creationId xmlns:a16="http://schemas.microsoft.com/office/drawing/2014/main" id="{0A8E3A0F-4C08-05D4-2DD3-FF56DF14C3B0}"/>
               </a:ext>
             </a:extLst>
           </p:cNvPr>
@@ -262,7 +262,7 @@
           <a:bodyPr/>
           <a:lstStyle/>
           <a:p>
-            <a:fld id="{1403D479-A847-4CF3-8F6E-A4789BE1C28C}" type="datetimeFigureOut">
+            <a:fld id="{5B73EB7D-7B0A-49FB-956D-DA36D9BE86BC}" type="datetimeFigureOut">
               <a:rPr lang="en-US" smtClean="0"/>
               <a:t>4/6/2026</a:t>
             </a:fld>
@@ -275,7 +275,7 @@
           <p:cNvPr id="5" name="Footer Placeholder 4">
             <a:extLst>
               <a:ext uri="{FF2B5EF4-FFF2-40B4-BE49-F238E27FC236}">
-                <a16:creationId xmlns:a16="http://schemas.microsoft.com/office/drawing/2014/main" id="{254451B5-DDF7-7DB0-38CA-C3BC2B47D5DE}"/>
+                <a16:creationId xmlns:a16="http://schemas.microsoft.com/office/drawing/2014/main" id="{00115D4D-08DE-A423-CDF9-10673435AFE4}"/>
               </a:ext>
             </a:extLst>
           </p:cNvPr>
@@ -300,7 +300,7 @@
           <p:cNvPr id="6" name="Slide Number Placeholder 5">
             <a:extLst>
               <a:ext uri="{FF2B5EF4-FFF2-40B4-BE49-F238E27FC236}">
-                <a16:creationId xmlns:a16="http://schemas.microsoft.com/office/drawing/2014/main" id="{AE8835DA-F22E-C933-A0E1-0E877086F09F}"/>
+                <a16:creationId xmlns:a16="http://schemas.microsoft.com/office/drawing/2014/main" id="{DC7FA9D3-C955-3BA7-E83B-18FCFCE3490B}"/>
               </a:ext>
             </a:extLst>
           </p:cNvPr>
@@ -316,7 +316,7 @@
           <a:bodyPr/>
           <a:lstStyle/>
           <a:p>
-            <a:fld id="{6BAE5709-5EE4-4DBE-B94B-3B1DFE4C0812}" type="slidenum">
+            <a:fld id="{E97F7C3F-1559-4CBB-968A-294334B2C34B}" type="slidenum">
               <a:rPr lang="en-US" smtClean="0"/>
               <a:t>‹#›</a:t>
             </a:fld>
@@ -327,7 +327,7 @@
     </p:spTree>
     <p:extLst>
       <p:ext uri="{BB962C8B-B14F-4D97-AF65-F5344CB8AC3E}">
-        <p14:creationId xmlns:p14="http://schemas.microsoft.com/office/powerpoint/2010/main" val="3464318233"/>
+        <p14:creationId xmlns:p14="http://schemas.microsoft.com/office/powerpoint/2010/main" val="997377146"/>
       </p:ext>
     </p:extLst>
   </p:cSld>
@@ -359,7 +359,7 @@
           <p:cNvPr id="2" name="Title 1">
             <a:extLst>
               <a:ext uri="{FF2B5EF4-FFF2-40B4-BE49-F238E27FC236}">
-                <a16:creationId xmlns:a16="http://schemas.microsoft.com/office/drawing/2014/main" id="{0C7C46BE-BB37-456B-325F-1CB4F684769E}"/>
+                <a16:creationId xmlns:a16="http://schemas.microsoft.com/office/drawing/2014/main" id="{2FF81796-DA31-E286-97C8-C93169B4C320}"/>
               </a:ext>
             </a:extLst>
           </p:cNvPr>
@@ -387,7 +387,7 @@
           <p:cNvPr id="3" name="Vertical Text Placeholder 2">
             <a:extLst>
               <a:ext uri="{FF2B5EF4-FFF2-40B4-BE49-F238E27FC236}">
-                <a16:creationId xmlns:a16="http://schemas.microsoft.com/office/drawing/2014/main" id="{335D86D3-29AB-81C2-D5A7-E4F43C7C120F}"/>
+                <a16:creationId xmlns:a16="http://schemas.microsoft.com/office/drawing/2014/main" id="{45619016-DA98-93C6-130F-32E77C84C8F4}"/>
               </a:ext>
             </a:extLst>
           </p:cNvPr>
@@ -444,7 +444,7 @@
           <p:cNvPr id="4" name="Date Placeholder 3">
             <a:extLst>
               <a:ext uri="{FF2B5EF4-FFF2-40B4-BE49-F238E27FC236}">
-                <a16:creationId xmlns:a16="http://schemas.microsoft.com/office/drawing/2014/main" id="{5CA1124F-FCFE-B4A4-399D-B11F35B57FBB}"/>
+                <a16:creationId xmlns:a16="http://schemas.microsoft.com/office/drawing/2014/main" id="{0E13C730-BC39-AFAB-044E-C0F9EB364F2A}"/>
               </a:ext>
             </a:extLst>
           </p:cNvPr>
@@ -460,7 +460,7 @@
           <a:bodyPr/>
           <a:lstStyle/>
           <a:p>
-            <a:fld id="{1403D479-A847-4CF3-8F6E-A4789BE1C28C}" type="datetimeFigureOut">
+            <a:fld id="{5B73EB7D-7B0A-49FB-956D-DA36D9BE86BC}" type="datetimeFigureOut">
               <a:rPr lang="en-US" smtClean="0"/>
               <a:t>4/6/2026</a:t>
             </a:fld>
@@ -473,7 +473,7 @@
           <p:cNvPr id="5" name="Footer Placeholder 4">
             <a:extLst>
               <a:ext uri="{FF2B5EF4-FFF2-40B4-BE49-F238E27FC236}">
-                <a16:creationId xmlns:a16="http://schemas.microsoft.com/office/drawing/2014/main" id="{DFC02ED7-7E57-484B-E89F-D81226693FEF}"/>
+                <a16:creationId xmlns:a16="http://schemas.microsoft.com/office/drawing/2014/main" id="{9285CC1D-5EF3-AA0D-7B3E-51C78733F531}"/>
               </a:ext>
             </a:extLst>
           </p:cNvPr>
@@ -498,7 +498,7 @@
           <p:cNvPr id="6" name="Slide Number Placeholder 5">
             <a:extLst>
               <a:ext uri="{FF2B5EF4-FFF2-40B4-BE49-F238E27FC236}">
-                <a16:creationId xmlns:a16="http://schemas.microsoft.com/office/drawing/2014/main" id="{56E54466-5BA4-02BB-E2D6-DD1572F2F501}"/>
+                <a16:creationId xmlns:a16="http://schemas.microsoft.com/office/drawing/2014/main" id="{925369BD-5A5C-2906-48FB-6EE152784FEC}"/>
               </a:ext>
             </a:extLst>
           </p:cNvPr>
@@ -514,7 +514,7 @@
           <a:bodyPr/>
           <a:lstStyle/>
           <a:p>
-            <a:fld id="{6BAE5709-5EE4-4DBE-B94B-3B1DFE4C0812}" type="slidenum">
+            <a:fld id="{E97F7C3F-1559-4CBB-968A-294334B2C34B}" type="slidenum">
               <a:rPr lang="en-US" smtClean="0"/>
               <a:t>‹#›</a:t>
             </a:fld>
@@ -525,7 +525,7 @@
     </p:spTree>
     <p:extLst>
       <p:ext uri="{BB962C8B-B14F-4D97-AF65-F5344CB8AC3E}">
-        <p14:creationId xmlns:p14="http://schemas.microsoft.com/office/powerpoint/2010/main" val="822293293"/>
+        <p14:creationId xmlns:p14="http://schemas.microsoft.com/office/powerpoint/2010/main" val="2161666242"/>
       </p:ext>
     </p:extLst>
   </p:cSld>
@@ -557,7 +557,7 @@
           <p:cNvPr id="2" name="Vertical Title 1">
             <a:extLst>
               <a:ext uri="{FF2B5EF4-FFF2-40B4-BE49-F238E27FC236}">
-                <a16:creationId xmlns:a16="http://schemas.microsoft.com/office/drawing/2014/main" id="{FCD7685F-5945-9DE1-50CB-BF7B9442F66A}"/>
+                <a16:creationId xmlns:a16="http://schemas.microsoft.com/office/drawing/2014/main" id="{DC3930AC-3486-4AC9-662C-9C0017C35C47}"/>
               </a:ext>
             </a:extLst>
           </p:cNvPr>
@@ -590,7 +590,7 @@
           <p:cNvPr id="3" name="Vertical Text Placeholder 2">
             <a:extLst>
               <a:ext uri="{FF2B5EF4-FFF2-40B4-BE49-F238E27FC236}">
-                <a16:creationId xmlns:a16="http://schemas.microsoft.com/office/drawing/2014/main" id="{1721A90C-79F5-BF73-A5B7-D9FF3AFE8335}"/>
+                <a16:creationId xmlns:a16="http://schemas.microsoft.com/office/drawing/2014/main" id="{0BB1C3D9-1057-B5E6-21A2-AAA828C4B4E3}"/>
               </a:ext>
             </a:extLst>
           </p:cNvPr>
@@ -652,7 +652,7 @@
           <p:cNvPr id="4" name="Date Placeholder 3">
             <a:extLst>
               <a:ext uri="{FF2B5EF4-FFF2-40B4-BE49-F238E27FC236}">
-                <a16:creationId xmlns:a16="http://schemas.microsoft.com/office/drawing/2014/main" id="{5E3AE9B4-285E-E44D-B3F9-F005C010E444}"/>
+                <a16:creationId xmlns:a16="http://schemas.microsoft.com/office/drawing/2014/main" id="{B4790AF4-9570-3B4E-6726-213DB343A97D}"/>
               </a:ext>
             </a:extLst>
           </p:cNvPr>
@@ -668,7 +668,7 @@
           <a:bodyPr/>
           <a:lstStyle/>
           <a:p>
-            <a:fld id="{1403D479-A847-4CF3-8F6E-A4789BE1C28C}" type="datetimeFigureOut">
+            <a:fld id="{5B73EB7D-7B0A-49FB-956D-DA36D9BE86BC}" type="datetimeFigureOut">
               <a:rPr lang="en-US" smtClean="0"/>
               <a:t>4/6/2026</a:t>
             </a:fld>
@@ -681,7 +681,7 @@
           <p:cNvPr id="5" name="Footer Placeholder 4">
             <a:extLst>
               <a:ext uri="{FF2B5EF4-FFF2-40B4-BE49-F238E27FC236}">
-                <a16:creationId xmlns:a16="http://schemas.microsoft.com/office/drawing/2014/main" id="{FCB0610B-AA47-2607-13D3-37EEA715A52A}"/>
+                <a16:creationId xmlns:a16="http://schemas.microsoft.com/office/drawing/2014/main" id="{E57BAFBC-C74B-5B3F-2049-E3ACAE7A68FA}"/>
               </a:ext>
             </a:extLst>
           </p:cNvPr>
@@ -706,7 +706,7 @@
           <p:cNvPr id="6" name="Slide Number Placeholder 5">
             <a:extLst>
               <a:ext uri="{FF2B5EF4-FFF2-40B4-BE49-F238E27FC236}">
-                <a16:creationId xmlns:a16="http://schemas.microsoft.com/office/drawing/2014/main" id="{4A1DB8AD-C2AA-8FE2-E645-F137BE0661CA}"/>
+                <a16:creationId xmlns:a16="http://schemas.microsoft.com/office/drawing/2014/main" id="{2DF85FCA-0C73-C35C-C038-44C48043EBE4}"/>
               </a:ext>
             </a:extLst>
           </p:cNvPr>
@@ -722,7 +722,7 @@
           <a:bodyPr/>
           <a:lstStyle/>
           <a:p>
-            <a:fld id="{6BAE5709-5EE4-4DBE-B94B-3B1DFE4C0812}" type="slidenum">
+            <a:fld id="{E97F7C3F-1559-4CBB-968A-294334B2C34B}" type="slidenum">
               <a:rPr lang="en-US" smtClean="0"/>
               <a:t>‹#›</a:t>
             </a:fld>
@@ -733,7 +733,7 @@
     </p:spTree>
     <p:extLst>
       <p:ext uri="{BB962C8B-B14F-4D97-AF65-F5344CB8AC3E}">
-        <p14:creationId xmlns:p14="http://schemas.microsoft.com/office/powerpoint/2010/main" val="1137520765"/>
+        <p14:creationId xmlns:p14="http://schemas.microsoft.com/office/powerpoint/2010/main" val="1534973973"/>
       </p:ext>
     </p:extLst>
   </p:cSld>
@@ -765,7 +765,7 @@
           <p:cNvPr id="2" name="Title 1">
             <a:extLst>
               <a:ext uri="{FF2B5EF4-FFF2-40B4-BE49-F238E27FC236}">
-                <a16:creationId xmlns:a16="http://schemas.microsoft.com/office/drawing/2014/main" id="{69D79E9D-3682-400E-46AA-768FDE20F546}"/>
+                <a16:creationId xmlns:a16="http://schemas.microsoft.com/office/drawing/2014/main" id="{20ECA73E-B6CF-CDE3-3C1A-9E445B715057}"/>
               </a:ext>
             </a:extLst>
           </p:cNvPr>
@@ -793,7 +793,7 @@
           <p:cNvPr id="3" name="Content Placeholder 2">
             <a:extLst>
               <a:ext uri="{FF2B5EF4-FFF2-40B4-BE49-F238E27FC236}">
-                <a16:creationId xmlns:a16="http://schemas.microsoft.com/office/drawing/2014/main" id="{765180EB-0447-0F19-6310-46029C175462}"/>
+                <a16:creationId xmlns:a16="http://schemas.microsoft.com/office/drawing/2014/main" id="{3BB0F2EE-579A-2FF1-4991-EE0CE504FCAB}"/>
               </a:ext>
             </a:extLst>
           </p:cNvPr>
@@ -850,7 +850,7 @@
           <p:cNvPr id="4" name="Date Placeholder 3">
             <a:extLst>
               <a:ext uri="{FF2B5EF4-FFF2-40B4-BE49-F238E27FC236}">
-                <a16:creationId xmlns:a16="http://schemas.microsoft.com/office/drawing/2014/main" id="{F5A2D451-13F0-89E5-CC98-55AFFF5B370A}"/>
+                <a16:creationId xmlns:a16="http://schemas.microsoft.com/office/drawing/2014/main" id="{4BC03A41-F2E7-27E2-48C8-09B0EDA40AEB}"/>
               </a:ext>
             </a:extLst>
           </p:cNvPr>
@@ -866,7 +866,7 @@
           <a:bodyPr/>
           <a:lstStyle/>
           <a:p>
-            <a:fld id="{1403D479-A847-4CF3-8F6E-A4789BE1C28C}" type="datetimeFigureOut">
+            <a:fld id="{5B73EB7D-7B0A-49FB-956D-DA36D9BE86BC}" type="datetimeFigureOut">
               <a:rPr lang="en-US" smtClean="0"/>
               <a:t>4/6/2026</a:t>
             </a:fld>
@@ -879,7 +879,7 @@
           <p:cNvPr id="5" name="Footer Placeholder 4">
             <a:extLst>
               <a:ext uri="{FF2B5EF4-FFF2-40B4-BE49-F238E27FC236}">
-                <a16:creationId xmlns:a16="http://schemas.microsoft.com/office/drawing/2014/main" id="{C8F00702-AC6D-655C-6B08-63C44B707D15}"/>
+                <a16:creationId xmlns:a16="http://schemas.microsoft.com/office/drawing/2014/main" id="{35B860F4-1251-B554-8C68-40E9E4A7147A}"/>
               </a:ext>
             </a:extLst>
           </p:cNvPr>
@@ -904,7 +904,7 @@
           <p:cNvPr id="6" name="Slide Number Placeholder 5">
             <a:extLst>
               <a:ext uri="{FF2B5EF4-FFF2-40B4-BE49-F238E27FC236}">
-                <a16:creationId xmlns:a16="http://schemas.microsoft.com/office/drawing/2014/main" id="{2F3D3773-FFE6-0892-3B31-7A9442E7F874}"/>
+                <a16:creationId xmlns:a16="http://schemas.microsoft.com/office/drawing/2014/main" id="{CA927488-2CD3-D05E-A46C-E1BDB49623F1}"/>
               </a:ext>
             </a:extLst>
           </p:cNvPr>
@@ -920,7 +920,7 @@
           <a:bodyPr/>
           <a:lstStyle/>
           <a:p>
-            <a:fld id="{6BAE5709-5EE4-4DBE-B94B-3B1DFE4C0812}" type="slidenum">
+            <a:fld id="{E97F7C3F-1559-4CBB-968A-294334B2C34B}" type="slidenum">
               <a:rPr lang="en-US" smtClean="0"/>
               <a:t>‹#›</a:t>
             </a:fld>
@@ -931,7 +931,7 @@
     </p:spTree>
     <p:extLst>
       <p:ext uri="{BB962C8B-B14F-4D97-AF65-F5344CB8AC3E}">
-        <p14:creationId xmlns:p14="http://schemas.microsoft.com/office/powerpoint/2010/main" val="201968149"/>
+        <p14:creationId xmlns:p14="http://schemas.microsoft.com/office/powerpoint/2010/main" val="3029314847"/>
       </p:ext>
     </p:extLst>
   </p:cSld>
@@ -963,7 +963,7 @@
           <p:cNvPr id="2" name="Title 1">
             <a:extLst>
               <a:ext uri="{FF2B5EF4-FFF2-40B4-BE49-F238E27FC236}">
-                <a16:creationId xmlns:a16="http://schemas.microsoft.com/office/drawing/2014/main" id="{308875FB-A45F-5D3D-7D76-97CDBDE1D719}"/>
+                <a16:creationId xmlns:a16="http://schemas.microsoft.com/office/drawing/2014/main" id="{EE91329D-B4C1-5CCC-A3C4-66808C51FD01}"/>
               </a:ext>
             </a:extLst>
           </p:cNvPr>
@@ -1000,7 +1000,7 @@
           <p:cNvPr id="3" name="Text Placeholder 2">
             <a:extLst>
               <a:ext uri="{FF2B5EF4-FFF2-40B4-BE49-F238E27FC236}">
-                <a16:creationId xmlns:a16="http://schemas.microsoft.com/office/drawing/2014/main" id="{F8832AF4-186A-C653-6697-3B530A406C6B}"/>
+                <a16:creationId xmlns:a16="http://schemas.microsoft.com/office/drawing/2014/main" id="{8AE49EAF-01DB-32E7-358F-5A352B315129}"/>
               </a:ext>
             </a:extLst>
           </p:cNvPr>
@@ -1125,7 +1125,7 @@
           <p:cNvPr id="4" name="Date Placeholder 3">
             <a:extLst>
               <a:ext uri="{FF2B5EF4-FFF2-40B4-BE49-F238E27FC236}">
-                <a16:creationId xmlns:a16="http://schemas.microsoft.com/office/drawing/2014/main" id="{614CC4C4-8F65-DD5E-8B8F-ABC7D7E3019C}"/>
+                <a16:creationId xmlns:a16="http://schemas.microsoft.com/office/drawing/2014/main" id="{74734934-12F2-F281-6D40-21312829AAFF}"/>
               </a:ext>
             </a:extLst>
           </p:cNvPr>
@@ -1141,7 +1141,7 @@
           <a:bodyPr/>
           <a:lstStyle/>
           <a:p>
-            <a:fld id="{1403D479-A847-4CF3-8F6E-A4789BE1C28C}" type="datetimeFigureOut">
+            <a:fld id="{5B73EB7D-7B0A-49FB-956D-DA36D9BE86BC}" type="datetimeFigureOut">
               <a:rPr lang="en-US" smtClean="0"/>
               <a:t>4/6/2026</a:t>
             </a:fld>
@@ -1154,7 +1154,7 @@
           <p:cNvPr id="5" name="Footer Placeholder 4">
             <a:extLst>
               <a:ext uri="{FF2B5EF4-FFF2-40B4-BE49-F238E27FC236}">
-                <a16:creationId xmlns:a16="http://schemas.microsoft.com/office/drawing/2014/main" id="{A9FE44E5-3FD9-0316-E009-DF1201AA682A}"/>
+                <a16:creationId xmlns:a16="http://schemas.microsoft.com/office/drawing/2014/main" id="{CD198054-F9C0-A437-730F-08825FBC1A7C}"/>
               </a:ext>
             </a:extLst>
           </p:cNvPr>
@@ -1179,7 +1179,7 @@
           <p:cNvPr id="6" name="Slide Number Placeholder 5">
             <a:extLst>
               <a:ext uri="{FF2B5EF4-FFF2-40B4-BE49-F238E27FC236}">
-                <a16:creationId xmlns:a16="http://schemas.microsoft.com/office/drawing/2014/main" id="{7AC5D1C0-9F29-634E-59FB-4F883E76C99B}"/>
+                <a16:creationId xmlns:a16="http://schemas.microsoft.com/office/drawing/2014/main" id="{2ADA58BE-6890-6842-6A3B-F8458AF7A7CA}"/>
               </a:ext>
             </a:extLst>
           </p:cNvPr>
@@ -1195,7 +1195,7 @@
           <a:bodyPr/>
           <a:lstStyle/>
           <a:p>
-            <a:fld id="{6BAE5709-5EE4-4DBE-B94B-3B1DFE4C0812}" type="slidenum">
+            <a:fld id="{E97F7C3F-1559-4CBB-968A-294334B2C34B}" type="slidenum">
               <a:rPr lang="en-US" smtClean="0"/>
               <a:t>‹#›</a:t>
             </a:fld>
@@ -1206,7 +1206,7 @@
     </p:spTree>
     <p:extLst>
       <p:ext uri="{BB962C8B-B14F-4D97-AF65-F5344CB8AC3E}">
-        <p14:creationId xmlns:p14="http://schemas.microsoft.com/office/powerpoint/2010/main" val="931481198"/>
+        <p14:creationId xmlns:p14="http://schemas.microsoft.com/office/powerpoint/2010/main" val="4238659332"/>
       </p:ext>
     </p:extLst>
   </p:cSld>
@@ -1238,7 +1238,7 @@
           <p:cNvPr id="2" name="Title 1">
             <a:extLst>
               <a:ext uri="{FF2B5EF4-FFF2-40B4-BE49-F238E27FC236}">
-                <a16:creationId xmlns:a16="http://schemas.microsoft.com/office/drawing/2014/main" id="{D22D4CB8-8E80-EF81-6198-F1258615C8F3}"/>
+                <a16:creationId xmlns:a16="http://schemas.microsoft.com/office/drawing/2014/main" id="{147FD3BB-6A97-3E0C-154F-C9178372407F}"/>
               </a:ext>
             </a:extLst>
           </p:cNvPr>
@@ -1266,7 +1266,7 @@
           <p:cNvPr id="3" name="Content Placeholder 2">
             <a:extLst>
               <a:ext uri="{FF2B5EF4-FFF2-40B4-BE49-F238E27FC236}">
-                <a16:creationId xmlns:a16="http://schemas.microsoft.com/office/drawing/2014/main" id="{E83EF501-51BA-E337-BC52-B8586ED0072D}"/>
+                <a16:creationId xmlns:a16="http://schemas.microsoft.com/office/drawing/2014/main" id="{86E88B3E-FFF5-F835-7972-FEE74B994F54}"/>
               </a:ext>
             </a:extLst>
           </p:cNvPr>
@@ -1328,7 +1328,7 @@
           <p:cNvPr id="4" name="Content Placeholder 3">
             <a:extLst>
               <a:ext uri="{FF2B5EF4-FFF2-40B4-BE49-F238E27FC236}">
-                <a16:creationId xmlns:a16="http://schemas.microsoft.com/office/drawing/2014/main" id="{EA2AC2B4-0D11-35A4-57A7-447E42C1EF36}"/>
+                <a16:creationId xmlns:a16="http://schemas.microsoft.com/office/drawing/2014/main" id="{16C17DBB-FB39-2F37-8BEA-8C6D2967AE13}"/>
               </a:ext>
             </a:extLst>
           </p:cNvPr>
@@ -1390,7 +1390,7 @@
           <p:cNvPr id="5" name="Date Placeholder 4">
             <a:extLst>
               <a:ext uri="{FF2B5EF4-FFF2-40B4-BE49-F238E27FC236}">
-                <a16:creationId xmlns:a16="http://schemas.microsoft.com/office/drawing/2014/main" id="{65B37122-A647-DAD0-1034-1DA305772E6C}"/>
+                <a16:creationId xmlns:a16="http://schemas.microsoft.com/office/drawing/2014/main" id="{4ED63DFC-E240-EAC7-C836-C62105F57FD1}"/>
               </a:ext>
             </a:extLst>
           </p:cNvPr>
@@ -1406,7 +1406,7 @@
           <a:bodyPr/>
           <a:lstStyle/>
           <a:p>
-            <a:fld id="{1403D479-A847-4CF3-8F6E-A4789BE1C28C}" type="datetimeFigureOut">
+            <a:fld id="{5B73EB7D-7B0A-49FB-956D-DA36D9BE86BC}" type="datetimeFigureOut">
               <a:rPr lang="en-US" smtClean="0"/>
               <a:t>4/6/2026</a:t>
             </a:fld>
@@ -1419,7 +1419,7 @@
           <p:cNvPr id="6" name="Footer Placeholder 5">
             <a:extLst>
               <a:ext uri="{FF2B5EF4-FFF2-40B4-BE49-F238E27FC236}">
-                <a16:creationId xmlns:a16="http://schemas.microsoft.com/office/drawing/2014/main" id="{49A3998A-A703-AD8A-3B79-974227C041F3}"/>
+                <a16:creationId xmlns:a16="http://schemas.microsoft.com/office/drawing/2014/main" id="{B0BAE020-F1C9-09B3-3285-B4BCFBFA980B}"/>
               </a:ext>
             </a:extLst>
           </p:cNvPr>
@@ -1444,7 +1444,7 @@
           <p:cNvPr id="7" name="Slide Number Placeholder 6">
             <a:extLst>
               <a:ext uri="{FF2B5EF4-FFF2-40B4-BE49-F238E27FC236}">
-                <a16:creationId xmlns:a16="http://schemas.microsoft.com/office/drawing/2014/main" id="{7D6D9FDB-A537-B934-9C7C-10AE7532B047}"/>
+                <a16:creationId xmlns:a16="http://schemas.microsoft.com/office/drawing/2014/main" id="{E4D93245-5344-0F9F-39B3-4F6F4A6A7258}"/>
               </a:ext>
             </a:extLst>
           </p:cNvPr>
@@ -1460,7 +1460,7 @@
           <a:bodyPr/>
           <a:lstStyle/>
           <a:p>
-            <a:fld id="{6BAE5709-5EE4-4DBE-B94B-3B1DFE4C0812}" type="slidenum">
+            <a:fld id="{E97F7C3F-1559-4CBB-968A-294334B2C34B}" type="slidenum">
               <a:rPr lang="en-US" smtClean="0"/>
               <a:t>‹#›</a:t>
             </a:fld>
@@ -1471,7 +1471,7 @@
     </p:spTree>
     <p:extLst>
       <p:ext uri="{BB962C8B-B14F-4D97-AF65-F5344CB8AC3E}">
-        <p14:creationId xmlns:p14="http://schemas.microsoft.com/office/powerpoint/2010/main" val="496346579"/>
+        <p14:creationId xmlns:p14="http://schemas.microsoft.com/office/powerpoint/2010/main" val="2537105044"/>
       </p:ext>
     </p:extLst>
   </p:cSld>
@@ -1503,7 +1503,7 @@
           <p:cNvPr id="2" name="Title 1">
             <a:extLst>
               <a:ext uri="{FF2B5EF4-FFF2-40B4-BE49-F238E27FC236}">
-                <a16:creationId xmlns:a16="http://schemas.microsoft.com/office/drawing/2014/main" id="{C92C7359-BED8-92A8-6B78-42CD348AB3A1}"/>
+                <a16:creationId xmlns:a16="http://schemas.microsoft.com/office/drawing/2014/main" id="{AB599A54-594B-B33B-A6ED-A340DD9B9D7E}"/>
               </a:ext>
             </a:extLst>
           </p:cNvPr>
@@ -1536,7 +1536,7 @@
           <p:cNvPr id="3" name="Text Placeholder 2">
             <a:extLst>
               <a:ext uri="{FF2B5EF4-FFF2-40B4-BE49-F238E27FC236}">
-                <a16:creationId xmlns:a16="http://schemas.microsoft.com/office/drawing/2014/main" id="{B3EA9EDC-9F08-B3BE-FEFE-CD246740EAF8}"/>
+                <a16:creationId xmlns:a16="http://schemas.microsoft.com/office/drawing/2014/main" id="{AC1D8CF1-C202-91A1-C330-7BDD7ED347D4}"/>
               </a:ext>
             </a:extLst>
           </p:cNvPr>
@@ -1607,7 +1607,7 @@
           <p:cNvPr id="4" name="Content Placeholder 3">
             <a:extLst>
               <a:ext uri="{FF2B5EF4-FFF2-40B4-BE49-F238E27FC236}">
-                <a16:creationId xmlns:a16="http://schemas.microsoft.com/office/drawing/2014/main" id="{12777114-C14D-62A6-EAC8-F8D0DBE5E61A}"/>
+                <a16:creationId xmlns:a16="http://schemas.microsoft.com/office/drawing/2014/main" id="{C99BB7A1-F9CD-7C41-C65B-6C521B3FC6C5}"/>
               </a:ext>
             </a:extLst>
           </p:cNvPr>
@@ -1669,7 +1669,7 @@
           <p:cNvPr id="5" name="Text Placeholder 4">
             <a:extLst>
               <a:ext uri="{FF2B5EF4-FFF2-40B4-BE49-F238E27FC236}">
-                <a16:creationId xmlns:a16="http://schemas.microsoft.com/office/drawing/2014/main" id="{770A8120-EC70-8D1C-0274-8BDA04973C4F}"/>
+                <a16:creationId xmlns:a16="http://schemas.microsoft.com/office/drawing/2014/main" id="{BB1BBC42-1BBB-FD3C-B486-451791213799}"/>
               </a:ext>
             </a:extLst>
           </p:cNvPr>
@@ -1740,7 +1740,7 @@
           <p:cNvPr id="6" name="Content Placeholder 5">
             <a:extLst>
               <a:ext uri="{FF2B5EF4-FFF2-40B4-BE49-F238E27FC236}">
-                <a16:creationId xmlns:a16="http://schemas.microsoft.com/office/drawing/2014/main" id="{37E06DA7-7E8C-C50A-A1A3-65E6F382C290}"/>
+                <a16:creationId xmlns:a16="http://schemas.microsoft.com/office/drawing/2014/main" id="{70C1E35A-43D3-7155-540E-AE2E5141FF15}"/>
               </a:ext>
             </a:extLst>
           </p:cNvPr>
@@ -1802,7 +1802,7 @@
           <p:cNvPr id="7" name="Date Placeholder 6">
             <a:extLst>
               <a:ext uri="{FF2B5EF4-FFF2-40B4-BE49-F238E27FC236}">
-                <a16:creationId xmlns:a16="http://schemas.microsoft.com/office/drawing/2014/main" id="{A868E038-92EB-D7C2-741B-ABF37A79EB2E}"/>
+                <a16:creationId xmlns:a16="http://schemas.microsoft.com/office/drawing/2014/main" id="{20CDD3FB-D5D6-92A7-445F-012805D03410}"/>
               </a:ext>
             </a:extLst>
           </p:cNvPr>
@@ -1818,7 +1818,7 @@
           <a:bodyPr/>
           <a:lstStyle/>
           <a:p>
-            <a:fld id="{1403D479-A847-4CF3-8F6E-A4789BE1C28C}" type="datetimeFigureOut">
+            <a:fld id="{5B73EB7D-7B0A-49FB-956D-DA36D9BE86BC}" type="datetimeFigureOut">
               <a:rPr lang="en-US" smtClean="0"/>
               <a:t>4/6/2026</a:t>
             </a:fld>
@@ -1831,7 +1831,7 @@
           <p:cNvPr id="8" name="Footer Placeholder 7">
             <a:extLst>
               <a:ext uri="{FF2B5EF4-FFF2-40B4-BE49-F238E27FC236}">
-                <a16:creationId xmlns:a16="http://schemas.microsoft.com/office/drawing/2014/main" id="{84C928DD-D080-DA11-8113-B011175987B3}"/>
+                <a16:creationId xmlns:a16="http://schemas.microsoft.com/office/drawing/2014/main" id="{E218A550-269E-CF50-09FD-7570D5509990}"/>
               </a:ext>
             </a:extLst>
           </p:cNvPr>
@@ -1856,7 +1856,7 @@
           <p:cNvPr id="9" name="Slide Number Placeholder 8">
             <a:extLst>
               <a:ext uri="{FF2B5EF4-FFF2-40B4-BE49-F238E27FC236}">
-                <a16:creationId xmlns:a16="http://schemas.microsoft.com/office/drawing/2014/main" id="{F7FD2498-C4FC-DBB6-6ACB-5717EF675BEE}"/>
+                <a16:creationId xmlns:a16="http://schemas.microsoft.com/office/drawing/2014/main" id="{8C8742DA-5B22-9832-D891-05918C998070}"/>
               </a:ext>
             </a:extLst>
           </p:cNvPr>
@@ -1872,7 +1872,7 @@
           <a:bodyPr/>
           <a:lstStyle/>
           <a:p>
-            <a:fld id="{6BAE5709-5EE4-4DBE-B94B-3B1DFE4C0812}" type="slidenum">
+            <a:fld id="{E97F7C3F-1559-4CBB-968A-294334B2C34B}" type="slidenum">
               <a:rPr lang="en-US" smtClean="0"/>
               <a:t>‹#›</a:t>
             </a:fld>
@@ -1883,7 +1883,7 @@
     </p:spTree>
     <p:extLst>
       <p:ext uri="{BB962C8B-B14F-4D97-AF65-F5344CB8AC3E}">
-        <p14:creationId xmlns:p14="http://schemas.microsoft.com/office/powerpoint/2010/main" val="2711334558"/>
+        <p14:creationId xmlns:p14="http://schemas.microsoft.com/office/powerpoint/2010/main" val="2420660931"/>
       </p:ext>
     </p:extLst>
   </p:cSld>
@@ -1915,7 +1915,7 @@
           <p:cNvPr id="2" name="Title 1">
             <a:extLst>
               <a:ext uri="{FF2B5EF4-FFF2-40B4-BE49-F238E27FC236}">
-                <a16:creationId xmlns:a16="http://schemas.microsoft.com/office/drawing/2014/main" id="{5608EAD6-6C5E-0D53-B244-179CAE75EF52}"/>
+                <a16:creationId xmlns:a16="http://schemas.microsoft.com/office/drawing/2014/main" id="{1EC62CEE-C988-CAB1-B9C1-75DBF1AFE071}"/>
               </a:ext>
             </a:extLst>
           </p:cNvPr>
@@ -1943,7 +1943,7 @@
           <p:cNvPr id="3" name="Date Placeholder 2">
             <a:extLst>
               <a:ext uri="{FF2B5EF4-FFF2-40B4-BE49-F238E27FC236}">
-                <a16:creationId xmlns:a16="http://schemas.microsoft.com/office/drawing/2014/main" id="{8FB224F5-CF55-49C4-8D9C-0A846B3BA7F5}"/>
+                <a16:creationId xmlns:a16="http://schemas.microsoft.com/office/drawing/2014/main" id="{20907C4F-A9C8-4F7D-B6EE-0ABAE9B67351}"/>
               </a:ext>
             </a:extLst>
           </p:cNvPr>
@@ -1959,7 +1959,7 @@
           <a:bodyPr/>
           <a:lstStyle/>
           <a:p>
-            <a:fld id="{1403D479-A847-4CF3-8F6E-A4789BE1C28C}" type="datetimeFigureOut">
+            <a:fld id="{5B73EB7D-7B0A-49FB-956D-DA36D9BE86BC}" type="datetimeFigureOut">
               <a:rPr lang="en-US" smtClean="0"/>
               <a:t>4/6/2026</a:t>
             </a:fld>
@@ -1972,7 +1972,7 @@
           <p:cNvPr id="4" name="Footer Placeholder 3">
             <a:extLst>
               <a:ext uri="{FF2B5EF4-FFF2-40B4-BE49-F238E27FC236}">
-                <a16:creationId xmlns:a16="http://schemas.microsoft.com/office/drawing/2014/main" id="{914FA18B-96F6-5258-4E03-E70864E760A0}"/>
+                <a16:creationId xmlns:a16="http://schemas.microsoft.com/office/drawing/2014/main" id="{EBA9FC12-DE90-6E0F-4B74-91D32BE8DDED}"/>
               </a:ext>
             </a:extLst>
           </p:cNvPr>
@@ -1997,7 +1997,7 @@
           <p:cNvPr id="5" name="Slide Number Placeholder 4">
             <a:extLst>
               <a:ext uri="{FF2B5EF4-FFF2-40B4-BE49-F238E27FC236}">
-                <a16:creationId xmlns:a16="http://schemas.microsoft.com/office/drawing/2014/main" id="{8F6C2C6E-7DFB-E94D-BC3E-40C246ACE7B0}"/>
+                <a16:creationId xmlns:a16="http://schemas.microsoft.com/office/drawing/2014/main" id="{2E546593-86BA-E602-6FEB-EC0E2EA25263}"/>
               </a:ext>
             </a:extLst>
           </p:cNvPr>
@@ -2013,7 +2013,7 @@
           <a:bodyPr/>
           <a:lstStyle/>
           <a:p>
-            <a:fld id="{6BAE5709-5EE4-4DBE-B94B-3B1DFE4C0812}" type="slidenum">
+            <a:fld id="{E97F7C3F-1559-4CBB-968A-294334B2C34B}" type="slidenum">
               <a:rPr lang="en-US" smtClean="0"/>
               <a:t>‹#›</a:t>
             </a:fld>
@@ -2024,7 +2024,7 @@
     </p:spTree>
     <p:extLst>
       <p:ext uri="{BB962C8B-B14F-4D97-AF65-F5344CB8AC3E}">
-        <p14:creationId xmlns:p14="http://schemas.microsoft.com/office/powerpoint/2010/main" val="648035629"/>
+        <p14:creationId xmlns:p14="http://schemas.microsoft.com/office/powerpoint/2010/main" val="1979632611"/>
       </p:ext>
     </p:extLst>
   </p:cSld>
@@ -2056,7 +2056,7 @@
           <p:cNvPr id="2" name="Date Placeholder 1">
             <a:extLst>
               <a:ext uri="{FF2B5EF4-FFF2-40B4-BE49-F238E27FC236}">
-                <a16:creationId xmlns:a16="http://schemas.microsoft.com/office/drawing/2014/main" id="{C16556FF-929F-C81D-ABAB-7130DC25D989}"/>
+                <a16:creationId xmlns:a16="http://schemas.microsoft.com/office/drawing/2014/main" id="{860EBF8B-F458-254E-BCAE-DEDF64EF566D}"/>
               </a:ext>
             </a:extLst>
           </p:cNvPr>
@@ -2072,7 +2072,7 @@
           <a:bodyPr/>
           <a:lstStyle/>
           <a:p>
-            <a:fld id="{1403D479-A847-4CF3-8F6E-A4789BE1C28C}" type="datetimeFigureOut">
+            <a:fld id="{5B73EB7D-7B0A-49FB-956D-DA36D9BE86BC}" type="datetimeFigureOut">
               <a:rPr lang="en-US" smtClean="0"/>
               <a:t>4/6/2026</a:t>
             </a:fld>
@@ -2085,7 +2085,7 @@
           <p:cNvPr id="3" name="Footer Placeholder 2">
             <a:extLst>
               <a:ext uri="{FF2B5EF4-FFF2-40B4-BE49-F238E27FC236}">
-                <a16:creationId xmlns:a16="http://schemas.microsoft.com/office/drawing/2014/main" id="{B7D6A08A-77D2-B541-9487-65E32F670B04}"/>
+                <a16:creationId xmlns:a16="http://schemas.microsoft.com/office/drawing/2014/main" id="{8AC5E94E-69F8-CD12-6301-72C0879D7B53}"/>
               </a:ext>
             </a:extLst>
           </p:cNvPr>
@@ -2110,7 +2110,7 @@
           <p:cNvPr id="4" name="Slide Number Placeholder 3">
             <a:extLst>
               <a:ext uri="{FF2B5EF4-FFF2-40B4-BE49-F238E27FC236}">
-                <a16:creationId xmlns:a16="http://schemas.microsoft.com/office/drawing/2014/main" id="{3B8819B9-E410-25F2-C198-30FA15507040}"/>
+                <a16:creationId xmlns:a16="http://schemas.microsoft.com/office/drawing/2014/main" id="{D342F13B-F835-F254-CFD4-73521CFEBBA6}"/>
               </a:ext>
             </a:extLst>
           </p:cNvPr>
@@ -2126,7 +2126,7 @@
           <a:bodyPr/>
           <a:lstStyle/>
           <a:p>
-            <a:fld id="{6BAE5709-5EE4-4DBE-B94B-3B1DFE4C0812}" type="slidenum">
+            <a:fld id="{E97F7C3F-1559-4CBB-968A-294334B2C34B}" type="slidenum">
               <a:rPr lang="en-US" smtClean="0"/>
               <a:t>‹#›</a:t>
             </a:fld>
@@ -2137,7 +2137,7 @@
     </p:spTree>
     <p:extLst>
       <p:ext uri="{BB962C8B-B14F-4D97-AF65-F5344CB8AC3E}">
-        <p14:creationId xmlns:p14="http://schemas.microsoft.com/office/powerpoint/2010/main" val="3931165822"/>
+        <p14:creationId xmlns:p14="http://schemas.microsoft.com/office/powerpoint/2010/main" val="452856434"/>
       </p:ext>
     </p:extLst>
   </p:cSld>
@@ -2169,7 +2169,7 @@
           <p:cNvPr id="2" name="Title 1">
             <a:extLst>
               <a:ext uri="{FF2B5EF4-FFF2-40B4-BE49-F238E27FC236}">
-                <a16:creationId xmlns:a16="http://schemas.microsoft.com/office/drawing/2014/main" id="{A3147619-0365-76FA-2955-91A8C815CCF7}"/>
+                <a16:creationId xmlns:a16="http://schemas.microsoft.com/office/drawing/2014/main" id="{FE3B1A89-4810-528A-27B0-7A86C7D09B63}"/>
               </a:ext>
             </a:extLst>
           </p:cNvPr>
@@ -2206,7 +2206,7 @@
           <p:cNvPr id="3" name="Content Placeholder 2">
             <a:extLst>
               <a:ext uri="{FF2B5EF4-FFF2-40B4-BE49-F238E27FC236}">
-                <a16:creationId xmlns:a16="http://schemas.microsoft.com/office/drawing/2014/main" id="{2CBEA332-205C-F2E0-A668-5C1EFC9A6E4E}"/>
+                <a16:creationId xmlns:a16="http://schemas.microsoft.com/office/drawing/2014/main" id="{DE31025A-2165-11E7-4C06-A1B49102F173}"/>
               </a:ext>
             </a:extLst>
           </p:cNvPr>
@@ -2296,7 +2296,7 @@
           <p:cNvPr id="4" name="Text Placeholder 3">
             <a:extLst>
               <a:ext uri="{FF2B5EF4-FFF2-40B4-BE49-F238E27FC236}">
-                <a16:creationId xmlns:a16="http://schemas.microsoft.com/office/drawing/2014/main" id="{BFB7BA8D-A462-AC4C-D56F-0C87B1B4A55D}"/>
+                <a16:creationId xmlns:a16="http://schemas.microsoft.com/office/drawing/2014/main" id="{FFC4C9B6-482D-320E-DF07-F9E944998D57}"/>
               </a:ext>
             </a:extLst>
           </p:cNvPr>
@@ -2367,7 +2367,7 @@
           <p:cNvPr id="5" name="Date Placeholder 4">
             <a:extLst>
               <a:ext uri="{FF2B5EF4-FFF2-40B4-BE49-F238E27FC236}">
-                <a16:creationId xmlns:a16="http://schemas.microsoft.com/office/drawing/2014/main" id="{197CD761-CC09-A71A-487F-4E9A358F5583}"/>
+                <a16:creationId xmlns:a16="http://schemas.microsoft.com/office/drawing/2014/main" id="{BF3ABEB8-FB01-54FC-6044-7A79D69D62F9}"/>
               </a:ext>
             </a:extLst>
           </p:cNvPr>
@@ -2383,7 +2383,7 @@
           <a:bodyPr/>
           <a:lstStyle/>
           <a:p>
-            <a:fld id="{1403D479-A847-4CF3-8F6E-A4789BE1C28C}" type="datetimeFigureOut">
+            <a:fld id="{5B73EB7D-7B0A-49FB-956D-DA36D9BE86BC}" type="datetimeFigureOut">
               <a:rPr lang="en-US" smtClean="0"/>
               <a:t>4/6/2026</a:t>
             </a:fld>
@@ -2396,7 +2396,7 @@
           <p:cNvPr id="6" name="Footer Placeholder 5">
             <a:extLst>
               <a:ext uri="{FF2B5EF4-FFF2-40B4-BE49-F238E27FC236}">
-                <a16:creationId xmlns:a16="http://schemas.microsoft.com/office/drawing/2014/main" id="{99FE47DC-7FD1-4CD0-B02D-81543FAC94BC}"/>
+                <a16:creationId xmlns:a16="http://schemas.microsoft.com/office/drawing/2014/main" id="{5609FAA9-4C48-AD80-E033-DDDBE6C09033}"/>
               </a:ext>
             </a:extLst>
           </p:cNvPr>
@@ -2421,7 +2421,7 @@
           <p:cNvPr id="7" name="Slide Number Placeholder 6">
             <a:extLst>
               <a:ext uri="{FF2B5EF4-FFF2-40B4-BE49-F238E27FC236}">
-                <a16:creationId xmlns:a16="http://schemas.microsoft.com/office/drawing/2014/main" id="{82530C7C-D4AE-39CC-2C56-1A9659E6FE3A}"/>
+                <a16:creationId xmlns:a16="http://schemas.microsoft.com/office/drawing/2014/main" id="{C35540AC-8482-5215-7F2D-6E0283BD7F98}"/>
               </a:ext>
             </a:extLst>
           </p:cNvPr>
@@ -2437,7 +2437,7 @@
           <a:bodyPr/>
           <a:lstStyle/>
           <a:p>
-            <a:fld id="{6BAE5709-5EE4-4DBE-B94B-3B1DFE4C0812}" type="slidenum">
+            <a:fld id="{E97F7C3F-1559-4CBB-968A-294334B2C34B}" type="slidenum">
               <a:rPr lang="en-US" smtClean="0"/>
               <a:t>‹#›</a:t>
             </a:fld>
@@ -2448,7 +2448,7 @@
     </p:spTree>
     <p:extLst>
       <p:ext uri="{BB962C8B-B14F-4D97-AF65-F5344CB8AC3E}">
-        <p14:creationId xmlns:p14="http://schemas.microsoft.com/office/powerpoint/2010/main" val="2008238761"/>
+        <p14:creationId xmlns:p14="http://schemas.microsoft.com/office/powerpoint/2010/main" val="591662473"/>
       </p:ext>
     </p:extLst>
   </p:cSld>
@@ -2480,7 +2480,7 @@
           <p:cNvPr id="2" name="Title 1">
             <a:extLst>
               <a:ext uri="{FF2B5EF4-FFF2-40B4-BE49-F238E27FC236}">
-                <a16:creationId xmlns:a16="http://schemas.microsoft.com/office/drawing/2014/main" id="{DA258190-33A6-8BEB-1C94-757207DE92FC}"/>
+                <a16:creationId xmlns:a16="http://schemas.microsoft.com/office/drawing/2014/main" id="{DFFF123D-51F9-A8FC-D248-F88598929BEA}"/>
               </a:ext>
             </a:extLst>
           </p:cNvPr>
@@ -2517,7 +2517,7 @@
           <p:cNvPr id="3" name="Picture Placeholder 2">
             <a:extLst>
               <a:ext uri="{FF2B5EF4-FFF2-40B4-BE49-F238E27FC236}">
-                <a16:creationId xmlns:a16="http://schemas.microsoft.com/office/drawing/2014/main" id="{9D059234-81C5-E1A5-7A88-4F55FA458F97}"/>
+                <a16:creationId xmlns:a16="http://schemas.microsoft.com/office/drawing/2014/main" id="{C6DB74FA-4D6F-55C8-888D-8F05D8C66B6C}"/>
               </a:ext>
             </a:extLst>
           </p:cNvPr>
@@ -2584,7 +2584,7 @@
           <p:cNvPr id="4" name="Text Placeholder 3">
             <a:extLst>
               <a:ext uri="{FF2B5EF4-FFF2-40B4-BE49-F238E27FC236}">
-                <a16:creationId xmlns:a16="http://schemas.microsoft.com/office/drawing/2014/main" id="{E9AA9937-BF08-0103-A966-516A2F2DB6BE}"/>
+                <a16:creationId xmlns:a16="http://schemas.microsoft.com/office/drawing/2014/main" id="{5CE632E0-6802-8BD5-C0F7-275A40C794B0}"/>
               </a:ext>
             </a:extLst>
           </p:cNvPr>
@@ -2655,7 +2655,7 @@
           <p:cNvPr id="5" name="Date Placeholder 4">
             <a:extLst>
               <a:ext uri="{FF2B5EF4-FFF2-40B4-BE49-F238E27FC236}">
-                <a16:creationId xmlns:a16="http://schemas.microsoft.com/office/drawing/2014/main" id="{D74DF5EB-F421-EB66-C62B-3D4355B20060}"/>
+                <a16:creationId xmlns:a16="http://schemas.microsoft.com/office/drawing/2014/main" id="{B3A57734-0A0B-951A-5ED8-F35A6A312306}"/>
               </a:ext>
             </a:extLst>
           </p:cNvPr>
@@ -2671,7 +2671,7 @@
           <a:bodyPr/>
           <a:lstStyle/>
           <a:p>
-            <a:fld id="{1403D479-A847-4CF3-8F6E-A4789BE1C28C}" type="datetimeFigureOut">
+            <a:fld id="{5B73EB7D-7B0A-49FB-956D-DA36D9BE86BC}" type="datetimeFigureOut">
               <a:rPr lang="en-US" smtClean="0"/>
               <a:t>4/6/2026</a:t>
             </a:fld>
@@ -2684,7 +2684,7 @@
           <p:cNvPr id="6" name="Footer Placeholder 5">
             <a:extLst>
               <a:ext uri="{FF2B5EF4-FFF2-40B4-BE49-F238E27FC236}">
-                <a16:creationId xmlns:a16="http://schemas.microsoft.com/office/drawing/2014/main" id="{0A33F7AB-96BA-5520-F330-ADB6B62020DA}"/>
+                <a16:creationId xmlns:a16="http://schemas.microsoft.com/office/drawing/2014/main" id="{C11F185B-058E-51BC-08FC-C972696807CC}"/>
               </a:ext>
             </a:extLst>
           </p:cNvPr>
@@ -2709,7 +2709,7 @@
           <p:cNvPr id="7" name="Slide Number Placeholder 6">
             <a:extLst>
               <a:ext uri="{FF2B5EF4-FFF2-40B4-BE49-F238E27FC236}">
-                <a16:creationId xmlns:a16="http://schemas.microsoft.com/office/drawing/2014/main" id="{E7F51E3A-35D5-6D84-329E-6CD8B9E60F17}"/>
+                <a16:creationId xmlns:a16="http://schemas.microsoft.com/office/drawing/2014/main" id="{537F5EFC-99F2-98F7-ED1B-9F6587C63965}"/>
               </a:ext>
             </a:extLst>
           </p:cNvPr>
@@ -2725,7 +2725,7 @@
           <a:bodyPr/>
           <a:lstStyle/>
           <a:p>
-            <a:fld id="{6BAE5709-5EE4-4DBE-B94B-3B1DFE4C0812}" type="slidenum">
+            <a:fld id="{E97F7C3F-1559-4CBB-968A-294334B2C34B}" type="slidenum">
               <a:rPr lang="en-US" smtClean="0"/>
               <a:t>‹#›</a:t>
             </a:fld>
@@ -2736,7 +2736,7 @@
     </p:spTree>
     <p:extLst>
       <p:ext uri="{BB962C8B-B14F-4D97-AF65-F5344CB8AC3E}">
-        <p14:creationId xmlns:p14="http://schemas.microsoft.com/office/powerpoint/2010/main" val="3139911156"/>
+        <p14:creationId xmlns:p14="http://schemas.microsoft.com/office/powerpoint/2010/main" val="3119203166"/>
       </p:ext>
     </p:extLst>
   </p:cSld>
@@ -2773,7 +2773,7 @@
           <p:cNvPr id="2" name="Title Placeholder 1">
             <a:extLst>
               <a:ext uri="{FF2B5EF4-FFF2-40B4-BE49-F238E27FC236}">
-                <a16:creationId xmlns:a16="http://schemas.microsoft.com/office/drawing/2014/main" id="{E9146DB9-50B0-F213-F977-EAEAEE400B3A}"/>
+                <a16:creationId xmlns:a16="http://schemas.microsoft.com/office/drawing/2014/main" id="{BA0B41AD-16F1-FEBE-9436-4FBBCD28B7D4}"/>
               </a:ext>
             </a:extLst>
           </p:cNvPr>
@@ -2811,7 +2811,7 @@
           <p:cNvPr id="3" name="Text Placeholder 2">
             <a:extLst>
               <a:ext uri="{FF2B5EF4-FFF2-40B4-BE49-F238E27FC236}">
-                <a16:creationId xmlns:a16="http://schemas.microsoft.com/office/drawing/2014/main" id="{60BA4E3F-7439-2B6A-CD49-8622F7B7617D}"/>
+                <a16:creationId xmlns:a16="http://schemas.microsoft.com/office/drawing/2014/main" id="{50782CCA-CC41-77BE-2BF3-B3B3A8E523D3}"/>
               </a:ext>
             </a:extLst>
           </p:cNvPr>
@@ -2878,7 +2878,7 @@
           <p:cNvPr id="4" name="Date Placeholder 3">
             <a:extLst>
               <a:ext uri="{FF2B5EF4-FFF2-40B4-BE49-F238E27FC236}">
-                <a16:creationId xmlns:a16="http://schemas.microsoft.com/office/drawing/2014/main" id="{DACCE438-235C-47F3-23FD-F6C9F291704F}"/>
+                <a16:creationId xmlns:a16="http://schemas.microsoft.com/office/drawing/2014/main" id="{BDF55453-7154-63EB-3236-83578D188B46}"/>
               </a:ext>
             </a:extLst>
           </p:cNvPr>
@@ -2912,7 +2912,7 @@
             </a:lvl1pPr>
           </a:lstStyle>
           <a:p>
-            <a:fld id="{1403D479-A847-4CF3-8F6E-A4789BE1C28C}" type="datetimeFigureOut">
+            <a:fld id="{5B73EB7D-7B0A-49FB-956D-DA36D9BE86BC}" type="datetimeFigureOut">
               <a:rPr lang="en-US" smtClean="0"/>
               <a:t>4/6/2026</a:t>
             </a:fld>
@@ -2925,7 +2925,7 @@
           <p:cNvPr id="5" name="Footer Placeholder 4">
             <a:extLst>
               <a:ext uri="{FF2B5EF4-FFF2-40B4-BE49-F238E27FC236}">
-                <a16:creationId xmlns:a16="http://schemas.microsoft.com/office/drawing/2014/main" id="{C68D8F18-62EE-3438-B5FA-9F4BB69C8FFC}"/>
+                <a16:creationId xmlns:a16="http://schemas.microsoft.com/office/drawing/2014/main" id="{6C2B92D7-B3EC-6834-93A2-00E13B880CDA}"/>
               </a:ext>
             </a:extLst>
           </p:cNvPr>
@@ -2968,7 +2968,7 @@
           <p:cNvPr id="6" name="Slide Number Placeholder 5">
             <a:extLst>
               <a:ext uri="{FF2B5EF4-FFF2-40B4-BE49-F238E27FC236}">
-                <a16:creationId xmlns:a16="http://schemas.microsoft.com/office/drawing/2014/main" id="{D6AF577D-9F7F-66ED-A262-31EB2A015C4B}"/>
+                <a16:creationId xmlns:a16="http://schemas.microsoft.com/office/drawing/2014/main" id="{2AD40F38-C389-A194-FB37-D3C0A3B2714A}"/>
               </a:ext>
             </a:extLst>
           </p:cNvPr>
@@ -3002,7 +3002,7 @@
             </a:lvl1pPr>
           </a:lstStyle>
           <a:p>
-            <a:fld id="{6BAE5709-5EE4-4DBE-B94B-3B1DFE4C0812}" type="slidenum">
+            <a:fld id="{E97F7C3F-1559-4CBB-968A-294334B2C34B}" type="slidenum">
               <a:rPr lang="en-US" smtClean="0"/>
               <a:t>‹#›</a:t>
             </a:fld>
@@ -3013,7 +3013,7 @@
     </p:spTree>
     <p:extLst>
       <p:ext uri="{BB962C8B-B14F-4D97-AF65-F5344CB8AC3E}">
-        <p14:creationId xmlns:p14="http://schemas.microsoft.com/office/powerpoint/2010/main" val="1350075904"/>
+        <p14:creationId xmlns:p14="http://schemas.microsoft.com/office/powerpoint/2010/main" val="1304328081"/>
       </p:ext>
     </p:extLst>
   </p:cSld>
@@ -3336,7 +3336,7 @@
           <p:cNvPr id="2" name="Title 1">
             <a:extLst>
               <a:ext uri="{FF2B5EF4-FFF2-40B4-BE49-F238E27FC236}">
-                <a16:creationId xmlns:a16="http://schemas.microsoft.com/office/drawing/2014/main" id="{E7AEF408-FD89-9687-66D1-DAB2A5DA6621}"/>
+                <a16:creationId xmlns:a16="http://schemas.microsoft.com/office/drawing/2014/main" id="{6D0508D7-6434-994C-9D6E-CD375C27E438}"/>
               </a:ext>
             </a:extLst>
           </p:cNvPr>
@@ -3368,7 +3368,7 @@
           <p:cNvPr id="3" name="TextBox 2">
             <a:extLst>
               <a:ext uri="{FF2B5EF4-FFF2-40B4-BE49-F238E27FC236}">
-                <a16:creationId xmlns:a16="http://schemas.microsoft.com/office/drawing/2014/main" id="{7A823A76-8611-B383-C997-3320A78C0ABB}"/>
+                <a16:creationId xmlns:a16="http://schemas.microsoft.com/office/drawing/2014/main" id="{B9035441-7FD7-AB93-649A-F309FE706EF7}"/>
               </a:ext>
             </a:extLst>
           </p:cNvPr>
@@ -3459,7 +3459,7 @@
     </p:spTree>
     <p:extLst>
       <p:ext uri="{BB962C8B-B14F-4D97-AF65-F5344CB8AC3E}">
-        <p14:creationId xmlns:p14="http://schemas.microsoft.com/office/powerpoint/2010/main" val="1093404983"/>
+        <p14:creationId xmlns:p14="http://schemas.microsoft.com/office/powerpoint/2010/main" val="2356384875"/>
       </p:ext>
     </p:extLst>
   </p:cSld>
@@ -3491,7 +3491,7 @@
           <p:cNvPr id="2" name="Title 1">
             <a:extLst>
               <a:ext uri="{FF2B5EF4-FFF2-40B4-BE49-F238E27FC236}">
-                <a16:creationId xmlns:a16="http://schemas.microsoft.com/office/drawing/2014/main" id="{7D3896CB-3504-B9A4-3EE3-072436B68B73}"/>
+                <a16:creationId xmlns:a16="http://schemas.microsoft.com/office/drawing/2014/main" id="{E5BB1566-0724-81F4-07DE-416CC7336CD4}"/>
               </a:ext>
             </a:extLst>
           </p:cNvPr>
@@ -3523,7 +3523,7 @@
           <p:cNvPr id="3" name="TextBox 2">
             <a:extLst>
               <a:ext uri="{FF2B5EF4-FFF2-40B4-BE49-F238E27FC236}">
-                <a16:creationId xmlns:a16="http://schemas.microsoft.com/office/drawing/2014/main" id="{DF393AC6-3A3D-37D3-12B7-073C49C05C8C}"/>
+                <a16:creationId xmlns:a16="http://schemas.microsoft.com/office/drawing/2014/main" id="{6AD3832E-9A38-01C3-1518-37380CD426CB}"/>
               </a:ext>
             </a:extLst>
           </p:cNvPr>
@@ -3558,47 +3558,31 @@
               <a:rPr lang="en-US" sz="2200">
                 <a:latin typeface="Aptos" panose="020B0004020202020204" pitchFamily="34" charset="0"/>
               </a:rPr>
-              <a:t>1. open the GitHub Issue for BUG-20260406-001</a:t>
-            </a:r>
-          </a:p>
-          <a:p>
-            <a:r>
-              <a:rPr lang="en-US" sz="2200">
-                <a:latin typeface="Aptos" panose="020B0004020202020204" pitchFamily="34" charset="0"/>
-              </a:rPr>
-              <a:t>2. fix and retest invoice creation</a:t>
-            </a:r>
-          </a:p>
-          <a:p>
-            <a:r>
-              <a:rPr lang="en-US" sz="2200">
-                <a:latin typeface="Aptos" panose="020B0004020202020204" pitchFamily="34" charset="0"/>
-              </a:rPr>
-              <a:t>3. execute stock, reports, products, and public-catalog UI flows</a:t>
-            </a:r>
-          </a:p>
-          <a:p>
-            <a:r>
-              <a:rPr lang="en-US" sz="2200">
-                <a:latin typeface="Aptos" panose="020B0004020202020204" pitchFamily="34" charset="0"/>
-              </a:rPr>
-              <a:t>4. commit the generated final PDF and PPTX artifacts</a:t>
-            </a:r>
-          </a:p>
-          <a:p>
-            <a:r>
-              <a:rPr lang="en-US" sz="2200">
-                <a:latin typeface="Aptos" panose="020B0004020202020204" pitchFamily="34" charset="0"/>
-              </a:rPr>
-              <a:t>5. commit the generated automation video artifact</a:t>
-            </a:r>
-          </a:p>
-          <a:p>
-            <a:r>
-              <a:rPr lang="en-US" sz="2200">
-                <a:latin typeface="Aptos" panose="020B0004020202020204" pitchFamily="34" charset="0"/>
-              </a:rPr>
-              <a:t>6. add optional cross-browser evidence if Edge is available</a:t>
+              <a:t>1. fix and retest invoice creation through GitHub Issue #1</a:t>
+            </a:r>
+          </a:p>
+          <a:p>
+            <a:r>
+              <a:rPr lang="en-US" sz="2200">
+                <a:latin typeface="Aptos" panose="020B0004020202020204" pitchFamily="34" charset="0"/>
+              </a:rPr>
+              <a:t>2. execute stock, reports, products, and public-catalog UI flows</a:t>
+            </a:r>
+          </a:p>
+          <a:p>
+            <a:r>
+              <a:rPr lang="en-US" sz="2200">
+                <a:latin typeface="Aptos" panose="020B0004020202020204" pitchFamily="34" charset="0"/>
+              </a:rPr>
+              <a:t>3. add optional cross-browser evidence if Edge is available</a:t>
+            </a:r>
+          </a:p>
+          <a:p>
+            <a:r>
+              <a:rPr lang="en-US" sz="2200">
+                <a:latin typeface="Aptos" panose="020B0004020202020204" pitchFamily="34" charset="0"/>
+              </a:rPr>
+              <a:t>4. refresh the report, slides, and metrics only if new execution evidence is added</a:t>
             </a:r>
           </a:p>
           <a:p>
@@ -3686,7 +3670,7 @@
     </p:spTree>
     <p:extLst>
       <p:ext uri="{BB962C8B-B14F-4D97-AF65-F5344CB8AC3E}">
-        <p14:creationId xmlns:p14="http://schemas.microsoft.com/office/powerpoint/2010/main" val="2507029779"/>
+        <p14:creationId xmlns:p14="http://schemas.microsoft.com/office/powerpoint/2010/main" val="5107406"/>
       </p:ext>
     </p:extLst>
   </p:cSld>
@@ -3718,7 +3702,7 @@
           <p:cNvPr id="2" name="Title 1">
             <a:extLst>
               <a:ext uri="{FF2B5EF4-FFF2-40B4-BE49-F238E27FC236}">
-                <a16:creationId xmlns:a16="http://schemas.microsoft.com/office/drawing/2014/main" id="{71B51FF3-B04D-5672-F894-5C5E76E004A6}"/>
+                <a16:creationId xmlns:a16="http://schemas.microsoft.com/office/drawing/2014/main" id="{CC82FE49-E38A-F33B-ACDC-AB1E0F40AF9A}"/>
               </a:ext>
             </a:extLst>
           </p:cNvPr>
@@ -3750,7 +3734,7 @@
           <p:cNvPr id="3" name="TextBox 2">
             <a:extLst>
               <a:ext uri="{FF2B5EF4-FFF2-40B4-BE49-F238E27FC236}">
-                <a16:creationId xmlns:a16="http://schemas.microsoft.com/office/drawing/2014/main" id="{990AB6CA-1738-A76A-170F-88B11A908467}"/>
+                <a16:creationId xmlns:a16="http://schemas.microsoft.com/office/drawing/2014/main" id="{3785592A-75EA-2DE8-1EAF-90DA1109A766}"/>
               </a:ext>
             </a:extLst>
           </p:cNvPr>
@@ -3825,7 +3809,7 @@
     </p:spTree>
     <p:extLst>
       <p:ext uri="{BB962C8B-B14F-4D97-AF65-F5344CB8AC3E}">
-        <p14:creationId xmlns:p14="http://schemas.microsoft.com/office/powerpoint/2010/main" val="833437793"/>
+        <p14:creationId xmlns:p14="http://schemas.microsoft.com/office/powerpoint/2010/main" val="1639513748"/>
       </p:ext>
     </p:extLst>
   </p:cSld>
@@ -3857,7 +3841,7 @@
           <p:cNvPr id="2" name="Title 1">
             <a:extLst>
               <a:ext uri="{FF2B5EF4-FFF2-40B4-BE49-F238E27FC236}">
-                <a16:creationId xmlns:a16="http://schemas.microsoft.com/office/drawing/2014/main" id="{65B85A2B-E87B-096E-5B0E-F177187A648E}"/>
+                <a16:creationId xmlns:a16="http://schemas.microsoft.com/office/drawing/2014/main" id="{AC126338-FB36-5652-8169-60D829926D58}"/>
               </a:ext>
             </a:extLst>
           </p:cNvPr>
@@ -3889,7 +3873,7 @@
           <p:cNvPr id="3" name="TextBox 2">
             <a:extLst>
               <a:ext uri="{FF2B5EF4-FFF2-40B4-BE49-F238E27FC236}">
-                <a16:creationId xmlns:a16="http://schemas.microsoft.com/office/drawing/2014/main" id="{25713BAD-D8CA-7365-46B2-892CA481763A}"/>
+                <a16:creationId xmlns:a16="http://schemas.microsoft.com/office/drawing/2014/main" id="{C8BCE852-0112-B422-A2B9-FA2B278DCAF4}"/>
               </a:ext>
             </a:extLst>
           </p:cNvPr>
@@ -4004,7 +3988,7 @@
     </p:spTree>
     <p:extLst>
       <p:ext uri="{BB962C8B-B14F-4D97-AF65-F5344CB8AC3E}">
-        <p14:creationId xmlns:p14="http://schemas.microsoft.com/office/powerpoint/2010/main" val="2193095689"/>
+        <p14:creationId xmlns:p14="http://schemas.microsoft.com/office/powerpoint/2010/main" val="1826235433"/>
       </p:ext>
     </p:extLst>
   </p:cSld>
@@ -4036,7 +4020,7 @@
           <p:cNvPr id="2" name="Title 1">
             <a:extLst>
               <a:ext uri="{FF2B5EF4-FFF2-40B4-BE49-F238E27FC236}">
-                <a16:creationId xmlns:a16="http://schemas.microsoft.com/office/drawing/2014/main" id="{D33B8192-C5E9-74B2-2F53-AC4BE53CD8EB}"/>
+                <a16:creationId xmlns:a16="http://schemas.microsoft.com/office/drawing/2014/main" id="{1E5E429B-A4D4-32B1-8829-07A9A2119E5E}"/>
               </a:ext>
             </a:extLst>
           </p:cNvPr>
@@ -4068,7 +4052,7 @@
           <p:cNvPr id="3" name="TextBox 2">
             <a:extLst>
               <a:ext uri="{FF2B5EF4-FFF2-40B4-BE49-F238E27FC236}">
-                <a16:creationId xmlns:a16="http://schemas.microsoft.com/office/drawing/2014/main" id="{4C4458D1-0012-613F-DC17-EFF3D5D6AA12}"/>
+                <a16:creationId xmlns:a16="http://schemas.microsoft.com/office/drawing/2014/main" id="{825F0083-E79E-D4CD-3D93-B98D24E98905}"/>
               </a:ext>
             </a:extLst>
           </p:cNvPr>
@@ -4167,7 +4151,7 @@
     </p:spTree>
     <p:extLst>
       <p:ext uri="{BB962C8B-B14F-4D97-AF65-F5344CB8AC3E}">
-        <p14:creationId xmlns:p14="http://schemas.microsoft.com/office/powerpoint/2010/main" val="3555988087"/>
+        <p14:creationId xmlns:p14="http://schemas.microsoft.com/office/powerpoint/2010/main" val="90837247"/>
       </p:ext>
     </p:extLst>
   </p:cSld>
@@ -4199,7 +4183,7 @@
           <p:cNvPr id="2" name="Title 1">
             <a:extLst>
               <a:ext uri="{FF2B5EF4-FFF2-40B4-BE49-F238E27FC236}">
-                <a16:creationId xmlns:a16="http://schemas.microsoft.com/office/drawing/2014/main" id="{C43A5B74-38A0-7540-1C28-6C6CFE41125A}"/>
+                <a16:creationId xmlns:a16="http://schemas.microsoft.com/office/drawing/2014/main" id="{0FD2E701-7A5C-250F-5657-BE6C15AA70A3}"/>
               </a:ext>
             </a:extLst>
           </p:cNvPr>
@@ -4231,7 +4215,7 @@
           <p:cNvPr id="3" name="TextBox 2">
             <a:extLst>
               <a:ext uri="{FF2B5EF4-FFF2-40B4-BE49-F238E27FC236}">
-                <a16:creationId xmlns:a16="http://schemas.microsoft.com/office/drawing/2014/main" id="{2240130A-64E4-309F-A581-0B3F1427C783}"/>
+                <a16:creationId xmlns:a16="http://schemas.microsoft.com/office/drawing/2014/main" id="{E4240C48-B7AA-F07F-7FBC-683FF436B0D7}"/>
               </a:ext>
             </a:extLst>
           </p:cNvPr>
@@ -4338,7 +4322,7 @@
     </p:spTree>
     <p:extLst>
       <p:ext uri="{BB962C8B-B14F-4D97-AF65-F5344CB8AC3E}">
-        <p14:creationId xmlns:p14="http://schemas.microsoft.com/office/powerpoint/2010/main" val="2340284969"/>
+        <p14:creationId xmlns:p14="http://schemas.microsoft.com/office/powerpoint/2010/main" val="1102452476"/>
       </p:ext>
     </p:extLst>
   </p:cSld>
@@ -4370,7 +4354,7 @@
           <p:cNvPr id="2" name="Title 1">
             <a:extLst>
               <a:ext uri="{FF2B5EF4-FFF2-40B4-BE49-F238E27FC236}">
-                <a16:creationId xmlns:a16="http://schemas.microsoft.com/office/drawing/2014/main" id="{31299160-78C7-0DBD-8A77-901F25F5CA56}"/>
+                <a16:creationId xmlns:a16="http://schemas.microsoft.com/office/drawing/2014/main" id="{9DD660EB-1063-0BF5-9B4E-6F6006B01CF2}"/>
               </a:ext>
             </a:extLst>
           </p:cNvPr>
@@ -4402,7 +4386,7 @@
           <p:cNvPr id="3" name="TextBox 2">
             <a:extLst>
               <a:ext uri="{FF2B5EF4-FFF2-40B4-BE49-F238E27FC236}">
-                <a16:creationId xmlns:a16="http://schemas.microsoft.com/office/drawing/2014/main" id="{AF7CC265-1AE8-9C0C-E965-B3D55092BB18}"/>
+                <a16:creationId xmlns:a16="http://schemas.microsoft.com/office/drawing/2014/main" id="{638FD2B1-CB9C-A6F6-9BAD-035F929A3B31}"/>
               </a:ext>
             </a:extLst>
           </p:cNvPr>
@@ -4517,7 +4501,7 @@
     </p:spTree>
     <p:extLst>
       <p:ext uri="{BB962C8B-B14F-4D97-AF65-F5344CB8AC3E}">
-        <p14:creationId xmlns:p14="http://schemas.microsoft.com/office/powerpoint/2010/main" val="1720811817"/>
+        <p14:creationId xmlns:p14="http://schemas.microsoft.com/office/powerpoint/2010/main" val="2377625165"/>
       </p:ext>
     </p:extLst>
   </p:cSld>
@@ -4549,7 +4533,7 @@
           <p:cNvPr id="2" name="Title 1">
             <a:extLst>
               <a:ext uri="{FF2B5EF4-FFF2-40B4-BE49-F238E27FC236}">
-                <a16:creationId xmlns:a16="http://schemas.microsoft.com/office/drawing/2014/main" id="{32892C36-F73E-D039-ACDC-422B84FBFAC7}"/>
+                <a16:creationId xmlns:a16="http://schemas.microsoft.com/office/drawing/2014/main" id="{3A24C8C5-0B5E-AE1C-99A2-E99A89DB9DA4}"/>
               </a:ext>
             </a:extLst>
           </p:cNvPr>
@@ -4581,7 +4565,7 @@
           <p:cNvPr id="3" name="TextBox 2">
             <a:extLst>
               <a:ext uri="{FF2B5EF4-FFF2-40B4-BE49-F238E27FC236}">
-                <a16:creationId xmlns:a16="http://schemas.microsoft.com/office/drawing/2014/main" id="{DD201614-D677-5487-4B8A-8F3AC592531E}"/>
+                <a16:creationId xmlns:a16="http://schemas.microsoft.com/office/drawing/2014/main" id="{F1DB1003-83CC-8A69-B9FD-09A707A6CB41}"/>
               </a:ext>
             </a:extLst>
           </p:cNvPr>
@@ -4698,7 +4682,7 @@
           <p:cNvPr id="5" name="Picture 4">
             <a:extLst>
               <a:ext uri="{FF2B5EF4-FFF2-40B4-BE49-F238E27FC236}">
-                <a16:creationId xmlns:a16="http://schemas.microsoft.com/office/drawing/2014/main" id="{4F28CEBE-FA00-ECA8-BE6B-EFCCB8556CB5}"/>
+                <a16:creationId xmlns:a16="http://schemas.microsoft.com/office/drawing/2014/main" id="{7B904C25-E4D9-C62C-F23C-A2CF3945510F}"/>
               </a:ext>
             </a:extLst>
           </p:cNvPr>
@@ -4732,7 +4716,7 @@
     </p:spTree>
     <p:extLst>
       <p:ext uri="{BB962C8B-B14F-4D97-AF65-F5344CB8AC3E}">
-        <p14:creationId xmlns:p14="http://schemas.microsoft.com/office/powerpoint/2010/main" val="4040960445"/>
+        <p14:creationId xmlns:p14="http://schemas.microsoft.com/office/powerpoint/2010/main" val="152540746"/>
       </p:ext>
     </p:extLst>
   </p:cSld>
@@ -4764,7 +4748,7 @@
           <p:cNvPr id="2" name="Title 1">
             <a:extLst>
               <a:ext uri="{FF2B5EF4-FFF2-40B4-BE49-F238E27FC236}">
-                <a16:creationId xmlns:a16="http://schemas.microsoft.com/office/drawing/2014/main" id="{57C803E9-8E76-3DEB-6D2E-970E042A2F13}"/>
+                <a16:creationId xmlns:a16="http://schemas.microsoft.com/office/drawing/2014/main" id="{CC84FC0F-10C8-46F3-8460-3A8616E25D0D}"/>
               </a:ext>
             </a:extLst>
           </p:cNvPr>
@@ -4796,7 +4780,7 @@
           <p:cNvPr id="3" name="TextBox 2">
             <a:extLst>
               <a:ext uri="{FF2B5EF4-FFF2-40B4-BE49-F238E27FC236}">
-                <a16:creationId xmlns:a16="http://schemas.microsoft.com/office/drawing/2014/main" id="{6359D2AB-2CA8-A9EC-64A7-F477ACBB7CB7}"/>
+                <a16:creationId xmlns:a16="http://schemas.microsoft.com/office/drawing/2014/main" id="{3777F997-021C-FF75-9AD7-D96EAB885711}"/>
               </a:ext>
             </a:extLst>
           </p:cNvPr>
@@ -4908,10 +4892,46 @@
           </a:p>
         </p:txBody>
       </p:sp>
+      <p:pic>
+        <p:nvPicPr>
+          <p:cNvPr id="5" name="Picture 4">
+            <a:extLst>
+              <a:ext uri="{FF2B5EF4-FFF2-40B4-BE49-F238E27FC236}">
+                <a16:creationId xmlns:a16="http://schemas.microsoft.com/office/drawing/2014/main" id="{4901DD80-59CF-E742-E7FF-7AA7D6D71E55}"/>
+              </a:ext>
+            </a:extLst>
+          </p:cNvPr>
+          <p:cNvPicPr>
+            <a:picLocks/>
+          </p:cNvPicPr>
+          <p:nvPr/>
+        </p:nvPicPr>
+        <p:blipFill>
+          <a:blip r:embed="rId2">
+            <a:extLst>
+              <a:ext uri="{28A0092B-C50C-407E-A947-70E740481C1C}">
+                <a14:useLocalDpi xmlns:a14="http://schemas.microsoft.com/office/drawing/2010/main" val="0"/>
+              </a:ext>
+            </a:extLst>
+          </a:blip>
+          <a:stretch>
+            <a:fillRect/>
+          </a:stretch>
+        </p:blipFill>
+        <p:spPr>
+          <a:xfrm>
+            <a:off x="7874000" y="1524000"/>
+            <a:ext cx="7874000" cy="4445000"/>
+          </a:xfrm>
+          <a:prstGeom prst="rect">
+            <a:avLst/>
+          </a:prstGeom>
+        </p:spPr>
+      </p:pic>
     </p:spTree>
     <p:extLst>
       <p:ext uri="{BB962C8B-B14F-4D97-AF65-F5344CB8AC3E}">
-        <p14:creationId xmlns:p14="http://schemas.microsoft.com/office/powerpoint/2010/main" val="494659665"/>
+        <p14:creationId xmlns:p14="http://schemas.microsoft.com/office/powerpoint/2010/main" val="537355378"/>
       </p:ext>
     </p:extLst>
   </p:cSld>
@@ -4943,7 +4963,7 @@
           <p:cNvPr id="2" name="Title 1">
             <a:extLst>
               <a:ext uri="{FF2B5EF4-FFF2-40B4-BE49-F238E27FC236}">
-                <a16:creationId xmlns:a16="http://schemas.microsoft.com/office/drawing/2014/main" id="{DA9ED0A0-096B-54C5-457F-8A1F284AC855}"/>
+                <a16:creationId xmlns:a16="http://schemas.microsoft.com/office/drawing/2014/main" id="{253D446E-79E7-922A-38D6-FAC8BD1F6C43}"/>
               </a:ext>
             </a:extLst>
           </p:cNvPr>
@@ -4975,7 +4995,7 @@
           <p:cNvPr id="3" name="TextBox 2">
             <a:extLst>
               <a:ext uri="{FF2B5EF4-FFF2-40B4-BE49-F238E27FC236}">
-                <a16:creationId xmlns:a16="http://schemas.microsoft.com/office/drawing/2014/main" id="{B155C07F-EA6C-E2DF-FB3D-449EDD4C43F6}"/>
+                <a16:creationId xmlns:a16="http://schemas.microsoft.com/office/drawing/2014/main" id="{3EAAEFE8-2617-6E9D-C247-65A2A8731094}"/>
               </a:ext>
             </a:extLst>
           </p:cNvPr>
@@ -4985,7 +5005,7 @@
         <p:spPr>
           <a:xfrm>
             <a:off x="698500" y="1587500"/>
-            <a:ext cx="6604000" cy="3816429"/>
+            <a:ext cx="6604000" cy="4154984"/>
           </a:xfrm>
           <a:prstGeom prst="rect">
             <a:avLst/>
@@ -5026,6 +5046,14 @@
               <a:rPr lang="en-US" sz="2200">
                 <a:latin typeface="Aptos" panose="020B0004020202020204" pitchFamily="34" charset="0"/>
               </a:rPr>
+              <a:t>tracked in GitHub Issue #1</a:t>
+            </a:r>
+          </a:p>
+          <a:p>
+            <a:r>
+              <a:rPr lang="en-US" sz="2200">
+                <a:latin typeface="Aptos" panose="020B0004020202020204" pitchFamily="34" charset="0"/>
+              </a:rPr>
               <a:t>Closed Observations</a:t>
             </a:r>
           </a:p>
@@ -5087,10 +5115,46 @@
           </a:p>
         </p:txBody>
       </p:sp>
+      <p:pic>
+        <p:nvPicPr>
+          <p:cNvPr id="5" name="Picture 4">
+            <a:extLst>
+              <a:ext uri="{FF2B5EF4-FFF2-40B4-BE49-F238E27FC236}">
+                <a16:creationId xmlns:a16="http://schemas.microsoft.com/office/drawing/2014/main" id="{7551688F-6906-4BE2-05E1-096A046051F4}"/>
+              </a:ext>
+            </a:extLst>
+          </p:cNvPr>
+          <p:cNvPicPr>
+            <a:picLocks/>
+          </p:cNvPicPr>
+          <p:nvPr/>
+        </p:nvPicPr>
+        <p:blipFill>
+          <a:blip r:embed="rId2">
+            <a:extLst>
+              <a:ext uri="{28A0092B-C50C-407E-A947-70E740481C1C}">
+                <a14:useLocalDpi xmlns:a14="http://schemas.microsoft.com/office/drawing/2010/main" val="0"/>
+              </a:ext>
+            </a:extLst>
+          </a:blip>
+          <a:stretch>
+            <a:fillRect/>
+          </a:stretch>
+        </p:blipFill>
+        <p:spPr>
+          <a:xfrm>
+            <a:off x="7874000" y="1524000"/>
+            <a:ext cx="7874000" cy="4445000"/>
+          </a:xfrm>
+          <a:prstGeom prst="rect">
+            <a:avLst/>
+          </a:prstGeom>
+        </p:spPr>
+      </p:pic>
     </p:spTree>
     <p:extLst>
       <p:ext uri="{BB962C8B-B14F-4D97-AF65-F5344CB8AC3E}">
-        <p14:creationId xmlns:p14="http://schemas.microsoft.com/office/powerpoint/2010/main" val="2371999054"/>
+        <p14:creationId xmlns:p14="http://schemas.microsoft.com/office/powerpoint/2010/main" val="3482193108"/>
       </p:ext>
     </p:extLst>
   </p:cSld>
@@ -5122,7 +5186,7 @@
           <p:cNvPr id="2" name="Title 1">
             <a:extLst>
               <a:ext uri="{FF2B5EF4-FFF2-40B4-BE49-F238E27FC236}">
-                <a16:creationId xmlns:a16="http://schemas.microsoft.com/office/drawing/2014/main" id="{8169ABB0-C4EC-556D-505E-950CA533366D}"/>
+                <a16:creationId xmlns:a16="http://schemas.microsoft.com/office/drawing/2014/main" id="{349BC4BE-6EB4-A828-0EC8-784ADED82E04}"/>
               </a:ext>
             </a:extLst>
           </p:cNvPr>
@@ -5154,7 +5218,7 @@
           <p:cNvPr id="3" name="TextBox 2">
             <a:extLst>
               <a:ext uri="{FF2B5EF4-FFF2-40B4-BE49-F238E27FC236}">
-                <a16:creationId xmlns:a16="http://schemas.microsoft.com/office/drawing/2014/main" id="{E2A124F3-71D0-808E-07EF-E76B4E711408}"/>
+                <a16:creationId xmlns:a16="http://schemas.microsoft.com/office/drawing/2014/main" id="{B32AD166-5238-ED40-A0FE-8725D591A66A}"/>
               </a:ext>
             </a:extLst>
           </p:cNvPr>
@@ -5245,7 +5309,7 @@
     </p:spTree>
     <p:extLst>
       <p:ext uri="{BB962C8B-B14F-4D97-AF65-F5344CB8AC3E}">
-        <p14:creationId xmlns:p14="http://schemas.microsoft.com/office/powerpoint/2010/main" val="2227144958"/>
+        <p14:creationId xmlns:p14="http://schemas.microsoft.com/office/powerpoint/2010/main" val="1807001261"/>
       </p:ext>
     </p:extLst>
   </p:cSld>

--- a/Report Test subject/slides/Powered by GPT - Software Quality Verification - Presentation.pptx
+++ b/Report Test subject/slides/Powered by GPT - Software Quality Verification - Presentation.pptx
@@ -139,7 +139,7 @@
           <p:cNvPr id="2" name="Title 1">
             <a:extLst>
               <a:ext uri="{FF2B5EF4-FFF2-40B4-BE49-F238E27FC236}">
-                <a16:creationId xmlns:a16="http://schemas.microsoft.com/office/drawing/2014/main" id="{4721837E-94CC-5BAF-2116-BAA6DF8153F0}"/>
+                <a16:creationId xmlns:a16="http://schemas.microsoft.com/office/drawing/2014/main" id="{449D216C-9887-6F63-6BCB-E9387E97A44C}"/>
               </a:ext>
             </a:extLst>
           </p:cNvPr>
@@ -176,7 +176,7 @@
           <p:cNvPr id="3" name="Subtitle 2">
             <a:extLst>
               <a:ext uri="{FF2B5EF4-FFF2-40B4-BE49-F238E27FC236}">
-                <a16:creationId xmlns:a16="http://schemas.microsoft.com/office/drawing/2014/main" id="{7A5A5EC8-54E0-EF3B-A420-071941CD92B5}"/>
+                <a16:creationId xmlns:a16="http://schemas.microsoft.com/office/drawing/2014/main" id="{3A724123-CF2F-49BE-5D72-7F37E5083DF5}"/>
               </a:ext>
             </a:extLst>
           </p:cNvPr>
@@ -246,7 +246,7 @@
           <p:cNvPr id="4" name="Date Placeholder 3">
             <a:extLst>
               <a:ext uri="{FF2B5EF4-FFF2-40B4-BE49-F238E27FC236}">
-                <a16:creationId xmlns:a16="http://schemas.microsoft.com/office/drawing/2014/main" id="{74886828-07F9-E819-3F0B-F418295964CB}"/>
+                <a16:creationId xmlns:a16="http://schemas.microsoft.com/office/drawing/2014/main" id="{E419FBF0-0527-D923-7DBB-23E5F83B4592}"/>
               </a:ext>
             </a:extLst>
           </p:cNvPr>
@@ -262,9 +262,9 @@
           <a:bodyPr/>
           <a:lstStyle/>
           <a:p>
-            <a:fld id="{5E1AD7E0-2CFB-4ADC-8446-98BCFBE02AC8}" type="datetimeFigureOut">
+            <a:fld id="{36EEF154-6F20-4A33-904F-9409835DBC1C}" type="datetimeFigureOut">
               <a:rPr lang="en-US" smtClean="0"/>
-              <a:t>4/11/2026</a:t>
+              <a:t>4/12/2026</a:t>
             </a:fld>
             <a:endParaRPr lang="en-US"/>
           </a:p>
@@ -275,7 +275,7 @@
           <p:cNvPr id="5" name="Footer Placeholder 4">
             <a:extLst>
               <a:ext uri="{FF2B5EF4-FFF2-40B4-BE49-F238E27FC236}">
-                <a16:creationId xmlns:a16="http://schemas.microsoft.com/office/drawing/2014/main" id="{E5C2D7F1-9E76-5634-B5F2-959842E14BD9}"/>
+                <a16:creationId xmlns:a16="http://schemas.microsoft.com/office/drawing/2014/main" id="{037E7EC8-0C7A-9D04-D9A5-C955C4F299DE}"/>
               </a:ext>
             </a:extLst>
           </p:cNvPr>
@@ -300,7 +300,7 @@
           <p:cNvPr id="6" name="Slide Number Placeholder 5">
             <a:extLst>
               <a:ext uri="{FF2B5EF4-FFF2-40B4-BE49-F238E27FC236}">
-                <a16:creationId xmlns:a16="http://schemas.microsoft.com/office/drawing/2014/main" id="{56CA8C9F-CB54-AB9C-2337-BF971AB08C32}"/>
+                <a16:creationId xmlns:a16="http://schemas.microsoft.com/office/drawing/2014/main" id="{3663AB7C-0320-9D65-0036-0B7053759EE4}"/>
               </a:ext>
             </a:extLst>
           </p:cNvPr>
@@ -316,7 +316,7 @@
           <a:bodyPr/>
           <a:lstStyle/>
           <a:p>
-            <a:fld id="{6A4E5D37-2CDD-459B-8F61-978B4BD3D717}" type="slidenum">
+            <a:fld id="{C2BE6585-91AE-4142-9F0E-3B6BF16C38C9}" type="slidenum">
               <a:rPr lang="en-US" smtClean="0"/>
               <a:t>‹#›</a:t>
             </a:fld>
@@ -327,7 +327,7 @@
     </p:spTree>
     <p:extLst>
       <p:ext uri="{BB962C8B-B14F-4D97-AF65-F5344CB8AC3E}">
-        <p14:creationId xmlns:p14="http://schemas.microsoft.com/office/powerpoint/2010/main" val="2767093255"/>
+        <p14:creationId xmlns:p14="http://schemas.microsoft.com/office/powerpoint/2010/main" val="3830535221"/>
       </p:ext>
     </p:extLst>
   </p:cSld>
@@ -359,7 +359,7 @@
           <p:cNvPr id="2" name="Title 1">
             <a:extLst>
               <a:ext uri="{FF2B5EF4-FFF2-40B4-BE49-F238E27FC236}">
-                <a16:creationId xmlns:a16="http://schemas.microsoft.com/office/drawing/2014/main" id="{3A33AADA-B053-016B-ABFD-972D7B8E43A0}"/>
+                <a16:creationId xmlns:a16="http://schemas.microsoft.com/office/drawing/2014/main" id="{2E66481B-68B4-A038-9706-4A655F4D0BC7}"/>
               </a:ext>
             </a:extLst>
           </p:cNvPr>
@@ -387,7 +387,7 @@
           <p:cNvPr id="3" name="Vertical Text Placeholder 2">
             <a:extLst>
               <a:ext uri="{FF2B5EF4-FFF2-40B4-BE49-F238E27FC236}">
-                <a16:creationId xmlns:a16="http://schemas.microsoft.com/office/drawing/2014/main" id="{B4CC8FA5-7FD4-E9CB-93C2-F792DC152CEC}"/>
+                <a16:creationId xmlns:a16="http://schemas.microsoft.com/office/drawing/2014/main" id="{BE629B23-D3BA-04AB-53FB-2124FF7657D9}"/>
               </a:ext>
             </a:extLst>
           </p:cNvPr>
@@ -444,7 +444,7 @@
           <p:cNvPr id="4" name="Date Placeholder 3">
             <a:extLst>
               <a:ext uri="{FF2B5EF4-FFF2-40B4-BE49-F238E27FC236}">
-                <a16:creationId xmlns:a16="http://schemas.microsoft.com/office/drawing/2014/main" id="{8555CE02-9855-29F7-9E3F-8151F7F83DC2}"/>
+                <a16:creationId xmlns:a16="http://schemas.microsoft.com/office/drawing/2014/main" id="{A05A2D17-561D-418A-768B-0F24210F4490}"/>
               </a:ext>
             </a:extLst>
           </p:cNvPr>
@@ -460,9 +460,9 @@
           <a:bodyPr/>
           <a:lstStyle/>
           <a:p>
-            <a:fld id="{5E1AD7E0-2CFB-4ADC-8446-98BCFBE02AC8}" type="datetimeFigureOut">
+            <a:fld id="{36EEF154-6F20-4A33-904F-9409835DBC1C}" type="datetimeFigureOut">
               <a:rPr lang="en-US" smtClean="0"/>
-              <a:t>4/11/2026</a:t>
+              <a:t>4/12/2026</a:t>
             </a:fld>
             <a:endParaRPr lang="en-US"/>
           </a:p>
@@ -473,7 +473,7 @@
           <p:cNvPr id="5" name="Footer Placeholder 4">
             <a:extLst>
               <a:ext uri="{FF2B5EF4-FFF2-40B4-BE49-F238E27FC236}">
-                <a16:creationId xmlns:a16="http://schemas.microsoft.com/office/drawing/2014/main" id="{B6286069-F41D-251C-00A9-B7F29B56C717}"/>
+                <a16:creationId xmlns:a16="http://schemas.microsoft.com/office/drawing/2014/main" id="{D23B0800-EDCB-7A73-7240-21EC872E6A90}"/>
               </a:ext>
             </a:extLst>
           </p:cNvPr>
@@ -498,7 +498,7 @@
           <p:cNvPr id="6" name="Slide Number Placeholder 5">
             <a:extLst>
               <a:ext uri="{FF2B5EF4-FFF2-40B4-BE49-F238E27FC236}">
-                <a16:creationId xmlns:a16="http://schemas.microsoft.com/office/drawing/2014/main" id="{3D2F1752-04DA-4EDB-1E95-EC32927B6C75}"/>
+                <a16:creationId xmlns:a16="http://schemas.microsoft.com/office/drawing/2014/main" id="{B602A9CE-14CA-3AC1-D839-C658B3CC65D1}"/>
               </a:ext>
             </a:extLst>
           </p:cNvPr>
@@ -514,7 +514,7 @@
           <a:bodyPr/>
           <a:lstStyle/>
           <a:p>
-            <a:fld id="{6A4E5D37-2CDD-459B-8F61-978B4BD3D717}" type="slidenum">
+            <a:fld id="{C2BE6585-91AE-4142-9F0E-3B6BF16C38C9}" type="slidenum">
               <a:rPr lang="en-US" smtClean="0"/>
               <a:t>‹#›</a:t>
             </a:fld>
@@ -525,7 +525,7 @@
     </p:spTree>
     <p:extLst>
       <p:ext uri="{BB962C8B-B14F-4D97-AF65-F5344CB8AC3E}">
-        <p14:creationId xmlns:p14="http://schemas.microsoft.com/office/powerpoint/2010/main" val="3678412257"/>
+        <p14:creationId xmlns:p14="http://schemas.microsoft.com/office/powerpoint/2010/main" val="1703044614"/>
       </p:ext>
     </p:extLst>
   </p:cSld>
@@ -557,7 +557,7 @@
           <p:cNvPr id="2" name="Vertical Title 1">
             <a:extLst>
               <a:ext uri="{FF2B5EF4-FFF2-40B4-BE49-F238E27FC236}">
-                <a16:creationId xmlns:a16="http://schemas.microsoft.com/office/drawing/2014/main" id="{625FC241-61C6-67FF-E744-0D0CD1D8765A}"/>
+                <a16:creationId xmlns:a16="http://schemas.microsoft.com/office/drawing/2014/main" id="{565D4820-03E3-30E6-FF86-5471D0A84AE3}"/>
               </a:ext>
             </a:extLst>
           </p:cNvPr>
@@ -590,7 +590,7 @@
           <p:cNvPr id="3" name="Vertical Text Placeholder 2">
             <a:extLst>
               <a:ext uri="{FF2B5EF4-FFF2-40B4-BE49-F238E27FC236}">
-                <a16:creationId xmlns:a16="http://schemas.microsoft.com/office/drawing/2014/main" id="{416EE337-DB27-9D4C-2F0F-8973AA96AE80}"/>
+                <a16:creationId xmlns:a16="http://schemas.microsoft.com/office/drawing/2014/main" id="{38F88718-786C-00CB-EDE4-94DA7AEF0C2F}"/>
               </a:ext>
             </a:extLst>
           </p:cNvPr>
@@ -652,7 +652,7 @@
           <p:cNvPr id="4" name="Date Placeholder 3">
             <a:extLst>
               <a:ext uri="{FF2B5EF4-FFF2-40B4-BE49-F238E27FC236}">
-                <a16:creationId xmlns:a16="http://schemas.microsoft.com/office/drawing/2014/main" id="{481BA9FD-4B68-2200-065C-66B12AFB6303}"/>
+                <a16:creationId xmlns:a16="http://schemas.microsoft.com/office/drawing/2014/main" id="{429DF497-25B6-5278-93F0-AF4D47A3977A}"/>
               </a:ext>
             </a:extLst>
           </p:cNvPr>
@@ -668,9 +668,9 @@
           <a:bodyPr/>
           <a:lstStyle/>
           <a:p>
-            <a:fld id="{5E1AD7E0-2CFB-4ADC-8446-98BCFBE02AC8}" type="datetimeFigureOut">
+            <a:fld id="{36EEF154-6F20-4A33-904F-9409835DBC1C}" type="datetimeFigureOut">
               <a:rPr lang="en-US" smtClean="0"/>
-              <a:t>4/11/2026</a:t>
+              <a:t>4/12/2026</a:t>
             </a:fld>
             <a:endParaRPr lang="en-US"/>
           </a:p>
@@ -681,7 +681,7 @@
           <p:cNvPr id="5" name="Footer Placeholder 4">
             <a:extLst>
               <a:ext uri="{FF2B5EF4-FFF2-40B4-BE49-F238E27FC236}">
-                <a16:creationId xmlns:a16="http://schemas.microsoft.com/office/drawing/2014/main" id="{6285295E-CEBE-0BA9-A97A-E0FFA2A67240}"/>
+                <a16:creationId xmlns:a16="http://schemas.microsoft.com/office/drawing/2014/main" id="{E4936FE7-3D16-222A-3E4B-9940D0C5651C}"/>
               </a:ext>
             </a:extLst>
           </p:cNvPr>
@@ -706,7 +706,7 @@
           <p:cNvPr id="6" name="Slide Number Placeholder 5">
             <a:extLst>
               <a:ext uri="{FF2B5EF4-FFF2-40B4-BE49-F238E27FC236}">
-                <a16:creationId xmlns:a16="http://schemas.microsoft.com/office/drawing/2014/main" id="{68AB2A0B-CE23-63B0-1E14-84F18A4BE76E}"/>
+                <a16:creationId xmlns:a16="http://schemas.microsoft.com/office/drawing/2014/main" id="{E52C1BCF-2DF2-C169-3996-54294AE06ECC}"/>
               </a:ext>
             </a:extLst>
           </p:cNvPr>
@@ -722,7 +722,7 @@
           <a:bodyPr/>
           <a:lstStyle/>
           <a:p>
-            <a:fld id="{6A4E5D37-2CDD-459B-8F61-978B4BD3D717}" type="slidenum">
+            <a:fld id="{C2BE6585-91AE-4142-9F0E-3B6BF16C38C9}" type="slidenum">
               <a:rPr lang="en-US" smtClean="0"/>
               <a:t>‹#›</a:t>
             </a:fld>
@@ -733,7 +733,7 @@
     </p:spTree>
     <p:extLst>
       <p:ext uri="{BB962C8B-B14F-4D97-AF65-F5344CB8AC3E}">
-        <p14:creationId xmlns:p14="http://schemas.microsoft.com/office/powerpoint/2010/main" val="649515060"/>
+        <p14:creationId xmlns:p14="http://schemas.microsoft.com/office/powerpoint/2010/main" val="777861937"/>
       </p:ext>
     </p:extLst>
   </p:cSld>
@@ -765,7 +765,7 @@
           <p:cNvPr id="2" name="Title 1">
             <a:extLst>
               <a:ext uri="{FF2B5EF4-FFF2-40B4-BE49-F238E27FC236}">
-                <a16:creationId xmlns:a16="http://schemas.microsoft.com/office/drawing/2014/main" id="{08B3EF1A-D940-9239-C48B-906C3C464025}"/>
+                <a16:creationId xmlns:a16="http://schemas.microsoft.com/office/drawing/2014/main" id="{0DBD6EA7-035E-C447-96EE-C72B33BCEA43}"/>
               </a:ext>
             </a:extLst>
           </p:cNvPr>
@@ -793,7 +793,7 @@
           <p:cNvPr id="3" name="Content Placeholder 2">
             <a:extLst>
               <a:ext uri="{FF2B5EF4-FFF2-40B4-BE49-F238E27FC236}">
-                <a16:creationId xmlns:a16="http://schemas.microsoft.com/office/drawing/2014/main" id="{41FB54A3-C175-85DB-79FD-45C2F29CE1D6}"/>
+                <a16:creationId xmlns:a16="http://schemas.microsoft.com/office/drawing/2014/main" id="{29AF512A-6392-F8C2-B405-F0298D02FEC2}"/>
               </a:ext>
             </a:extLst>
           </p:cNvPr>
@@ -850,7 +850,7 @@
           <p:cNvPr id="4" name="Date Placeholder 3">
             <a:extLst>
               <a:ext uri="{FF2B5EF4-FFF2-40B4-BE49-F238E27FC236}">
-                <a16:creationId xmlns:a16="http://schemas.microsoft.com/office/drawing/2014/main" id="{B7582C9B-46B9-56F1-2C34-54C614B08109}"/>
+                <a16:creationId xmlns:a16="http://schemas.microsoft.com/office/drawing/2014/main" id="{B474AD0D-DF7D-B448-7E5D-D696CE225266}"/>
               </a:ext>
             </a:extLst>
           </p:cNvPr>
@@ -866,9 +866,9 @@
           <a:bodyPr/>
           <a:lstStyle/>
           <a:p>
-            <a:fld id="{5E1AD7E0-2CFB-4ADC-8446-98BCFBE02AC8}" type="datetimeFigureOut">
+            <a:fld id="{36EEF154-6F20-4A33-904F-9409835DBC1C}" type="datetimeFigureOut">
               <a:rPr lang="en-US" smtClean="0"/>
-              <a:t>4/11/2026</a:t>
+              <a:t>4/12/2026</a:t>
             </a:fld>
             <a:endParaRPr lang="en-US"/>
           </a:p>
@@ -879,7 +879,7 @@
           <p:cNvPr id="5" name="Footer Placeholder 4">
             <a:extLst>
               <a:ext uri="{FF2B5EF4-FFF2-40B4-BE49-F238E27FC236}">
-                <a16:creationId xmlns:a16="http://schemas.microsoft.com/office/drawing/2014/main" id="{17DC9874-87A9-7CE8-86B9-7DB1F9B153EB}"/>
+                <a16:creationId xmlns:a16="http://schemas.microsoft.com/office/drawing/2014/main" id="{3BF249B4-2734-F613-49DF-BC9A567C6C17}"/>
               </a:ext>
             </a:extLst>
           </p:cNvPr>
@@ -904,7 +904,7 @@
           <p:cNvPr id="6" name="Slide Number Placeholder 5">
             <a:extLst>
               <a:ext uri="{FF2B5EF4-FFF2-40B4-BE49-F238E27FC236}">
-                <a16:creationId xmlns:a16="http://schemas.microsoft.com/office/drawing/2014/main" id="{2D7DC37E-7590-8FDF-6391-33AE8CEB7327}"/>
+                <a16:creationId xmlns:a16="http://schemas.microsoft.com/office/drawing/2014/main" id="{06CAAEF8-5584-0D94-EFF6-1C9B19CF58B7}"/>
               </a:ext>
             </a:extLst>
           </p:cNvPr>
@@ -920,7 +920,7 @@
           <a:bodyPr/>
           <a:lstStyle/>
           <a:p>
-            <a:fld id="{6A4E5D37-2CDD-459B-8F61-978B4BD3D717}" type="slidenum">
+            <a:fld id="{C2BE6585-91AE-4142-9F0E-3B6BF16C38C9}" type="slidenum">
               <a:rPr lang="en-US" smtClean="0"/>
               <a:t>‹#›</a:t>
             </a:fld>
@@ -931,7 +931,7 @@
     </p:spTree>
     <p:extLst>
       <p:ext uri="{BB962C8B-B14F-4D97-AF65-F5344CB8AC3E}">
-        <p14:creationId xmlns:p14="http://schemas.microsoft.com/office/powerpoint/2010/main" val="1245290020"/>
+        <p14:creationId xmlns:p14="http://schemas.microsoft.com/office/powerpoint/2010/main" val="2382960799"/>
       </p:ext>
     </p:extLst>
   </p:cSld>
@@ -963,7 +963,7 @@
           <p:cNvPr id="2" name="Title 1">
             <a:extLst>
               <a:ext uri="{FF2B5EF4-FFF2-40B4-BE49-F238E27FC236}">
-                <a16:creationId xmlns:a16="http://schemas.microsoft.com/office/drawing/2014/main" id="{5C2B4358-7F96-009D-0DE3-931B17F051C5}"/>
+                <a16:creationId xmlns:a16="http://schemas.microsoft.com/office/drawing/2014/main" id="{54691C4B-7717-E5CF-A719-AB48C36C7303}"/>
               </a:ext>
             </a:extLst>
           </p:cNvPr>
@@ -1000,7 +1000,7 @@
           <p:cNvPr id="3" name="Text Placeholder 2">
             <a:extLst>
               <a:ext uri="{FF2B5EF4-FFF2-40B4-BE49-F238E27FC236}">
-                <a16:creationId xmlns:a16="http://schemas.microsoft.com/office/drawing/2014/main" id="{6F0604E0-14F4-AF60-B14C-80CFE0029EB1}"/>
+                <a16:creationId xmlns:a16="http://schemas.microsoft.com/office/drawing/2014/main" id="{FC33F873-2D69-5A17-3901-8A08AD4EAE01}"/>
               </a:ext>
             </a:extLst>
           </p:cNvPr>
@@ -1125,7 +1125,7 @@
           <p:cNvPr id="4" name="Date Placeholder 3">
             <a:extLst>
               <a:ext uri="{FF2B5EF4-FFF2-40B4-BE49-F238E27FC236}">
-                <a16:creationId xmlns:a16="http://schemas.microsoft.com/office/drawing/2014/main" id="{1340F60D-6557-0C31-1416-A10A2F282313}"/>
+                <a16:creationId xmlns:a16="http://schemas.microsoft.com/office/drawing/2014/main" id="{64BBB6F4-A66B-3D7D-AADC-9C4B11B5C199}"/>
               </a:ext>
             </a:extLst>
           </p:cNvPr>
@@ -1141,9 +1141,9 @@
           <a:bodyPr/>
           <a:lstStyle/>
           <a:p>
-            <a:fld id="{5E1AD7E0-2CFB-4ADC-8446-98BCFBE02AC8}" type="datetimeFigureOut">
+            <a:fld id="{36EEF154-6F20-4A33-904F-9409835DBC1C}" type="datetimeFigureOut">
               <a:rPr lang="en-US" smtClean="0"/>
-              <a:t>4/11/2026</a:t>
+              <a:t>4/12/2026</a:t>
             </a:fld>
             <a:endParaRPr lang="en-US"/>
           </a:p>
@@ -1154,7 +1154,7 @@
           <p:cNvPr id="5" name="Footer Placeholder 4">
             <a:extLst>
               <a:ext uri="{FF2B5EF4-FFF2-40B4-BE49-F238E27FC236}">
-                <a16:creationId xmlns:a16="http://schemas.microsoft.com/office/drawing/2014/main" id="{7BDAA8F3-0FFA-2414-13B6-045E22460B5A}"/>
+                <a16:creationId xmlns:a16="http://schemas.microsoft.com/office/drawing/2014/main" id="{8D2B9E0B-5535-0F6E-93EB-B00E9EA3FE4B}"/>
               </a:ext>
             </a:extLst>
           </p:cNvPr>
@@ -1179,7 +1179,7 @@
           <p:cNvPr id="6" name="Slide Number Placeholder 5">
             <a:extLst>
               <a:ext uri="{FF2B5EF4-FFF2-40B4-BE49-F238E27FC236}">
-                <a16:creationId xmlns:a16="http://schemas.microsoft.com/office/drawing/2014/main" id="{D3D02C12-3D3B-4046-2F7E-8784C5C2C45A}"/>
+                <a16:creationId xmlns:a16="http://schemas.microsoft.com/office/drawing/2014/main" id="{90BC43BF-1133-630D-D45E-AA251EF3228F}"/>
               </a:ext>
             </a:extLst>
           </p:cNvPr>
@@ -1195,7 +1195,7 @@
           <a:bodyPr/>
           <a:lstStyle/>
           <a:p>
-            <a:fld id="{6A4E5D37-2CDD-459B-8F61-978B4BD3D717}" type="slidenum">
+            <a:fld id="{C2BE6585-91AE-4142-9F0E-3B6BF16C38C9}" type="slidenum">
               <a:rPr lang="en-US" smtClean="0"/>
               <a:t>‹#›</a:t>
             </a:fld>
@@ -1206,7 +1206,7 @@
     </p:spTree>
     <p:extLst>
       <p:ext uri="{BB962C8B-B14F-4D97-AF65-F5344CB8AC3E}">
-        <p14:creationId xmlns:p14="http://schemas.microsoft.com/office/powerpoint/2010/main" val="3357656560"/>
+        <p14:creationId xmlns:p14="http://schemas.microsoft.com/office/powerpoint/2010/main" val="285950305"/>
       </p:ext>
     </p:extLst>
   </p:cSld>
@@ -1238,7 +1238,7 @@
           <p:cNvPr id="2" name="Title 1">
             <a:extLst>
               <a:ext uri="{FF2B5EF4-FFF2-40B4-BE49-F238E27FC236}">
-                <a16:creationId xmlns:a16="http://schemas.microsoft.com/office/drawing/2014/main" id="{23801F44-5C34-AC56-D889-CD675ABEB02C}"/>
+                <a16:creationId xmlns:a16="http://schemas.microsoft.com/office/drawing/2014/main" id="{0550C439-F75E-E2EF-4724-329D0A16142C}"/>
               </a:ext>
             </a:extLst>
           </p:cNvPr>
@@ -1266,7 +1266,7 @@
           <p:cNvPr id="3" name="Content Placeholder 2">
             <a:extLst>
               <a:ext uri="{FF2B5EF4-FFF2-40B4-BE49-F238E27FC236}">
-                <a16:creationId xmlns:a16="http://schemas.microsoft.com/office/drawing/2014/main" id="{001EDB74-37FC-48E2-39D5-6E4E5FB859A5}"/>
+                <a16:creationId xmlns:a16="http://schemas.microsoft.com/office/drawing/2014/main" id="{A928AB3F-35E7-C46B-F6D8-54C0F18BFCCA}"/>
               </a:ext>
             </a:extLst>
           </p:cNvPr>
@@ -1328,7 +1328,7 @@
           <p:cNvPr id="4" name="Content Placeholder 3">
             <a:extLst>
               <a:ext uri="{FF2B5EF4-FFF2-40B4-BE49-F238E27FC236}">
-                <a16:creationId xmlns:a16="http://schemas.microsoft.com/office/drawing/2014/main" id="{022F55C2-F5D0-1E14-2E78-43B5B109F978}"/>
+                <a16:creationId xmlns:a16="http://schemas.microsoft.com/office/drawing/2014/main" id="{74F2E4F9-A7DF-BB84-181A-3AE04C8361C5}"/>
               </a:ext>
             </a:extLst>
           </p:cNvPr>
@@ -1390,7 +1390,7 @@
           <p:cNvPr id="5" name="Date Placeholder 4">
             <a:extLst>
               <a:ext uri="{FF2B5EF4-FFF2-40B4-BE49-F238E27FC236}">
-                <a16:creationId xmlns:a16="http://schemas.microsoft.com/office/drawing/2014/main" id="{EAFFD533-FDC5-5FC9-72CA-4039A26D2917}"/>
+                <a16:creationId xmlns:a16="http://schemas.microsoft.com/office/drawing/2014/main" id="{B748FB37-A373-BFC9-EB44-AFA5C9F82D2D}"/>
               </a:ext>
             </a:extLst>
           </p:cNvPr>
@@ -1406,9 +1406,9 @@
           <a:bodyPr/>
           <a:lstStyle/>
           <a:p>
-            <a:fld id="{5E1AD7E0-2CFB-4ADC-8446-98BCFBE02AC8}" type="datetimeFigureOut">
+            <a:fld id="{36EEF154-6F20-4A33-904F-9409835DBC1C}" type="datetimeFigureOut">
               <a:rPr lang="en-US" smtClean="0"/>
-              <a:t>4/11/2026</a:t>
+              <a:t>4/12/2026</a:t>
             </a:fld>
             <a:endParaRPr lang="en-US"/>
           </a:p>
@@ -1419,7 +1419,7 @@
           <p:cNvPr id="6" name="Footer Placeholder 5">
             <a:extLst>
               <a:ext uri="{FF2B5EF4-FFF2-40B4-BE49-F238E27FC236}">
-                <a16:creationId xmlns:a16="http://schemas.microsoft.com/office/drawing/2014/main" id="{492F7369-DBD6-35A2-F008-9E46A1A8BB31}"/>
+                <a16:creationId xmlns:a16="http://schemas.microsoft.com/office/drawing/2014/main" id="{2087F9A1-AB10-16EB-1136-701F40A72E32}"/>
               </a:ext>
             </a:extLst>
           </p:cNvPr>
@@ -1444,7 +1444,7 @@
           <p:cNvPr id="7" name="Slide Number Placeholder 6">
             <a:extLst>
               <a:ext uri="{FF2B5EF4-FFF2-40B4-BE49-F238E27FC236}">
-                <a16:creationId xmlns:a16="http://schemas.microsoft.com/office/drawing/2014/main" id="{5156CD40-CDBA-BFAA-CAE9-11656891F7E9}"/>
+                <a16:creationId xmlns:a16="http://schemas.microsoft.com/office/drawing/2014/main" id="{00094290-1E90-CD6D-4911-4A849C0EBE68}"/>
               </a:ext>
             </a:extLst>
           </p:cNvPr>
@@ -1460,7 +1460,7 @@
           <a:bodyPr/>
           <a:lstStyle/>
           <a:p>
-            <a:fld id="{6A4E5D37-2CDD-459B-8F61-978B4BD3D717}" type="slidenum">
+            <a:fld id="{C2BE6585-91AE-4142-9F0E-3B6BF16C38C9}" type="slidenum">
               <a:rPr lang="en-US" smtClean="0"/>
               <a:t>‹#›</a:t>
             </a:fld>
@@ -1471,7 +1471,7 @@
     </p:spTree>
     <p:extLst>
       <p:ext uri="{BB962C8B-B14F-4D97-AF65-F5344CB8AC3E}">
-        <p14:creationId xmlns:p14="http://schemas.microsoft.com/office/powerpoint/2010/main" val="3948039432"/>
+        <p14:creationId xmlns:p14="http://schemas.microsoft.com/office/powerpoint/2010/main" val="2376008830"/>
       </p:ext>
     </p:extLst>
   </p:cSld>
@@ -1503,7 +1503,7 @@
           <p:cNvPr id="2" name="Title 1">
             <a:extLst>
               <a:ext uri="{FF2B5EF4-FFF2-40B4-BE49-F238E27FC236}">
-                <a16:creationId xmlns:a16="http://schemas.microsoft.com/office/drawing/2014/main" id="{0A8CC63A-5A07-F0E8-9AF1-3340C160E4D4}"/>
+                <a16:creationId xmlns:a16="http://schemas.microsoft.com/office/drawing/2014/main" id="{0E157F7A-E8D2-691D-F5F1-B0C27D13AD47}"/>
               </a:ext>
             </a:extLst>
           </p:cNvPr>
@@ -1536,7 +1536,7 @@
           <p:cNvPr id="3" name="Text Placeholder 2">
             <a:extLst>
               <a:ext uri="{FF2B5EF4-FFF2-40B4-BE49-F238E27FC236}">
-                <a16:creationId xmlns:a16="http://schemas.microsoft.com/office/drawing/2014/main" id="{00B6A38F-D948-4736-CDAE-B4F1E11BB9CA}"/>
+                <a16:creationId xmlns:a16="http://schemas.microsoft.com/office/drawing/2014/main" id="{2F961C4B-ECB9-FAD7-4FDB-DC7F62D2827F}"/>
               </a:ext>
             </a:extLst>
           </p:cNvPr>
@@ -1607,7 +1607,7 @@
           <p:cNvPr id="4" name="Content Placeholder 3">
             <a:extLst>
               <a:ext uri="{FF2B5EF4-FFF2-40B4-BE49-F238E27FC236}">
-                <a16:creationId xmlns:a16="http://schemas.microsoft.com/office/drawing/2014/main" id="{123CE922-42C8-7454-A047-3D247916EA98}"/>
+                <a16:creationId xmlns:a16="http://schemas.microsoft.com/office/drawing/2014/main" id="{7003D65D-0B0E-2F88-C88F-E4CE069BF648}"/>
               </a:ext>
             </a:extLst>
           </p:cNvPr>
@@ -1669,7 +1669,7 @@
           <p:cNvPr id="5" name="Text Placeholder 4">
             <a:extLst>
               <a:ext uri="{FF2B5EF4-FFF2-40B4-BE49-F238E27FC236}">
-                <a16:creationId xmlns:a16="http://schemas.microsoft.com/office/drawing/2014/main" id="{8BE03DC8-AA13-9405-EF7B-A7AAC4AB5343}"/>
+                <a16:creationId xmlns:a16="http://schemas.microsoft.com/office/drawing/2014/main" id="{93F86372-6646-46BF-D8CF-6F12A6B2CC8E}"/>
               </a:ext>
             </a:extLst>
           </p:cNvPr>
@@ -1740,7 +1740,7 @@
           <p:cNvPr id="6" name="Content Placeholder 5">
             <a:extLst>
               <a:ext uri="{FF2B5EF4-FFF2-40B4-BE49-F238E27FC236}">
-                <a16:creationId xmlns:a16="http://schemas.microsoft.com/office/drawing/2014/main" id="{314F14DA-92E3-CE01-E798-644B1432B559}"/>
+                <a16:creationId xmlns:a16="http://schemas.microsoft.com/office/drawing/2014/main" id="{234C1132-3B2E-1DE3-22F4-3F24C741BAF7}"/>
               </a:ext>
             </a:extLst>
           </p:cNvPr>
@@ -1802,7 +1802,7 @@
           <p:cNvPr id="7" name="Date Placeholder 6">
             <a:extLst>
               <a:ext uri="{FF2B5EF4-FFF2-40B4-BE49-F238E27FC236}">
-                <a16:creationId xmlns:a16="http://schemas.microsoft.com/office/drawing/2014/main" id="{35A9969B-0AF9-6E3C-FF79-69ED6AFAD698}"/>
+                <a16:creationId xmlns:a16="http://schemas.microsoft.com/office/drawing/2014/main" id="{06971A47-189E-60FA-388D-D75C636EEBEC}"/>
               </a:ext>
             </a:extLst>
           </p:cNvPr>
@@ -1818,9 +1818,9 @@
           <a:bodyPr/>
           <a:lstStyle/>
           <a:p>
-            <a:fld id="{5E1AD7E0-2CFB-4ADC-8446-98BCFBE02AC8}" type="datetimeFigureOut">
+            <a:fld id="{36EEF154-6F20-4A33-904F-9409835DBC1C}" type="datetimeFigureOut">
               <a:rPr lang="en-US" smtClean="0"/>
-              <a:t>4/11/2026</a:t>
+              <a:t>4/12/2026</a:t>
             </a:fld>
             <a:endParaRPr lang="en-US"/>
           </a:p>
@@ -1831,7 +1831,7 @@
           <p:cNvPr id="8" name="Footer Placeholder 7">
             <a:extLst>
               <a:ext uri="{FF2B5EF4-FFF2-40B4-BE49-F238E27FC236}">
-                <a16:creationId xmlns:a16="http://schemas.microsoft.com/office/drawing/2014/main" id="{E9C75109-C2D4-037D-4F64-62AA5DA76B9C}"/>
+                <a16:creationId xmlns:a16="http://schemas.microsoft.com/office/drawing/2014/main" id="{ABE7145E-34F8-ECDA-1053-619B77CCCB43}"/>
               </a:ext>
             </a:extLst>
           </p:cNvPr>
@@ -1856,7 +1856,7 @@
           <p:cNvPr id="9" name="Slide Number Placeholder 8">
             <a:extLst>
               <a:ext uri="{FF2B5EF4-FFF2-40B4-BE49-F238E27FC236}">
-                <a16:creationId xmlns:a16="http://schemas.microsoft.com/office/drawing/2014/main" id="{D41D188A-9A37-B53A-D715-621A389FBABD}"/>
+                <a16:creationId xmlns:a16="http://schemas.microsoft.com/office/drawing/2014/main" id="{9AD84E27-F49E-53FC-E7DC-A5889CEA497C}"/>
               </a:ext>
             </a:extLst>
           </p:cNvPr>
@@ -1872,7 +1872,7 @@
           <a:bodyPr/>
           <a:lstStyle/>
           <a:p>
-            <a:fld id="{6A4E5D37-2CDD-459B-8F61-978B4BD3D717}" type="slidenum">
+            <a:fld id="{C2BE6585-91AE-4142-9F0E-3B6BF16C38C9}" type="slidenum">
               <a:rPr lang="en-US" smtClean="0"/>
               <a:t>‹#›</a:t>
             </a:fld>
@@ -1883,7 +1883,7 @@
     </p:spTree>
     <p:extLst>
       <p:ext uri="{BB962C8B-B14F-4D97-AF65-F5344CB8AC3E}">
-        <p14:creationId xmlns:p14="http://schemas.microsoft.com/office/powerpoint/2010/main" val="1214783131"/>
+        <p14:creationId xmlns:p14="http://schemas.microsoft.com/office/powerpoint/2010/main" val="2542479233"/>
       </p:ext>
     </p:extLst>
   </p:cSld>
@@ -1915,7 +1915,7 @@
           <p:cNvPr id="2" name="Title 1">
             <a:extLst>
               <a:ext uri="{FF2B5EF4-FFF2-40B4-BE49-F238E27FC236}">
-                <a16:creationId xmlns:a16="http://schemas.microsoft.com/office/drawing/2014/main" id="{397B798F-9DF1-FC67-874A-BF80FAC83D79}"/>
+                <a16:creationId xmlns:a16="http://schemas.microsoft.com/office/drawing/2014/main" id="{3E2900A9-D72F-5665-29C2-0AD006378290}"/>
               </a:ext>
             </a:extLst>
           </p:cNvPr>
@@ -1943,7 +1943,7 @@
           <p:cNvPr id="3" name="Date Placeholder 2">
             <a:extLst>
               <a:ext uri="{FF2B5EF4-FFF2-40B4-BE49-F238E27FC236}">
-                <a16:creationId xmlns:a16="http://schemas.microsoft.com/office/drawing/2014/main" id="{39976988-B581-0192-9917-E40E60D238CE}"/>
+                <a16:creationId xmlns:a16="http://schemas.microsoft.com/office/drawing/2014/main" id="{C32807BA-ABF8-7687-3963-DD2BB48341EA}"/>
               </a:ext>
             </a:extLst>
           </p:cNvPr>
@@ -1959,9 +1959,9 @@
           <a:bodyPr/>
           <a:lstStyle/>
           <a:p>
-            <a:fld id="{5E1AD7E0-2CFB-4ADC-8446-98BCFBE02AC8}" type="datetimeFigureOut">
+            <a:fld id="{36EEF154-6F20-4A33-904F-9409835DBC1C}" type="datetimeFigureOut">
               <a:rPr lang="en-US" smtClean="0"/>
-              <a:t>4/11/2026</a:t>
+              <a:t>4/12/2026</a:t>
             </a:fld>
             <a:endParaRPr lang="en-US"/>
           </a:p>
@@ -1972,7 +1972,7 @@
           <p:cNvPr id="4" name="Footer Placeholder 3">
             <a:extLst>
               <a:ext uri="{FF2B5EF4-FFF2-40B4-BE49-F238E27FC236}">
-                <a16:creationId xmlns:a16="http://schemas.microsoft.com/office/drawing/2014/main" id="{E8D36DB8-8005-1D0C-75FB-85134A5FA977}"/>
+                <a16:creationId xmlns:a16="http://schemas.microsoft.com/office/drawing/2014/main" id="{F5827EF6-FBE8-B48E-4171-BF606CB9D67A}"/>
               </a:ext>
             </a:extLst>
           </p:cNvPr>
@@ -1997,7 +1997,7 @@
           <p:cNvPr id="5" name="Slide Number Placeholder 4">
             <a:extLst>
               <a:ext uri="{FF2B5EF4-FFF2-40B4-BE49-F238E27FC236}">
-                <a16:creationId xmlns:a16="http://schemas.microsoft.com/office/drawing/2014/main" id="{D8520ECD-747C-5198-53CE-7F1CDCAAC632}"/>
+                <a16:creationId xmlns:a16="http://schemas.microsoft.com/office/drawing/2014/main" id="{FA73B171-695B-C9F4-8A0E-B3028887F2F8}"/>
               </a:ext>
             </a:extLst>
           </p:cNvPr>
@@ -2013,7 +2013,7 @@
           <a:bodyPr/>
           <a:lstStyle/>
           <a:p>
-            <a:fld id="{6A4E5D37-2CDD-459B-8F61-978B4BD3D717}" type="slidenum">
+            <a:fld id="{C2BE6585-91AE-4142-9F0E-3B6BF16C38C9}" type="slidenum">
               <a:rPr lang="en-US" smtClean="0"/>
               <a:t>‹#›</a:t>
             </a:fld>
@@ -2024,7 +2024,7 @@
     </p:spTree>
     <p:extLst>
       <p:ext uri="{BB962C8B-B14F-4D97-AF65-F5344CB8AC3E}">
-        <p14:creationId xmlns:p14="http://schemas.microsoft.com/office/powerpoint/2010/main" val="2516418215"/>
+        <p14:creationId xmlns:p14="http://schemas.microsoft.com/office/powerpoint/2010/main" val="759249492"/>
       </p:ext>
     </p:extLst>
   </p:cSld>
@@ -2056,7 +2056,7 @@
           <p:cNvPr id="2" name="Date Placeholder 1">
             <a:extLst>
               <a:ext uri="{FF2B5EF4-FFF2-40B4-BE49-F238E27FC236}">
-                <a16:creationId xmlns:a16="http://schemas.microsoft.com/office/drawing/2014/main" id="{5918E2B4-F4DF-FCD0-C733-FA994E98B0DE}"/>
+                <a16:creationId xmlns:a16="http://schemas.microsoft.com/office/drawing/2014/main" id="{1976B5C4-FB36-D4DC-03A6-4E21A1180685}"/>
               </a:ext>
             </a:extLst>
           </p:cNvPr>
@@ -2072,9 +2072,9 @@
           <a:bodyPr/>
           <a:lstStyle/>
           <a:p>
-            <a:fld id="{5E1AD7E0-2CFB-4ADC-8446-98BCFBE02AC8}" type="datetimeFigureOut">
+            <a:fld id="{36EEF154-6F20-4A33-904F-9409835DBC1C}" type="datetimeFigureOut">
               <a:rPr lang="en-US" smtClean="0"/>
-              <a:t>4/11/2026</a:t>
+              <a:t>4/12/2026</a:t>
             </a:fld>
             <a:endParaRPr lang="en-US"/>
           </a:p>
@@ -2085,7 +2085,7 @@
           <p:cNvPr id="3" name="Footer Placeholder 2">
             <a:extLst>
               <a:ext uri="{FF2B5EF4-FFF2-40B4-BE49-F238E27FC236}">
-                <a16:creationId xmlns:a16="http://schemas.microsoft.com/office/drawing/2014/main" id="{84EF1B2A-BECE-FC9D-4377-8735D12D3C2D}"/>
+                <a16:creationId xmlns:a16="http://schemas.microsoft.com/office/drawing/2014/main" id="{CF6D4FC5-72B2-7EFD-7B16-DAE869F95805}"/>
               </a:ext>
             </a:extLst>
           </p:cNvPr>
@@ -2110,7 +2110,7 @@
           <p:cNvPr id="4" name="Slide Number Placeholder 3">
             <a:extLst>
               <a:ext uri="{FF2B5EF4-FFF2-40B4-BE49-F238E27FC236}">
-                <a16:creationId xmlns:a16="http://schemas.microsoft.com/office/drawing/2014/main" id="{C0F75770-6014-2849-DFAA-BD505DF5C358}"/>
+                <a16:creationId xmlns:a16="http://schemas.microsoft.com/office/drawing/2014/main" id="{74C2E759-D8D4-3BBF-C869-96DB3352B5A6}"/>
               </a:ext>
             </a:extLst>
           </p:cNvPr>
@@ -2126,7 +2126,7 @@
           <a:bodyPr/>
           <a:lstStyle/>
           <a:p>
-            <a:fld id="{6A4E5D37-2CDD-459B-8F61-978B4BD3D717}" type="slidenum">
+            <a:fld id="{C2BE6585-91AE-4142-9F0E-3B6BF16C38C9}" type="slidenum">
               <a:rPr lang="en-US" smtClean="0"/>
               <a:t>‹#›</a:t>
             </a:fld>
@@ -2137,7 +2137,7 @@
     </p:spTree>
     <p:extLst>
       <p:ext uri="{BB962C8B-B14F-4D97-AF65-F5344CB8AC3E}">
-        <p14:creationId xmlns:p14="http://schemas.microsoft.com/office/powerpoint/2010/main" val="1674780777"/>
+        <p14:creationId xmlns:p14="http://schemas.microsoft.com/office/powerpoint/2010/main" val="3052085165"/>
       </p:ext>
     </p:extLst>
   </p:cSld>
@@ -2169,7 +2169,7 @@
           <p:cNvPr id="2" name="Title 1">
             <a:extLst>
               <a:ext uri="{FF2B5EF4-FFF2-40B4-BE49-F238E27FC236}">
-                <a16:creationId xmlns:a16="http://schemas.microsoft.com/office/drawing/2014/main" id="{9E8BC860-CB3D-FCDA-4650-E87CF8E409DE}"/>
+                <a16:creationId xmlns:a16="http://schemas.microsoft.com/office/drawing/2014/main" id="{8C81E96D-6733-143D-1108-737D1A352151}"/>
               </a:ext>
             </a:extLst>
           </p:cNvPr>
@@ -2206,7 +2206,7 @@
           <p:cNvPr id="3" name="Content Placeholder 2">
             <a:extLst>
               <a:ext uri="{FF2B5EF4-FFF2-40B4-BE49-F238E27FC236}">
-                <a16:creationId xmlns:a16="http://schemas.microsoft.com/office/drawing/2014/main" id="{1D69D68A-4A62-656E-9F1D-AADC1313D9D5}"/>
+                <a16:creationId xmlns:a16="http://schemas.microsoft.com/office/drawing/2014/main" id="{6EF278E8-DC6B-D3AD-2810-FF185D8BC7A1}"/>
               </a:ext>
             </a:extLst>
           </p:cNvPr>
@@ -2296,7 +2296,7 @@
           <p:cNvPr id="4" name="Text Placeholder 3">
             <a:extLst>
               <a:ext uri="{FF2B5EF4-FFF2-40B4-BE49-F238E27FC236}">
-                <a16:creationId xmlns:a16="http://schemas.microsoft.com/office/drawing/2014/main" id="{4083044F-0A5F-B7C7-C064-BB7879AFE141}"/>
+                <a16:creationId xmlns:a16="http://schemas.microsoft.com/office/drawing/2014/main" id="{36EBBCCA-D704-5DD5-FECA-86EF6CAAB5D1}"/>
               </a:ext>
             </a:extLst>
           </p:cNvPr>
@@ -2367,7 +2367,7 @@
           <p:cNvPr id="5" name="Date Placeholder 4">
             <a:extLst>
               <a:ext uri="{FF2B5EF4-FFF2-40B4-BE49-F238E27FC236}">
-                <a16:creationId xmlns:a16="http://schemas.microsoft.com/office/drawing/2014/main" id="{539F379D-7273-ACF5-CE11-242F3F3B168A}"/>
+                <a16:creationId xmlns:a16="http://schemas.microsoft.com/office/drawing/2014/main" id="{F2735A29-7A07-2294-E009-34242E5A981D}"/>
               </a:ext>
             </a:extLst>
           </p:cNvPr>
@@ -2383,9 +2383,9 @@
           <a:bodyPr/>
           <a:lstStyle/>
           <a:p>
-            <a:fld id="{5E1AD7E0-2CFB-4ADC-8446-98BCFBE02AC8}" type="datetimeFigureOut">
+            <a:fld id="{36EEF154-6F20-4A33-904F-9409835DBC1C}" type="datetimeFigureOut">
               <a:rPr lang="en-US" smtClean="0"/>
-              <a:t>4/11/2026</a:t>
+              <a:t>4/12/2026</a:t>
             </a:fld>
             <a:endParaRPr lang="en-US"/>
           </a:p>
@@ -2396,7 +2396,7 @@
           <p:cNvPr id="6" name="Footer Placeholder 5">
             <a:extLst>
               <a:ext uri="{FF2B5EF4-FFF2-40B4-BE49-F238E27FC236}">
-                <a16:creationId xmlns:a16="http://schemas.microsoft.com/office/drawing/2014/main" id="{261D7CE3-2AE4-2E6A-8CB1-08C90F6B16F9}"/>
+                <a16:creationId xmlns:a16="http://schemas.microsoft.com/office/drawing/2014/main" id="{7D805BE0-7894-90E2-38BD-3327E8B50F6C}"/>
               </a:ext>
             </a:extLst>
           </p:cNvPr>
@@ -2421,7 +2421,7 @@
           <p:cNvPr id="7" name="Slide Number Placeholder 6">
             <a:extLst>
               <a:ext uri="{FF2B5EF4-FFF2-40B4-BE49-F238E27FC236}">
-                <a16:creationId xmlns:a16="http://schemas.microsoft.com/office/drawing/2014/main" id="{782FE60E-16E7-8FDC-9D4D-BAEDD8C5AE29}"/>
+                <a16:creationId xmlns:a16="http://schemas.microsoft.com/office/drawing/2014/main" id="{23C4BAE1-1911-DAAB-FDBC-8655057934BF}"/>
               </a:ext>
             </a:extLst>
           </p:cNvPr>
@@ -2437,7 +2437,7 @@
           <a:bodyPr/>
           <a:lstStyle/>
           <a:p>
-            <a:fld id="{6A4E5D37-2CDD-459B-8F61-978B4BD3D717}" type="slidenum">
+            <a:fld id="{C2BE6585-91AE-4142-9F0E-3B6BF16C38C9}" type="slidenum">
               <a:rPr lang="en-US" smtClean="0"/>
               <a:t>‹#›</a:t>
             </a:fld>
@@ -2448,7 +2448,7 @@
     </p:spTree>
     <p:extLst>
       <p:ext uri="{BB962C8B-B14F-4D97-AF65-F5344CB8AC3E}">
-        <p14:creationId xmlns:p14="http://schemas.microsoft.com/office/powerpoint/2010/main" val="3210126392"/>
+        <p14:creationId xmlns:p14="http://schemas.microsoft.com/office/powerpoint/2010/main" val="2881364229"/>
       </p:ext>
     </p:extLst>
   </p:cSld>
@@ -2480,7 +2480,7 @@
           <p:cNvPr id="2" name="Title 1">
             <a:extLst>
               <a:ext uri="{FF2B5EF4-FFF2-40B4-BE49-F238E27FC236}">
-                <a16:creationId xmlns:a16="http://schemas.microsoft.com/office/drawing/2014/main" id="{BCF834A5-92AE-EA9E-D6FA-27B92086EBDB}"/>
+                <a16:creationId xmlns:a16="http://schemas.microsoft.com/office/drawing/2014/main" id="{9EB0DEFE-B085-2593-4C72-FF70C740F2DC}"/>
               </a:ext>
             </a:extLst>
           </p:cNvPr>
@@ -2517,7 +2517,7 @@
           <p:cNvPr id="3" name="Picture Placeholder 2">
             <a:extLst>
               <a:ext uri="{FF2B5EF4-FFF2-40B4-BE49-F238E27FC236}">
-                <a16:creationId xmlns:a16="http://schemas.microsoft.com/office/drawing/2014/main" id="{93C5FEA6-B609-9D1D-4DEB-D2466557C9AB}"/>
+                <a16:creationId xmlns:a16="http://schemas.microsoft.com/office/drawing/2014/main" id="{7F4AFAF5-855D-5572-0A12-99A875AB429F}"/>
               </a:ext>
             </a:extLst>
           </p:cNvPr>
@@ -2584,7 +2584,7 @@
           <p:cNvPr id="4" name="Text Placeholder 3">
             <a:extLst>
               <a:ext uri="{FF2B5EF4-FFF2-40B4-BE49-F238E27FC236}">
-                <a16:creationId xmlns:a16="http://schemas.microsoft.com/office/drawing/2014/main" id="{CD1AC0BF-9F51-6B6E-58E8-CFA64ED2100F}"/>
+                <a16:creationId xmlns:a16="http://schemas.microsoft.com/office/drawing/2014/main" id="{515D2C21-0A70-E7EF-E39D-35C7BD9BFA73}"/>
               </a:ext>
             </a:extLst>
           </p:cNvPr>
@@ -2655,7 +2655,7 @@
           <p:cNvPr id="5" name="Date Placeholder 4">
             <a:extLst>
               <a:ext uri="{FF2B5EF4-FFF2-40B4-BE49-F238E27FC236}">
-                <a16:creationId xmlns:a16="http://schemas.microsoft.com/office/drawing/2014/main" id="{EA9E116D-5894-959F-158D-AF281FEAD0DB}"/>
+                <a16:creationId xmlns:a16="http://schemas.microsoft.com/office/drawing/2014/main" id="{077F49B1-D4F6-5CBE-3D0B-F50E5B1AC760}"/>
               </a:ext>
             </a:extLst>
           </p:cNvPr>
@@ -2671,9 +2671,9 @@
           <a:bodyPr/>
           <a:lstStyle/>
           <a:p>
-            <a:fld id="{5E1AD7E0-2CFB-4ADC-8446-98BCFBE02AC8}" type="datetimeFigureOut">
+            <a:fld id="{36EEF154-6F20-4A33-904F-9409835DBC1C}" type="datetimeFigureOut">
               <a:rPr lang="en-US" smtClean="0"/>
-              <a:t>4/11/2026</a:t>
+              <a:t>4/12/2026</a:t>
             </a:fld>
             <a:endParaRPr lang="en-US"/>
           </a:p>
@@ -2684,7 +2684,7 @@
           <p:cNvPr id="6" name="Footer Placeholder 5">
             <a:extLst>
               <a:ext uri="{FF2B5EF4-FFF2-40B4-BE49-F238E27FC236}">
-                <a16:creationId xmlns:a16="http://schemas.microsoft.com/office/drawing/2014/main" id="{E292C8C6-E113-A946-C6FB-973B41FD0D4F}"/>
+                <a16:creationId xmlns:a16="http://schemas.microsoft.com/office/drawing/2014/main" id="{3877D0CD-1012-9CA2-ABB0-03E95FA54FAA}"/>
               </a:ext>
             </a:extLst>
           </p:cNvPr>
@@ -2709,7 +2709,7 @@
           <p:cNvPr id="7" name="Slide Number Placeholder 6">
             <a:extLst>
               <a:ext uri="{FF2B5EF4-FFF2-40B4-BE49-F238E27FC236}">
-                <a16:creationId xmlns:a16="http://schemas.microsoft.com/office/drawing/2014/main" id="{26FA246A-2BE8-90AF-03CB-0D6863E21974}"/>
+                <a16:creationId xmlns:a16="http://schemas.microsoft.com/office/drawing/2014/main" id="{1B26F0F0-FFC3-F66D-0842-4B995A81932E}"/>
               </a:ext>
             </a:extLst>
           </p:cNvPr>
@@ -2725,7 +2725,7 @@
           <a:bodyPr/>
           <a:lstStyle/>
           <a:p>
-            <a:fld id="{6A4E5D37-2CDD-459B-8F61-978B4BD3D717}" type="slidenum">
+            <a:fld id="{C2BE6585-91AE-4142-9F0E-3B6BF16C38C9}" type="slidenum">
               <a:rPr lang="en-US" smtClean="0"/>
               <a:t>‹#›</a:t>
             </a:fld>
@@ -2736,7 +2736,7 @@
     </p:spTree>
     <p:extLst>
       <p:ext uri="{BB962C8B-B14F-4D97-AF65-F5344CB8AC3E}">
-        <p14:creationId xmlns:p14="http://schemas.microsoft.com/office/powerpoint/2010/main" val="2911544681"/>
+        <p14:creationId xmlns:p14="http://schemas.microsoft.com/office/powerpoint/2010/main" val="2683556995"/>
       </p:ext>
     </p:extLst>
   </p:cSld>
@@ -2773,7 +2773,7 @@
           <p:cNvPr id="2" name="Title Placeholder 1">
             <a:extLst>
               <a:ext uri="{FF2B5EF4-FFF2-40B4-BE49-F238E27FC236}">
-                <a16:creationId xmlns:a16="http://schemas.microsoft.com/office/drawing/2014/main" id="{077B2194-423D-69BB-7EA9-0EAF5E4F4AEE}"/>
+                <a16:creationId xmlns:a16="http://schemas.microsoft.com/office/drawing/2014/main" id="{EFA8C5F8-6BB6-0D4C-9D16-9501023BB0EB}"/>
               </a:ext>
             </a:extLst>
           </p:cNvPr>
@@ -2811,7 +2811,7 @@
           <p:cNvPr id="3" name="Text Placeholder 2">
             <a:extLst>
               <a:ext uri="{FF2B5EF4-FFF2-40B4-BE49-F238E27FC236}">
-                <a16:creationId xmlns:a16="http://schemas.microsoft.com/office/drawing/2014/main" id="{339B4357-4E68-4807-BB8A-3071B8AF0923}"/>
+                <a16:creationId xmlns:a16="http://schemas.microsoft.com/office/drawing/2014/main" id="{252F02BB-475A-0A52-7A02-3FF1FAD4D076}"/>
               </a:ext>
             </a:extLst>
           </p:cNvPr>
@@ -2878,7 +2878,7 @@
           <p:cNvPr id="4" name="Date Placeholder 3">
             <a:extLst>
               <a:ext uri="{FF2B5EF4-FFF2-40B4-BE49-F238E27FC236}">
-                <a16:creationId xmlns:a16="http://schemas.microsoft.com/office/drawing/2014/main" id="{7F529A05-EDB7-8D9D-28C3-D469C95C344E}"/>
+                <a16:creationId xmlns:a16="http://schemas.microsoft.com/office/drawing/2014/main" id="{94128949-2D5D-40F7-89FC-8AA79DDCFC07}"/>
               </a:ext>
             </a:extLst>
           </p:cNvPr>
@@ -2912,9 +2912,9 @@
             </a:lvl1pPr>
           </a:lstStyle>
           <a:p>
-            <a:fld id="{5E1AD7E0-2CFB-4ADC-8446-98BCFBE02AC8}" type="datetimeFigureOut">
+            <a:fld id="{36EEF154-6F20-4A33-904F-9409835DBC1C}" type="datetimeFigureOut">
               <a:rPr lang="en-US" smtClean="0"/>
-              <a:t>4/11/2026</a:t>
+              <a:t>4/12/2026</a:t>
             </a:fld>
             <a:endParaRPr lang="en-US"/>
           </a:p>
@@ -2925,7 +2925,7 @@
           <p:cNvPr id="5" name="Footer Placeholder 4">
             <a:extLst>
               <a:ext uri="{FF2B5EF4-FFF2-40B4-BE49-F238E27FC236}">
-                <a16:creationId xmlns:a16="http://schemas.microsoft.com/office/drawing/2014/main" id="{84373D3A-EB59-0D39-0FFF-3303DE9A7143}"/>
+                <a16:creationId xmlns:a16="http://schemas.microsoft.com/office/drawing/2014/main" id="{1DC3015B-383B-E47E-EE77-F1F4FF2621E9}"/>
               </a:ext>
             </a:extLst>
           </p:cNvPr>
@@ -2968,7 +2968,7 @@
           <p:cNvPr id="6" name="Slide Number Placeholder 5">
             <a:extLst>
               <a:ext uri="{FF2B5EF4-FFF2-40B4-BE49-F238E27FC236}">
-                <a16:creationId xmlns:a16="http://schemas.microsoft.com/office/drawing/2014/main" id="{C9DC2CCC-D251-1F61-8D5F-578D5BAAC158}"/>
+                <a16:creationId xmlns:a16="http://schemas.microsoft.com/office/drawing/2014/main" id="{DE34BF41-D6AA-A152-96EC-5FBB65D27A4B}"/>
               </a:ext>
             </a:extLst>
           </p:cNvPr>
@@ -3002,7 +3002,7 @@
             </a:lvl1pPr>
           </a:lstStyle>
           <a:p>
-            <a:fld id="{6A4E5D37-2CDD-459B-8F61-978B4BD3D717}" type="slidenum">
+            <a:fld id="{C2BE6585-91AE-4142-9F0E-3B6BF16C38C9}" type="slidenum">
               <a:rPr lang="en-US" smtClean="0"/>
               <a:t>‹#›</a:t>
             </a:fld>
@@ -3013,7 +3013,7 @@
     </p:spTree>
     <p:extLst>
       <p:ext uri="{BB962C8B-B14F-4D97-AF65-F5344CB8AC3E}">
-        <p14:creationId xmlns:p14="http://schemas.microsoft.com/office/powerpoint/2010/main" val="2510093171"/>
+        <p14:creationId xmlns:p14="http://schemas.microsoft.com/office/powerpoint/2010/main" val="86093938"/>
       </p:ext>
     </p:extLst>
   </p:cSld>
@@ -3336,7 +3336,7 @@
           <p:cNvPr id="2" name="Rectangle 1">
             <a:extLst>
               <a:ext uri="{FF2B5EF4-FFF2-40B4-BE49-F238E27FC236}">
-                <a16:creationId xmlns:a16="http://schemas.microsoft.com/office/drawing/2014/main" id="{0D7A48AF-E398-C5CC-0091-2D16B83C14D1}"/>
+                <a16:creationId xmlns:a16="http://schemas.microsoft.com/office/drawing/2014/main" id="{297B8F93-D06B-454B-EA48-8BD1A848F5BC}"/>
               </a:ext>
             </a:extLst>
           </p:cNvPr>
@@ -3404,7 +3404,7 @@
           <p:cNvPr id="3" name="Rectangle 2">
             <a:extLst>
               <a:ext uri="{FF2B5EF4-FFF2-40B4-BE49-F238E27FC236}">
-                <a16:creationId xmlns:a16="http://schemas.microsoft.com/office/drawing/2014/main" id="{39DFAFDF-6E26-3633-8646-85BC33E5A905}"/>
+                <a16:creationId xmlns:a16="http://schemas.microsoft.com/office/drawing/2014/main" id="{0BC2B05E-BE62-DE8C-C36D-6A0966BDF0B7}"/>
               </a:ext>
             </a:extLst>
           </p:cNvPr>
@@ -3474,7 +3474,7 @@
           <p:cNvPr id="4" name="Rectangle 3">
             <a:extLst>
               <a:ext uri="{FF2B5EF4-FFF2-40B4-BE49-F238E27FC236}">
-                <a16:creationId xmlns:a16="http://schemas.microsoft.com/office/drawing/2014/main" id="{0C5CFB53-8CDD-A21F-8BF0-E7D514343088}"/>
+                <a16:creationId xmlns:a16="http://schemas.microsoft.com/office/drawing/2014/main" id="{8817060E-BBBB-7DA7-D78F-71FF98DA73A9}"/>
               </a:ext>
             </a:extLst>
           </p:cNvPr>
@@ -3544,7 +3544,7 @@
           <p:cNvPr id="5" name="TextBox 4">
             <a:extLst>
               <a:ext uri="{FF2B5EF4-FFF2-40B4-BE49-F238E27FC236}">
-                <a16:creationId xmlns:a16="http://schemas.microsoft.com/office/drawing/2014/main" id="{AF2A6A1B-EEF3-F655-0083-8D47D2411447}"/>
+                <a16:creationId xmlns:a16="http://schemas.microsoft.com/office/drawing/2014/main" id="{1711505E-CDF6-4279-B99F-33BAD7E8A701}"/>
               </a:ext>
             </a:extLst>
           </p:cNvPr>
@@ -3584,7 +3584,7 @@
           <p:cNvPr id="6" name="TextBox 5">
             <a:extLst>
               <a:ext uri="{FF2B5EF4-FFF2-40B4-BE49-F238E27FC236}">
-                <a16:creationId xmlns:a16="http://schemas.microsoft.com/office/drawing/2014/main" id="{403A076B-1502-DF76-5E6A-238E2BC04B26}"/>
+                <a16:creationId xmlns:a16="http://schemas.microsoft.com/office/drawing/2014/main" id="{30E64F38-477C-41C7-D85B-4E2D43524D07}"/>
               </a:ext>
             </a:extLst>
           </p:cNvPr>
@@ -3624,7 +3624,7 @@
           <p:cNvPr id="7" name="TextBox 6">
             <a:extLst>
               <a:ext uri="{FF2B5EF4-FFF2-40B4-BE49-F238E27FC236}">
-                <a16:creationId xmlns:a16="http://schemas.microsoft.com/office/drawing/2014/main" id="{68E3BD81-9AFF-A50B-4EB5-FE382D2A7697}"/>
+                <a16:creationId xmlns:a16="http://schemas.microsoft.com/office/drawing/2014/main" id="{1C779039-7CBC-FE6E-5F12-C8288F5F9862}"/>
               </a:ext>
             </a:extLst>
           </p:cNvPr>
@@ -3634,7 +3634,7 @@
         <p:spPr>
           <a:xfrm>
             <a:off x="736600" y="2133600"/>
-            <a:ext cx="6858000" cy="697627"/>
+            <a:ext cx="6858000" cy="943848"/>
           </a:xfrm>
           <a:prstGeom prst="rect">
             <a:avLst/>
@@ -3654,8 +3654,8 @@
                 </a:solidFill>
                 <a:latin typeface="Segoe UI" panose="020B0502040204020203" pitchFamily="34" charset="0"/>
               </a:rPr>
-              <a:t>Evidence-first defense deck aligned with the final submission baseline.
-63 / 63 cases executed, 56 pass, 7 fail, 4 live tracked defects.</a:t>
+              <a:t>Final testing presentation built from the recorded execution results and supporting artifacts.
+63 / 63 cases executed, 56 pass, 7 fail, 4 confirmed open defects.</a:t>
             </a:r>
           </a:p>
         </p:txBody>
@@ -3665,7 +3665,7 @@
           <p:cNvPr id="8" name="Rectangle: Rounded Corners 7">
             <a:extLst>
               <a:ext uri="{FF2B5EF4-FFF2-40B4-BE49-F238E27FC236}">
-                <a16:creationId xmlns:a16="http://schemas.microsoft.com/office/drawing/2014/main" id="{1433A4D0-AB5B-1ED9-4097-81BF691F55B1}"/>
+                <a16:creationId xmlns:a16="http://schemas.microsoft.com/office/drawing/2014/main" id="{4B7DA104-47EC-B9BB-25D5-BEA3BB3411BC}"/>
               </a:ext>
             </a:extLst>
           </p:cNvPr>
@@ -3751,7 +3751,7 @@
           <p:cNvPr id="9" name="TextBox 8">
             <a:extLst>
               <a:ext uri="{FF2B5EF4-FFF2-40B4-BE49-F238E27FC236}">
-                <a16:creationId xmlns:a16="http://schemas.microsoft.com/office/drawing/2014/main" id="{2307B080-657E-1B99-F575-5EE6478F43C6}"/>
+                <a16:creationId xmlns:a16="http://schemas.microsoft.com/office/drawing/2014/main" id="{D1C10522-5DB4-6A3E-26B6-1164F812F491}"/>
               </a:ext>
             </a:extLst>
           </p:cNvPr>
@@ -3791,7 +3791,7 @@
           <p:cNvPr id="10" name="Rectangle: Rounded Corners 9">
             <a:extLst>
               <a:ext uri="{FF2B5EF4-FFF2-40B4-BE49-F238E27FC236}">
-                <a16:creationId xmlns:a16="http://schemas.microsoft.com/office/drawing/2014/main" id="{BA27E305-E4F8-9901-98CE-4FF81B656B87}"/>
+                <a16:creationId xmlns:a16="http://schemas.microsoft.com/office/drawing/2014/main" id="{15C0D087-2559-1692-51C3-8AB181058C0B}"/>
               </a:ext>
             </a:extLst>
           </p:cNvPr>
@@ -3845,7 +3845,7 @@
           <p:cNvPr id="11" name="Rectangle: Rounded Corners 10">
             <a:extLst>
               <a:ext uri="{FF2B5EF4-FFF2-40B4-BE49-F238E27FC236}">
-                <a16:creationId xmlns:a16="http://schemas.microsoft.com/office/drawing/2014/main" id="{CF01BE20-6063-1AC2-241E-F37E05A51080}"/>
+                <a16:creationId xmlns:a16="http://schemas.microsoft.com/office/drawing/2014/main" id="{CBE00205-C8A9-4487-BA16-CCFB5D687706}"/>
               </a:ext>
             </a:extLst>
           </p:cNvPr>
@@ -3913,7 +3913,7 @@
           <p:cNvPr id="12" name="TextBox 11">
             <a:extLst>
               <a:ext uri="{FF2B5EF4-FFF2-40B4-BE49-F238E27FC236}">
-                <a16:creationId xmlns:a16="http://schemas.microsoft.com/office/drawing/2014/main" id="{68EEAE01-EAD3-7010-513A-76284165EB6F}"/>
+                <a16:creationId xmlns:a16="http://schemas.microsoft.com/office/drawing/2014/main" id="{650595F3-6F91-D92F-7792-759A79EE3560}"/>
               </a:ext>
             </a:extLst>
           </p:cNvPr>
@@ -3953,7 +3953,7 @@
           <p:cNvPr id="13" name="TextBox 12">
             <a:extLst>
               <a:ext uri="{FF2B5EF4-FFF2-40B4-BE49-F238E27FC236}">
-                <a16:creationId xmlns:a16="http://schemas.microsoft.com/office/drawing/2014/main" id="{7128FD7B-5587-A157-9635-23CEE1673E3D}"/>
+                <a16:creationId xmlns:a16="http://schemas.microsoft.com/office/drawing/2014/main" id="{A42BB72C-8E11-2A11-8C4A-57973C366271}"/>
               </a:ext>
             </a:extLst>
           </p:cNvPr>
@@ -3993,7 +3993,7 @@
           <p:cNvPr id="14" name="Rectangle: Rounded Corners 13">
             <a:extLst>
               <a:ext uri="{FF2B5EF4-FFF2-40B4-BE49-F238E27FC236}">
-                <a16:creationId xmlns:a16="http://schemas.microsoft.com/office/drawing/2014/main" id="{869B979C-185B-2FC2-5B3E-45B18CD5E92D}"/>
+                <a16:creationId xmlns:a16="http://schemas.microsoft.com/office/drawing/2014/main" id="{EE54AEE6-2C25-1437-6DF1-361BCF7053AF}"/>
               </a:ext>
             </a:extLst>
           </p:cNvPr>
@@ -4047,7 +4047,7 @@
           <p:cNvPr id="15" name="Rectangle: Rounded Corners 14">
             <a:extLst>
               <a:ext uri="{FF2B5EF4-FFF2-40B4-BE49-F238E27FC236}">
-                <a16:creationId xmlns:a16="http://schemas.microsoft.com/office/drawing/2014/main" id="{D92BC2E8-DD73-13BF-4344-367854CF5EF3}"/>
+                <a16:creationId xmlns:a16="http://schemas.microsoft.com/office/drawing/2014/main" id="{39D3CF90-B53C-C4DD-B267-3BD948254A50}"/>
               </a:ext>
             </a:extLst>
           </p:cNvPr>
@@ -4115,7 +4115,7 @@
           <p:cNvPr id="16" name="TextBox 15">
             <a:extLst>
               <a:ext uri="{FF2B5EF4-FFF2-40B4-BE49-F238E27FC236}">
-                <a16:creationId xmlns:a16="http://schemas.microsoft.com/office/drawing/2014/main" id="{0D947F13-45B0-E06A-AE99-666E05EC6E9B}"/>
+                <a16:creationId xmlns:a16="http://schemas.microsoft.com/office/drawing/2014/main" id="{8DE17DC9-A9E3-5F39-BEAD-AF1D10DDEC2C}"/>
               </a:ext>
             </a:extLst>
           </p:cNvPr>
@@ -4155,7 +4155,7 @@
           <p:cNvPr id="17" name="TextBox 16">
             <a:extLst>
               <a:ext uri="{FF2B5EF4-FFF2-40B4-BE49-F238E27FC236}">
-                <a16:creationId xmlns:a16="http://schemas.microsoft.com/office/drawing/2014/main" id="{6BEA48C5-4418-10B7-057B-0D4BD21CC8EC}"/>
+                <a16:creationId xmlns:a16="http://schemas.microsoft.com/office/drawing/2014/main" id="{E39975AD-8D5B-3659-4C5A-D6AC6E842D5C}"/>
               </a:ext>
             </a:extLst>
           </p:cNvPr>
@@ -4195,7 +4195,7 @@
           <p:cNvPr id="18" name="Rectangle: Rounded Corners 17">
             <a:extLst>
               <a:ext uri="{FF2B5EF4-FFF2-40B4-BE49-F238E27FC236}">
-                <a16:creationId xmlns:a16="http://schemas.microsoft.com/office/drawing/2014/main" id="{7549F943-A25D-8D45-4ADB-2AE4FF6BC69E}"/>
+                <a16:creationId xmlns:a16="http://schemas.microsoft.com/office/drawing/2014/main" id="{BBA403EB-9074-4C9D-154F-E233BDDA24C4}"/>
               </a:ext>
             </a:extLst>
           </p:cNvPr>
@@ -4249,7 +4249,7 @@
           <p:cNvPr id="19" name="Rectangle: Rounded Corners 18">
             <a:extLst>
               <a:ext uri="{FF2B5EF4-FFF2-40B4-BE49-F238E27FC236}">
-                <a16:creationId xmlns:a16="http://schemas.microsoft.com/office/drawing/2014/main" id="{95204FAB-98F8-509C-3C8A-099D95306D99}"/>
+                <a16:creationId xmlns:a16="http://schemas.microsoft.com/office/drawing/2014/main" id="{8F44A112-46DB-33F8-EF34-C84CA39361A4}"/>
               </a:ext>
             </a:extLst>
           </p:cNvPr>
@@ -4317,7 +4317,7 @@
           <p:cNvPr id="20" name="TextBox 19">
             <a:extLst>
               <a:ext uri="{FF2B5EF4-FFF2-40B4-BE49-F238E27FC236}">
-                <a16:creationId xmlns:a16="http://schemas.microsoft.com/office/drawing/2014/main" id="{258D15EB-47BA-7FF3-DFEA-542076C11EB5}"/>
+                <a16:creationId xmlns:a16="http://schemas.microsoft.com/office/drawing/2014/main" id="{57B907DB-368B-9301-0888-FD6C7294042C}"/>
               </a:ext>
             </a:extLst>
           </p:cNvPr>
@@ -4357,7 +4357,7 @@
           <p:cNvPr id="21" name="TextBox 20">
             <a:extLst>
               <a:ext uri="{FF2B5EF4-FFF2-40B4-BE49-F238E27FC236}">
-                <a16:creationId xmlns:a16="http://schemas.microsoft.com/office/drawing/2014/main" id="{2405DD28-7C04-6C85-8E92-DB4D1302A82C}"/>
+                <a16:creationId xmlns:a16="http://schemas.microsoft.com/office/drawing/2014/main" id="{5D4BA9E2-78AB-2DBD-EC61-2F3CC5776AE8}"/>
               </a:ext>
             </a:extLst>
           </p:cNvPr>
@@ -4397,7 +4397,7 @@
           <p:cNvPr id="22" name="Rectangle: Rounded Corners 21">
             <a:extLst>
               <a:ext uri="{FF2B5EF4-FFF2-40B4-BE49-F238E27FC236}">
-                <a16:creationId xmlns:a16="http://schemas.microsoft.com/office/drawing/2014/main" id="{CCDA1E3D-63E5-91B0-2666-A7998BAB2E77}"/>
+                <a16:creationId xmlns:a16="http://schemas.microsoft.com/office/drawing/2014/main" id="{72DE8B9D-97BF-9EC6-FF61-2D3F1F36C219}"/>
               </a:ext>
             </a:extLst>
           </p:cNvPr>
@@ -4451,7 +4451,7 @@
           <p:cNvPr id="23" name="Rectangle: Rounded Corners 22">
             <a:extLst>
               <a:ext uri="{FF2B5EF4-FFF2-40B4-BE49-F238E27FC236}">
-                <a16:creationId xmlns:a16="http://schemas.microsoft.com/office/drawing/2014/main" id="{44103F89-7A52-11F4-ADA7-3C5733FA10B7}"/>
+                <a16:creationId xmlns:a16="http://schemas.microsoft.com/office/drawing/2014/main" id="{662FD25A-C23E-F500-D385-FF1189C51986}"/>
               </a:ext>
             </a:extLst>
           </p:cNvPr>
@@ -4519,7 +4519,7 @@
           <p:cNvPr id="24" name="TextBox 23">
             <a:extLst>
               <a:ext uri="{FF2B5EF4-FFF2-40B4-BE49-F238E27FC236}">
-                <a16:creationId xmlns:a16="http://schemas.microsoft.com/office/drawing/2014/main" id="{7D96610B-37A1-6628-44BB-2953F61295FA}"/>
+                <a16:creationId xmlns:a16="http://schemas.microsoft.com/office/drawing/2014/main" id="{15A4F8D7-0B25-667C-8F17-FC12B75B1FA5}"/>
               </a:ext>
             </a:extLst>
           </p:cNvPr>
@@ -4559,7 +4559,7 @@
           <p:cNvPr id="25" name="TextBox 24">
             <a:extLst>
               <a:ext uri="{FF2B5EF4-FFF2-40B4-BE49-F238E27FC236}">
-                <a16:creationId xmlns:a16="http://schemas.microsoft.com/office/drawing/2014/main" id="{F780BE65-8978-414C-251A-18FB7D8358E6}"/>
+                <a16:creationId xmlns:a16="http://schemas.microsoft.com/office/drawing/2014/main" id="{13E9E911-2361-FAF5-1E5D-F84A4F4A056D}"/>
               </a:ext>
             </a:extLst>
           </p:cNvPr>
@@ -4597,7 +4597,7 @@
     </p:spTree>
     <p:extLst>
       <p:ext uri="{BB962C8B-B14F-4D97-AF65-F5344CB8AC3E}">
-        <p14:creationId xmlns:p14="http://schemas.microsoft.com/office/powerpoint/2010/main" val="3809360859"/>
+        <p14:creationId xmlns:p14="http://schemas.microsoft.com/office/powerpoint/2010/main" val="480303169"/>
       </p:ext>
     </p:extLst>
   </p:cSld>
@@ -4629,7 +4629,7 @@
           <p:cNvPr id="2" name="Rectangle 1">
             <a:extLst>
               <a:ext uri="{FF2B5EF4-FFF2-40B4-BE49-F238E27FC236}">
-                <a16:creationId xmlns:a16="http://schemas.microsoft.com/office/drawing/2014/main" id="{9B921CAD-D789-8BB5-C6CE-014BB6E80036}"/>
+                <a16:creationId xmlns:a16="http://schemas.microsoft.com/office/drawing/2014/main" id="{133ECA38-4B0E-6BA2-231F-B893F1FAAABD}"/>
               </a:ext>
             </a:extLst>
           </p:cNvPr>
@@ -4697,7 +4697,7 @@
           <p:cNvPr id="3" name="Rectangle 2">
             <a:extLst>
               <a:ext uri="{FF2B5EF4-FFF2-40B4-BE49-F238E27FC236}">
-                <a16:creationId xmlns:a16="http://schemas.microsoft.com/office/drawing/2014/main" id="{55EC3E10-C396-8C09-6E30-32A99225A721}"/>
+                <a16:creationId xmlns:a16="http://schemas.microsoft.com/office/drawing/2014/main" id="{EA56757B-4269-8CCA-E744-B2B77D7B2B5F}"/>
               </a:ext>
             </a:extLst>
           </p:cNvPr>
@@ -4765,7 +4765,7 @@
           <p:cNvPr id="4" name="TextBox 3">
             <a:extLst>
               <a:ext uri="{FF2B5EF4-FFF2-40B4-BE49-F238E27FC236}">
-                <a16:creationId xmlns:a16="http://schemas.microsoft.com/office/drawing/2014/main" id="{118688F9-AD73-676D-F73C-260FE0AD888A}"/>
+                <a16:creationId xmlns:a16="http://schemas.microsoft.com/office/drawing/2014/main" id="{9DFA8BC0-98A5-E891-6DCF-5B166C4BE0BF}"/>
               </a:ext>
             </a:extLst>
           </p:cNvPr>
@@ -4805,7 +4805,7 @@
           <p:cNvPr id="5" name="TextBox 4">
             <a:extLst>
               <a:ext uri="{FF2B5EF4-FFF2-40B4-BE49-F238E27FC236}">
-                <a16:creationId xmlns:a16="http://schemas.microsoft.com/office/drawing/2014/main" id="{631546C8-BBE6-5805-B146-8406FD7901C2}"/>
+                <a16:creationId xmlns:a16="http://schemas.microsoft.com/office/drawing/2014/main" id="{AA66E7D0-ED19-8E42-A12D-338F34431A0D}"/>
               </a:ext>
             </a:extLst>
           </p:cNvPr>
@@ -4845,7 +4845,7 @@
           <p:cNvPr id="6" name="TextBox 5">
             <a:extLst>
               <a:ext uri="{FF2B5EF4-FFF2-40B4-BE49-F238E27FC236}">
-                <a16:creationId xmlns:a16="http://schemas.microsoft.com/office/drawing/2014/main" id="{97F0F706-D487-7854-477D-5065DD0EC48E}"/>
+                <a16:creationId xmlns:a16="http://schemas.microsoft.com/office/drawing/2014/main" id="{094F7B42-456A-9D67-326F-6DB3EFDAFD41}"/>
               </a:ext>
             </a:extLst>
           </p:cNvPr>
@@ -4885,7 +4885,7 @@
           <p:cNvPr id="7" name="Rectangle: Rounded Corners 6">
             <a:extLst>
               <a:ext uri="{FF2B5EF4-FFF2-40B4-BE49-F238E27FC236}">
-                <a16:creationId xmlns:a16="http://schemas.microsoft.com/office/drawing/2014/main" id="{1E58F9B1-70BB-4322-4F20-D112A31E64D8}"/>
+                <a16:creationId xmlns:a16="http://schemas.microsoft.com/office/drawing/2014/main" id="{144D0F21-B72F-32C8-7EFE-127D0AAAAD66}"/>
               </a:ext>
             </a:extLst>
           </p:cNvPr>
@@ -4937,10 +4937,10 @@
                 <a:latin typeface="Segoe UI" panose="020B0502040204020203" pitchFamily="34" charset="0"/>
               </a:rPr>
               <a:t>Proven today
-- strong traceability from scenario to issue tracker
+- clear linkage from scenario to issue tracker
 - 63 / 63 cases executed with 0 Not Run
 - automation demonstrates both pass and fail evidence
-- packaging is reviewable and evidence-first</a:t>
+- the submission package is complete and reviewable</a:t>
             </a:r>
           </a:p>
         </p:txBody>
@@ -4950,7 +4950,7 @@
           <p:cNvPr id="8" name="Rectangle: Rounded Corners 7">
             <a:extLst>
               <a:ext uri="{FF2B5EF4-FFF2-40B4-BE49-F238E27FC236}">
-                <a16:creationId xmlns:a16="http://schemas.microsoft.com/office/drawing/2014/main" id="{CD7D0E01-12CA-6124-1BF4-20FEFDD9E75E}"/>
+                <a16:creationId xmlns:a16="http://schemas.microsoft.com/office/drawing/2014/main" id="{A80899C7-617B-2F77-D07E-4AB8BF68549A}"/>
               </a:ext>
             </a:extLst>
           </p:cNvPr>
@@ -5015,7 +5015,7 @@
           <p:cNvPr id="9" name="Rectangle: Rounded Corners 8">
             <a:extLst>
               <a:ext uri="{FF2B5EF4-FFF2-40B4-BE49-F238E27FC236}">
-                <a16:creationId xmlns:a16="http://schemas.microsoft.com/office/drawing/2014/main" id="{3F8A6FA3-CF8B-9004-EA17-66FDEF0119CE}"/>
+                <a16:creationId xmlns:a16="http://schemas.microsoft.com/office/drawing/2014/main" id="{76067A10-BD28-5717-5332-BB695FBA5BE4}"/>
               </a:ext>
             </a:extLst>
           </p:cNvPr>
@@ -5069,7 +5069,7 @@
           <p:cNvPr id="10" name="Rectangle: Rounded Corners 9">
             <a:extLst>
               <a:ext uri="{FF2B5EF4-FFF2-40B4-BE49-F238E27FC236}">
-                <a16:creationId xmlns:a16="http://schemas.microsoft.com/office/drawing/2014/main" id="{2F845D8F-148A-4DCC-5278-6BBC6A977DAC}"/>
+                <a16:creationId xmlns:a16="http://schemas.microsoft.com/office/drawing/2014/main" id="{7C6DFDDC-6C0F-B94B-FED2-2E8B120E50DB}"/>
               </a:ext>
             </a:extLst>
           </p:cNvPr>
@@ -5137,7 +5137,7 @@
           <p:cNvPr id="11" name="TextBox 10">
             <a:extLst>
               <a:ext uri="{FF2B5EF4-FFF2-40B4-BE49-F238E27FC236}">
-                <a16:creationId xmlns:a16="http://schemas.microsoft.com/office/drawing/2014/main" id="{18C124BE-4FAA-1778-9843-CA79E8871B8C}"/>
+                <a16:creationId xmlns:a16="http://schemas.microsoft.com/office/drawing/2014/main" id="{83DE896F-2137-CF60-594D-37239D6ECB3C}"/>
               </a:ext>
             </a:extLst>
           </p:cNvPr>
@@ -5177,7 +5177,7 @@
           <p:cNvPr id="12" name="TextBox 11">
             <a:extLst>
               <a:ext uri="{FF2B5EF4-FFF2-40B4-BE49-F238E27FC236}">
-                <a16:creationId xmlns:a16="http://schemas.microsoft.com/office/drawing/2014/main" id="{EDB371CC-29B2-2387-9EF5-993C578A40CA}"/>
+                <a16:creationId xmlns:a16="http://schemas.microsoft.com/office/drawing/2014/main" id="{A2348705-3B97-F9D7-C13B-FEBD86903612}"/>
               </a:ext>
             </a:extLst>
           </p:cNvPr>
@@ -5217,7 +5217,7 @@
           <p:cNvPr id="13" name="Rectangle: Rounded Corners 12">
             <a:extLst>
               <a:ext uri="{FF2B5EF4-FFF2-40B4-BE49-F238E27FC236}">
-                <a16:creationId xmlns:a16="http://schemas.microsoft.com/office/drawing/2014/main" id="{6E515D5D-D67E-150E-B094-C3B327807A8C}"/>
+                <a16:creationId xmlns:a16="http://schemas.microsoft.com/office/drawing/2014/main" id="{4C2ACFA0-7A22-2062-02E5-8A8D7BC975A6}"/>
               </a:ext>
             </a:extLst>
           </p:cNvPr>
@@ -5271,7 +5271,7 @@
           <p:cNvPr id="14" name="Rectangle: Rounded Corners 13">
             <a:extLst>
               <a:ext uri="{FF2B5EF4-FFF2-40B4-BE49-F238E27FC236}">
-                <a16:creationId xmlns:a16="http://schemas.microsoft.com/office/drawing/2014/main" id="{8844CE78-A705-D2BD-784C-9EBF33BE77CF}"/>
+                <a16:creationId xmlns:a16="http://schemas.microsoft.com/office/drawing/2014/main" id="{9BF4D63A-0F09-F9AD-8FA7-01558FB9B2F4}"/>
               </a:ext>
             </a:extLst>
           </p:cNvPr>
@@ -5339,7 +5339,7 @@
           <p:cNvPr id="15" name="TextBox 14">
             <a:extLst>
               <a:ext uri="{FF2B5EF4-FFF2-40B4-BE49-F238E27FC236}">
-                <a16:creationId xmlns:a16="http://schemas.microsoft.com/office/drawing/2014/main" id="{CD2FB296-6F70-3EDD-5DDB-11CCF027C029}"/>
+                <a16:creationId xmlns:a16="http://schemas.microsoft.com/office/drawing/2014/main" id="{B75C93D4-2A91-77CF-4D59-10CDD48E308F}"/>
               </a:ext>
             </a:extLst>
           </p:cNvPr>
@@ -5379,7 +5379,7 @@
           <p:cNvPr id="16" name="TextBox 15">
             <a:extLst>
               <a:ext uri="{FF2B5EF4-FFF2-40B4-BE49-F238E27FC236}">
-                <a16:creationId xmlns:a16="http://schemas.microsoft.com/office/drawing/2014/main" id="{47466D23-A2E7-1702-164F-06F3D2755780}"/>
+                <a16:creationId xmlns:a16="http://schemas.microsoft.com/office/drawing/2014/main" id="{36D88AA8-353F-FB67-643C-2BECF91D0DA8}"/>
               </a:ext>
             </a:extLst>
           </p:cNvPr>
@@ -5419,7 +5419,7 @@
           <p:cNvPr id="17" name="Rectangle: Rounded Corners 16">
             <a:extLst>
               <a:ext uri="{FF2B5EF4-FFF2-40B4-BE49-F238E27FC236}">
-                <a16:creationId xmlns:a16="http://schemas.microsoft.com/office/drawing/2014/main" id="{D6EB4CE1-F54E-5F30-3454-2ACEAEA4B017}"/>
+                <a16:creationId xmlns:a16="http://schemas.microsoft.com/office/drawing/2014/main" id="{ACA07C38-E6CB-6074-0E90-6F72B1629CB3}"/>
               </a:ext>
             </a:extLst>
           </p:cNvPr>
@@ -5473,7 +5473,7 @@
           <p:cNvPr id="18" name="Rectangle: Rounded Corners 17">
             <a:extLst>
               <a:ext uri="{FF2B5EF4-FFF2-40B4-BE49-F238E27FC236}">
-                <a16:creationId xmlns:a16="http://schemas.microsoft.com/office/drawing/2014/main" id="{27792413-67B4-2AAC-26C0-B4058E9B861A}"/>
+                <a16:creationId xmlns:a16="http://schemas.microsoft.com/office/drawing/2014/main" id="{0E69131F-6E2C-6629-28AB-A375C655DFA9}"/>
               </a:ext>
             </a:extLst>
           </p:cNvPr>
@@ -5541,7 +5541,7 @@
           <p:cNvPr id="19" name="TextBox 18">
             <a:extLst>
               <a:ext uri="{FF2B5EF4-FFF2-40B4-BE49-F238E27FC236}">
-                <a16:creationId xmlns:a16="http://schemas.microsoft.com/office/drawing/2014/main" id="{F60CAFD4-64DB-88F2-27AF-E617B7406D47}"/>
+                <a16:creationId xmlns:a16="http://schemas.microsoft.com/office/drawing/2014/main" id="{4247395B-2246-93F7-028F-9255954139FE}"/>
               </a:ext>
             </a:extLst>
           </p:cNvPr>
@@ -5581,7 +5581,7 @@
           <p:cNvPr id="20" name="TextBox 19">
             <a:extLst>
               <a:ext uri="{FF2B5EF4-FFF2-40B4-BE49-F238E27FC236}">
-                <a16:creationId xmlns:a16="http://schemas.microsoft.com/office/drawing/2014/main" id="{CCF0B97C-8B45-42B8-C2CD-936DCAC56CE9}"/>
+                <a16:creationId xmlns:a16="http://schemas.microsoft.com/office/drawing/2014/main" id="{B8945F12-2788-5B6A-A7DA-2C2594C69E4D}"/>
               </a:ext>
             </a:extLst>
           </p:cNvPr>
@@ -5619,7 +5619,7 @@
     </p:spTree>
     <p:extLst>
       <p:ext uri="{BB962C8B-B14F-4D97-AF65-F5344CB8AC3E}">
-        <p14:creationId xmlns:p14="http://schemas.microsoft.com/office/powerpoint/2010/main" val="2865631702"/>
+        <p14:creationId xmlns:p14="http://schemas.microsoft.com/office/powerpoint/2010/main" val="1368449954"/>
       </p:ext>
     </p:extLst>
   </p:cSld>
@@ -5651,7 +5651,7 @@
           <p:cNvPr id="2" name="Rectangle 1">
             <a:extLst>
               <a:ext uri="{FF2B5EF4-FFF2-40B4-BE49-F238E27FC236}">
-                <a16:creationId xmlns:a16="http://schemas.microsoft.com/office/drawing/2014/main" id="{21319138-D1B5-302C-6A03-7DBC36FC82A4}"/>
+                <a16:creationId xmlns:a16="http://schemas.microsoft.com/office/drawing/2014/main" id="{7DE9C19A-29EF-B63F-6EFA-FC2FED2EA3B2}"/>
               </a:ext>
             </a:extLst>
           </p:cNvPr>
@@ -5719,7 +5719,7 @@
           <p:cNvPr id="3" name="Rectangle 2">
             <a:extLst>
               <a:ext uri="{FF2B5EF4-FFF2-40B4-BE49-F238E27FC236}">
-                <a16:creationId xmlns:a16="http://schemas.microsoft.com/office/drawing/2014/main" id="{4324B546-5563-0D36-9A7D-0FF817AB8C2B}"/>
+                <a16:creationId xmlns:a16="http://schemas.microsoft.com/office/drawing/2014/main" id="{DB554E59-FC1D-15F7-8786-992EB4D7B3A3}"/>
               </a:ext>
             </a:extLst>
           </p:cNvPr>
@@ -5787,7 +5787,7 @@
           <p:cNvPr id="4" name="TextBox 3">
             <a:extLst>
               <a:ext uri="{FF2B5EF4-FFF2-40B4-BE49-F238E27FC236}">
-                <a16:creationId xmlns:a16="http://schemas.microsoft.com/office/drawing/2014/main" id="{B20889C8-5816-262F-E3C9-E189608F2289}"/>
+                <a16:creationId xmlns:a16="http://schemas.microsoft.com/office/drawing/2014/main" id="{0605D354-A9E2-DD9D-E781-845AEE924039}"/>
               </a:ext>
             </a:extLst>
           </p:cNvPr>
@@ -5827,7 +5827,7 @@
           <p:cNvPr id="5" name="TextBox 4">
             <a:extLst>
               <a:ext uri="{FF2B5EF4-FFF2-40B4-BE49-F238E27FC236}">
-                <a16:creationId xmlns:a16="http://schemas.microsoft.com/office/drawing/2014/main" id="{0AC2F312-BECD-086D-A97B-AC715A9175B3}"/>
+                <a16:creationId xmlns:a16="http://schemas.microsoft.com/office/drawing/2014/main" id="{FE8BB939-D2D8-4645-9B18-B0F460426081}"/>
               </a:ext>
             </a:extLst>
           </p:cNvPr>
@@ -5867,7 +5867,7 @@
           <p:cNvPr id="6" name="TextBox 5">
             <a:extLst>
               <a:ext uri="{FF2B5EF4-FFF2-40B4-BE49-F238E27FC236}">
-                <a16:creationId xmlns:a16="http://schemas.microsoft.com/office/drawing/2014/main" id="{F2FC0553-2A56-E26C-1C46-65DA3FCE1D60}"/>
+                <a16:creationId xmlns:a16="http://schemas.microsoft.com/office/drawing/2014/main" id="{644E3683-9085-B89A-0E8B-C3CE74CDD5F2}"/>
               </a:ext>
             </a:extLst>
           </p:cNvPr>
@@ -5907,7 +5907,7 @@
           <p:cNvPr id="7" name="Rectangle: Rounded Corners 6">
             <a:extLst>
               <a:ext uri="{FF2B5EF4-FFF2-40B4-BE49-F238E27FC236}">
-                <a16:creationId xmlns:a16="http://schemas.microsoft.com/office/drawing/2014/main" id="{A95557B1-13A1-A20D-2E55-F50E960F408C}"/>
+                <a16:creationId xmlns:a16="http://schemas.microsoft.com/office/drawing/2014/main" id="{6F017809-465B-F9DB-058C-5FBF431A4231}"/>
               </a:ext>
             </a:extLst>
           </p:cNvPr>
@@ -5968,7 +5968,7 @@
           <p:cNvPr id="8" name="Rectangle: Rounded Corners 7">
             <a:extLst>
               <a:ext uri="{FF2B5EF4-FFF2-40B4-BE49-F238E27FC236}">
-                <a16:creationId xmlns:a16="http://schemas.microsoft.com/office/drawing/2014/main" id="{F688470D-5F4E-5527-5057-3531D0BF6001}"/>
+                <a16:creationId xmlns:a16="http://schemas.microsoft.com/office/drawing/2014/main" id="{7F61925D-380A-E99A-9D8D-C27F8C791B31}"/>
               </a:ext>
             </a:extLst>
           </p:cNvPr>
@@ -6029,7 +6029,7 @@
           <p:cNvPr id="9" name="Rectangle: Rounded Corners 8">
             <a:extLst>
               <a:ext uri="{FF2B5EF4-FFF2-40B4-BE49-F238E27FC236}">
-                <a16:creationId xmlns:a16="http://schemas.microsoft.com/office/drawing/2014/main" id="{62D3E7B0-6063-3B5F-5EA9-85B03BBF3A5A}"/>
+                <a16:creationId xmlns:a16="http://schemas.microsoft.com/office/drawing/2014/main" id="{CC4FF944-AFA4-7460-3921-D441021507AA}"/>
               </a:ext>
             </a:extLst>
           </p:cNvPr>
@@ -6090,7 +6090,7 @@
           <p:cNvPr id="10" name="Rectangle: Rounded Corners 9">
             <a:extLst>
               <a:ext uri="{FF2B5EF4-FFF2-40B4-BE49-F238E27FC236}">
-                <a16:creationId xmlns:a16="http://schemas.microsoft.com/office/drawing/2014/main" id="{854993E6-7854-6C17-D267-8B49C85F7217}"/>
+                <a16:creationId xmlns:a16="http://schemas.microsoft.com/office/drawing/2014/main" id="{2F5A17FA-CE01-E5A6-5248-1F3DEF557588}"/>
               </a:ext>
             </a:extLst>
           </p:cNvPr>
@@ -6151,7 +6151,7 @@
           <p:cNvPr id="11" name="Rectangle: Rounded Corners 10">
             <a:extLst>
               <a:ext uri="{FF2B5EF4-FFF2-40B4-BE49-F238E27FC236}">
-                <a16:creationId xmlns:a16="http://schemas.microsoft.com/office/drawing/2014/main" id="{399358D5-BBAD-580E-E067-658F2B42604D}"/>
+                <a16:creationId xmlns:a16="http://schemas.microsoft.com/office/drawing/2014/main" id="{45ED9AA6-8CFA-F9CE-5909-5564D76DD2F5}"/>
               </a:ext>
             </a:extLst>
           </p:cNvPr>
@@ -6210,7 +6210,7 @@
     </p:spTree>
     <p:extLst>
       <p:ext uri="{BB962C8B-B14F-4D97-AF65-F5344CB8AC3E}">
-        <p14:creationId xmlns:p14="http://schemas.microsoft.com/office/powerpoint/2010/main" val="2660982897"/>
+        <p14:creationId xmlns:p14="http://schemas.microsoft.com/office/powerpoint/2010/main" val="2824306693"/>
       </p:ext>
     </p:extLst>
   </p:cSld>
@@ -6242,7 +6242,7 @@
           <p:cNvPr id="2" name="Rectangle 1">
             <a:extLst>
               <a:ext uri="{FF2B5EF4-FFF2-40B4-BE49-F238E27FC236}">
-                <a16:creationId xmlns:a16="http://schemas.microsoft.com/office/drawing/2014/main" id="{2999B75A-1114-EC58-A8C2-6A76CA308927}"/>
+                <a16:creationId xmlns:a16="http://schemas.microsoft.com/office/drawing/2014/main" id="{EF5B0F74-C6FF-A1CD-4EA3-27C2371909AC}"/>
               </a:ext>
             </a:extLst>
           </p:cNvPr>
@@ -6310,7 +6310,7 @@
           <p:cNvPr id="3" name="Rectangle 2">
             <a:extLst>
               <a:ext uri="{FF2B5EF4-FFF2-40B4-BE49-F238E27FC236}">
-                <a16:creationId xmlns:a16="http://schemas.microsoft.com/office/drawing/2014/main" id="{5CE6D629-A457-1FE2-7A5F-07FAC6AF9250}"/>
+                <a16:creationId xmlns:a16="http://schemas.microsoft.com/office/drawing/2014/main" id="{988C3E86-C87F-DFAA-C643-31E5AAC3EE0E}"/>
               </a:ext>
             </a:extLst>
           </p:cNvPr>
@@ -6378,7 +6378,7 @@
           <p:cNvPr id="4" name="TextBox 3">
             <a:extLst>
               <a:ext uri="{FF2B5EF4-FFF2-40B4-BE49-F238E27FC236}">
-                <a16:creationId xmlns:a16="http://schemas.microsoft.com/office/drawing/2014/main" id="{01DE426C-6D47-4EFB-A25A-AC90585CA7B9}"/>
+                <a16:creationId xmlns:a16="http://schemas.microsoft.com/office/drawing/2014/main" id="{21297BEF-9C17-3A8D-1E54-B8C8C0B2C797}"/>
               </a:ext>
             </a:extLst>
           </p:cNvPr>
@@ -6418,7 +6418,7 @@
           <p:cNvPr id="5" name="TextBox 4">
             <a:extLst>
               <a:ext uri="{FF2B5EF4-FFF2-40B4-BE49-F238E27FC236}">
-                <a16:creationId xmlns:a16="http://schemas.microsoft.com/office/drawing/2014/main" id="{206CA4BC-F550-7AE2-2A51-4BBFF4FF4DDF}"/>
+                <a16:creationId xmlns:a16="http://schemas.microsoft.com/office/drawing/2014/main" id="{DFD9ADC6-385B-91BD-6A56-1737147955D2}"/>
               </a:ext>
             </a:extLst>
           </p:cNvPr>
@@ -6458,7 +6458,7 @@
           <p:cNvPr id="6" name="TextBox 5">
             <a:extLst>
               <a:ext uri="{FF2B5EF4-FFF2-40B4-BE49-F238E27FC236}">
-                <a16:creationId xmlns:a16="http://schemas.microsoft.com/office/drawing/2014/main" id="{5980D9E5-FA2D-ECE9-C420-93134D153A88}"/>
+                <a16:creationId xmlns:a16="http://schemas.microsoft.com/office/drawing/2014/main" id="{5242FA81-FF52-31F4-CD4E-E9FBBB361D6E}"/>
               </a:ext>
             </a:extLst>
           </p:cNvPr>
@@ -6488,7 +6488,7 @@
                 </a:solidFill>
                 <a:latin typeface="Segoe UI" panose="020B0502040204020203" pitchFamily="34" charset="0"/>
               </a:rPr>
-              <a:t>The scope is intentionally centered on business-critical flows that are most likely to break revenue, permissions, stock, or reporting.</a:t>
+              <a:t>The scope is centered on business-critical flows where defects can affect permissions, inventory, transaction status, or reporting.</a:t>
             </a:r>
           </a:p>
         </p:txBody>
@@ -6498,7 +6498,7 @@
           <p:cNvPr id="7" name="Rectangle: Rounded Corners 6">
             <a:extLst>
               <a:ext uri="{FF2B5EF4-FFF2-40B4-BE49-F238E27FC236}">
-                <a16:creationId xmlns:a16="http://schemas.microsoft.com/office/drawing/2014/main" id="{E7E32130-3C78-F606-C088-0FF5059E3158}"/>
+                <a16:creationId xmlns:a16="http://schemas.microsoft.com/office/drawing/2014/main" id="{6B3CEA96-295E-8491-3C01-239CC366DD7D}"/>
               </a:ext>
             </a:extLst>
           </p:cNvPr>
@@ -6552,7 +6552,7 @@
           <p:cNvPr id="8" name="Rectangle: Rounded Corners 7">
             <a:extLst>
               <a:ext uri="{FF2B5EF4-FFF2-40B4-BE49-F238E27FC236}">
-                <a16:creationId xmlns:a16="http://schemas.microsoft.com/office/drawing/2014/main" id="{A7C51EDE-6E51-1FB1-876D-0123DDD83F37}"/>
+                <a16:creationId xmlns:a16="http://schemas.microsoft.com/office/drawing/2014/main" id="{DF6FBDE3-3EBD-B9B6-8DA3-C6B6535C2025}"/>
               </a:ext>
             </a:extLst>
           </p:cNvPr>
@@ -6620,7 +6620,7 @@
           <p:cNvPr id="9" name="TextBox 8">
             <a:extLst>
               <a:ext uri="{FF2B5EF4-FFF2-40B4-BE49-F238E27FC236}">
-                <a16:creationId xmlns:a16="http://schemas.microsoft.com/office/drawing/2014/main" id="{C35BE99D-1CFA-8255-4AF5-A36016769F2A}"/>
+                <a16:creationId xmlns:a16="http://schemas.microsoft.com/office/drawing/2014/main" id="{E16C8E21-8281-912B-D2A7-67D027162090}"/>
               </a:ext>
             </a:extLst>
           </p:cNvPr>
@@ -6660,7 +6660,7 @@
           <p:cNvPr id="10" name="TextBox 9">
             <a:extLst>
               <a:ext uri="{FF2B5EF4-FFF2-40B4-BE49-F238E27FC236}">
-                <a16:creationId xmlns:a16="http://schemas.microsoft.com/office/drawing/2014/main" id="{DCE8F77B-DA96-48D7-8D7C-F44AF0EF4B0A}"/>
+                <a16:creationId xmlns:a16="http://schemas.microsoft.com/office/drawing/2014/main" id="{659BC456-44DB-379D-2704-9CDAC9708B4A}"/>
               </a:ext>
             </a:extLst>
           </p:cNvPr>
@@ -6700,7 +6700,7 @@
           <p:cNvPr id="11" name="Rectangle: Rounded Corners 10">
             <a:extLst>
               <a:ext uri="{FF2B5EF4-FFF2-40B4-BE49-F238E27FC236}">
-                <a16:creationId xmlns:a16="http://schemas.microsoft.com/office/drawing/2014/main" id="{EB1A9B9F-E055-8F56-760D-A243EF98549D}"/>
+                <a16:creationId xmlns:a16="http://schemas.microsoft.com/office/drawing/2014/main" id="{DE394BEB-DF51-5924-162A-6CEC770BABCF}"/>
               </a:ext>
             </a:extLst>
           </p:cNvPr>
@@ -6754,7 +6754,7 @@
           <p:cNvPr id="12" name="Rectangle: Rounded Corners 11">
             <a:extLst>
               <a:ext uri="{FF2B5EF4-FFF2-40B4-BE49-F238E27FC236}">
-                <a16:creationId xmlns:a16="http://schemas.microsoft.com/office/drawing/2014/main" id="{9E5A3EF7-44C4-CFE5-8EA2-CDA0CDB027CD}"/>
+                <a16:creationId xmlns:a16="http://schemas.microsoft.com/office/drawing/2014/main" id="{69DE6F0B-E1EF-1C88-48EE-FE0A037CBFB7}"/>
               </a:ext>
             </a:extLst>
           </p:cNvPr>
@@ -6822,7 +6822,7 @@
           <p:cNvPr id="13" name="TextBox 12">
             <a:extLst>
               <a:ext uri="{FF2B5EF4-FFF2-40B4-BE49-F238E27FC236}">
-                <a16:creationId xmlns:a16="http://schemas.microsoft.com/office/drawing/2014/main" id="{01CCEB99-9645-ED95-D9FE-3FCC5A0C1E30}"/>
+                <a16:creationId xmlns:a16="http://schemas.microsoft.com/office/drawing/2014/main" id="{AFD9ED5D-4933-9CE4-9982-9E9B9EBC0988}"/>
               </a:ext>
             </a:extLst>
           </p:cNvPr>
@@ -6862,7 +6862,7 @@
           <p:cNvPr id="14" name="TextBox 13">
             <a:extLst>
               <a:ext uri="{FF2B5EF4-FFF2-40B4-BE49-F238E27FC236}">
-                <a16:creationId xmlns:a16="http://schemas.microsoft.com/office/drawing/2014/main" id="{47BECB51-50FD-581B-BCA5-8062C4408F47}"/>
+                <a16:creationId xmlns:a16="http://schemas.microsoft.com/office/drawing/2014/main" id="{6D3D11B4-1786-EAF5-BEB4-DFA457254A39}"/>
               </a:ext>
             </a:extLst>
           </p:cNvPr>
@@ -6902,7 +6902,7 @@
           <p:cNvPr id="15" name="Rectangle: Rounded Corners 14">
             <a:extLst>
               <a:ext uri="{FF2B5EF4-FFF2-40B4-BE49-F238E27FC236}">
-                <a16:creationId xmlns:a16="http://schemas.microsoft.com/office/drawing/2014/main" id="{2AA9DFC0-B82B-277B-DADD-05887B72F3CC}"/>
+                <a16:creationId xmlns:a16="http://schemas.microsoft.com/office/drawing/2014/main" id="{5FE50891-D2DF-883C-B099-74749FD5EF3B}"/>
               </a:ext>
             </a:extLst>
           </p:cNvPr>
@@ -6956,7 +6956,7 @@
           <p:cNvPr id="16" name="Rectangle: Rounded Corners 15">
             <a:extLst>
               <a:ext uri="{FF2B5EF4-FFF2-40B4-BE49-F238E27FC236}">
-                <a16:creationId xmlns:a16="http://schemas.microsoft.com/office/drawing/2014/main" id="{841886CF-589E-8DDC-DA17-8507BE3FE0E8}"/>
+                <a16:creationId xmlns:a16="http://schemas.microsoft.com/office/drawing/2014/main" id="{E619A8FE-0DE7-6414-C658-B23F44670DFF}"/>
               </a:ext>
             </a:extLst>
           </p:cNvPr>
@@ -7024,7 +7024,7 @@
           <p:cNvPr id="17" name="TextBox 16">
             <a:extLst>
               <a:ext uri="{FF2B5EF4-FFF2-40B4-BE49-F238E27FC236}">
-                <a16:creationId xmlns:a16="http://schemas.microsoft.com/office/drawing/2014/main" id="{AA721319-ADB8-B890-AB1D-2810A2E49BC9}"/>
+                <a16:creationId xmlns:a16="http://schemas.microsoft.com/office/drawing/2014/main" id="{FE91E39C-F72B-8448-779A-C3A7168F5118}"/>
               </a:ext>
             </a:extLst>
           </p:cNvPr>
@@ -7064,7 +7064,7 @@
           <p:cNvPr id="18" name="TextBox 17">
             <a:extLst>
               <a:ext uri="{FF2B5EF4-FFF2-40B4-BE49-F238E27FC236}">
-                <a16:creationId xmlns:a16="http://schemas.microsoft.com/office/drawing/2014/main" id="{115410B9-DA92-1F10-E366-40EC66D80050}"/>
+                <a16:creationId xmlns:a16="http://schemas.microsoft.com/office/drawing/2014/main" id="{5899363E-42E3-333B-238B-F57137FC2156}"/>
               </a:ext>
             </a:extLst>
           </p:cNvPr>
@@ -7104,7 +7104,7 @@
           <p:cNvPr id="19" name="Rectangle: Rounded Corners 18">
             <a:extLst>
               <a:ext uri="{FF2B5EF4-FFF2-40B4-BE49-F238E27FC236}">
-                <a16:creationId xmlns:a16="http://schemas.microsoft.com/office/drawing/2014/main" id="{5B8C7DCF-5E6F-F370-55C8-0C88920A612B}"/>
+                <a16:creationId xmlns:a16="http://schemas.microsoft.com/office/drawing/2014/main" id="{4EF53F32-74DF-7E74-1756-3D15D515B51B}"/>
               </a:ext>
             </a:extLst>
           </p:cNvPr>
@@ -7158,7 +7158,7 @@
           <p:cNvPr id="20" name="Rectangle: Rounded Corners 19">
             <a:extLst>
               <a:ext uri="{FF2B5EF4-FFF2-40B4-BE49-F238E27FC236}">
-                <a16:creationId xmlns:a16="http://schemas.microsoft.com/office/drawing/2014/main" id="{70627212-CD39-B96F-8A9C-671BEDE914D1}"/>
+                <a16:creationId xmlns:a16="http://schemas.microsoft.com/office/drawing/2014/main" id="{6C37F4B6-5F0B-4A9D-C10F-F57706EDD62C}"/>
               </a:ext>
             </a:extLst>
           </p:cNvPr>
@@ -7226,7 +7226,7 @@
           <p:cNvPr id="21" name="TextBox 20">
             <a:extLst>
               <a:ext uri="{FF2B5EF4-FFF2-40B4-BE49-F238E27FC236}">
-                <a16:creationId xmlns:a16="http://schemas.microsoft.com/office/drawing/2014/main" id="{C4773D39-020A-2BB6-5E25-839856E6C77B}"/>
+                <a16:creationId xmlns:a16="http://schemas.microsoft.com/office/drawing/2014/main" id="{402A5327-B2EE-8D6D-EBB0-7AA070ADA8BB}"/>
               </a:ext>
             </a:extLst>
           </p:cNvPr>
@@ -7266,7 +7266,7 @@
           <p:cNvPr id="22" name="TextBox 21">
             <a:extLst>
               <a:ext uri="{FF2B5EF4-FFF2-40B4-BE49-F238E27FC236}">
-                <a16:creationId xmlns:a16="http://schemas.microsoft.com/office/drawing/2014/main" id="{BB80B230-8246-9274-2703-D054B19464E5}"/>
+                <a16:creationId xmlns:a16="http://schemas.microsoft.com/office/drawing/2014/main" id="{79C4F7B1-1AA9-6C45-3FAE-FA3F956D9F44}"/>
               </a:ext>
             </a:extLst>
           </p:cNvPr>
@@ -7306,7 +7306,7 @@
           <p:cNvPr id="23" name="Rectangle: Rounded Corners 22">
             <a:extLst>
               <a:ext uri="{FF2B5EF4-FFF2-40B4-BE49-F238E27FC236}">
-                <a16:creationId xmlns:a16="http://schemas.microsoft.com/office/drawing/2014/main" id="{20FBB5B1-C12B-BA40-EBCF-46DAA196C0C3}"/>
+                <a16:creationId xmlns:a16="http://schemas.microsoft.com/office/drawing/2014/main" id="{DFAFB513-C14E-AE06-CB88-094227BF4FC3}"/>
               </a:ext>
             </a:extLst>
           </p:cNvPr>
@@ -7371,7 +7371,7 @@
           <p:cNvPr id="24" name="Rectangle: Rounded Corners 23">
             <a:extLst>
               <a:ext uri="{FF2B5EF4-FFF2-40B4-BE49-F238E27FC236}">
-                <a16:creationId xmlns:a16="http://schemas.microsoft.com/office/drawing/2014/main" id="{CBF0AD4F-C500-8D92-2F0C-3F167803CB02}"/>
+                <a16:creationId xmlns:a16="http://schemas.microsoft.com/office/drawing/2014/main" id="{E22C9A6F-AE22-3DF2-B841-12E5B49584DA}"/>
               </a:ext>
             </a:extLst>
           </p:cNvPr>
@@ -7431,7 +7431,7 @@
     </p:spTree>
     <p:extLst>
       <p:ext uri="{BB962C8B-B14F-4D97-AF65-F5344CB8AC3E}">
-        <p14:creationId xmlns:p14="http://schemas.microsoft.com/office/powerpoint/2010/main" val="628088405"/>
+        <p14:creationId xmlns:p14="http://schemas.microsoft.com/office/powerpoint/2010/main" val="2903630846"/>
       </p:ext>
     </p:extLst>
   </p:cSld>
@@ -7463,7 +7463,7 @@
           <p:cNvPr id="2" name="Rectangle 1">
             <a:extLst>
               <a:ext uri="{FF2B5EF4-FFF2-40B4-BE49-F238E27FC236}">
-                <a16:creationId xmlns:a16="http://schemas.microsoft.com/office/drawing/2014/main" id="{E8645541-A5CA-FE3C-EC5B-73FFDDEEE6B3}"/>
+                <a16:creationId xmlns:a16="http://schemas.microsoft.com/office/drawing/2014/main" id="{AB9AC3FA-F183-6A40-DB29-5EA24EE894BB}"/>
               </a:ext>
             </a:extLst>
           </p:cNvPr>
@@ -7531,7 +7531,7 @@
           <p:cNvPr id="3" name="Rectangle 2">
             <a:extLst>
               <a:ext uri="{FF2B5EF4-FFF2-40B4-BE49-F238E27FC236}">
-                <a16:creationId xmlns:a16="http://schemas.microsoft.com/office/drawing/2014/main" id="{EDF9700F-AF75-63AD-6331-E2DA2CDF6188}"/>
+                <a16:creationId xmlns:a16="http://schemas.microsoft.com/office/drawing/2014/main" id="{76B270FE-F942-D805-8B2F-36A464D71F66}"/>
               </a:ext>
             </a:extLst>
           </p:cNvPr>
@@ -7599,7 +7599,7 @@
           <p:cNvPr id="4" name="TextBox 3">
             <a:extLst>
               <a:ext uri="{FF2B5EF4-FFF2-40B4-BE49-F238E27FC236}">
-                <a16:creationId xmlns:a16="http://schemas.microsoft.com/office/drawing/2014/main" id="{2052A94E-FA51-F2C7-6932-5871E2E57426}"/>
+                <a16:creationId xmlns:a16="http://schemas.microsoft.com/office/drawing/2014/main" id="{5BA20873-1C5E-14C2-A97F-6433CE020E17}"/>
               </a:ext>
             </a:extLst>
           </p:cNvPr>
@@ -7639,7 +7639,7 @@
           <p:cNvPr id="5" name="TextBox 4">
             <a:extLst>
               <a:ext uri="{FF2B5EF4-FFF2-40B4-BE49-F238E27FC236}">
-                <a16:creationId xmlns:a16="http://schemas.microsoft.com/office/drawing/2014/main" id="{555A16D4-7283-B5AD-D73E-D888750EC157}"/>
+                <a16:creationId xmlns:a16="http://schemas.microsoft.com/office/drawing/2014/main" id="{3280DE1F-1D42-6CF8-6C58-3663880C5E53}"/>
               </a:ext>
             </a:extLst>
           </p:cNvPr>
@@ -7669,7 +7669,7 @@
                 </a:solidFill>
                 <a:latin typeface="Bahnschrift SemiBold" panose="020B0502040204020203" pitchFamily="34" charset="0"/>
               </a:rPr>
-              <a:t>How The Team Turned Design Into Defensible Evidence</a:t>
+              <a:t>From Test Design To Recorded Evidence</a:t>
             </a:r>
           </a:p>
         </p:txBody>
@@ -7679,7 +7679,7 @@
           <p:cNvPr id="6" name="TextBox 5">
             <a:extLst>
               <a:ext uri="{FF2B5EF4-FFF2-40B4-BE49-F238E27FC236}">
-                <a16:creationId xmlns:a16="http://schemas.microsoft.com/office/drawing/2014/main" id="{E24534F8-AF16-0555-5DAE-7270B0B328BB}"/>
+                <a16:creationId xmlns:a16="http://schemas.microsoft.com/office/drawing/2014/main" id="{87FC5D55-1AFC-C859-7013-D02A2FFA3C97}"/>
               </a:ext>
             </a:extLst>
           </p:cNvPr>
@@ -7709,7 +7709,7 @@
                 </a:solidFill>
                 <a:latin typeface="Segoe UI" panose="020B0502040204020203" pitchFamily="34" charset="0"/>
               </a:rPr>
-              <a:t>The deck shows a compact strategy summary, then a visible trace from scenario to issue tracker.</a:t>
+              <a:t>This section shows how scenario design, execution outputs, and defect tracking were kept in one consistent chain.</a:t>
             </a:r>
           </a:p>
         </p:txBody>
@@ -7719,7 +7719,7 @@
           <p:cNvPr id="7" name="Rectangle: Rounded Corners 6">
             <a:extLst>
               <a:ext uri="{FF2B5EF4-FFF2-40B4-BE49-F238E27FC236}">
-                <a16:creationId xmlns:a16="http://schemas.microsoft.com/office/drawing/2014/main" id="{22B18D35-ABE3-4FAF-2DA0-DEF36447B625}"/>
+                <a16:creationId xmlns:a16="http://schemas.microsoft.com/office/drawing/2014/main" id="{3347BBE3-40FA-DA57-DB1F-AA6805E34799}"/>
               </a:ext>
             </a:extLst>
           </p:cNvPr>
@@ -7771,7 +7771,7 @@
                 <a:latin typeface="Segoe UI" panose="020B0502040204020203" pitchFamily="34" charset="0"/>
               </a:rPr>
               <a:t>Approach
-- source-based audit instead of a generic template
+- project-specific audit instead of template-only planning
 - black-box execution with white-box-informed edge cases
 - manual UI validation plus API regression plus targeted UI automation</a:t>
             </a:r>
@@ -7783,7 +7783,7 @@
           <p:cNvPr id="8" name="Rectangle: Rounded Corners 7">
             <a:extLst>
               <a:ext uri="{FF2B5EF4-FFF2-40B4-BE49-F238E27FC236}">
-                <a16:creationId xmlns:a16="http://schemas.microsoft.com/office/drawing/2014/main" id="{BE9B1642-A650-C8F4-351D-6C45F5B098C9}"/>
+                <a16:creationId xmlns:a16="http://schemas.microsoft.com/office/drawing/2014/main" id="{9786DB26-2AEE-0CE3-992E-6BBE32DBA649}"/>
               </a:ext>
             </a:extLst>
           </p:cNvPr>
@@ -7835,7 +7835,7 @@
                 <a:latin typeface="Segoe UI" panose="020B0502040204020203" pitchFamily="34" charset="0"/>
               </a:rPr>
               <a:t>Evidence Chain
-Every key claim in the report can be walked forward through design, execution, runtime proof, defect logging, and GitHub issue tracking.</a:t>
+Each key claim in the report can be followed from test design to execution output, defect logging, and the linked GitHub issue when a failure was confirmed.</a:t>
             </a:r>
           </a:p>
         </p:txBody>
@@ -7845,7 +7845,7 @@
           <p:cNvPr id="9" name="Rectangle: Rounded Corners 8">
             <a:extLst>
               <a:ext uri="{FF2B5EF4-FFF2-40B4-BE49-F238E27FC236}">
-                <a16:creationId xmlns:a16="http://schemas.microsoft.com/office/drawing/2014/main" id="{C8F62F53-D647-F8B9-A422-8AFC6D23615B}"/>
+                <a16:creationId xmlns:a16="http://schemas.microsoft.com/office/drawing/2014/main" id="{7D6C10B2-7996-0CFB-5097-82B28AA9C7B9}"/>
               </a:ext>
             </a:extLst>
           </p:cNvPr>
@@ -7921,7 +7921,7 @@
           <p:cNvPr id="10" name="Straight Connector 9">
             <a:extLst>
               <a:ext uri="{FF2B5EF4-FFF2-40B4-BE49-F238E27FC236}">
-                <a16:creationId xmlns:a16="http://schemas.microsoft.com/office/drawing/2014/main" id="{AC306C05-4C26-F376-B7C0-5212F62AB177}"/>
+                <a16:creationId xmlns:a16="http://schemas.microsoft.com/office/drawing/2014/main" id="{CE8B51DA-D635-A42A-9B74-55C9810E830B}"/>
               </a:ext>
             </a:extLst>
           </p:cNvPr>
@@ -7962,7 +7962,7 @@
           <p:cNvPr id="11" name="Rectangle: Rounded Corners 10">
             <a:extLst>
               <a:ext uri="{FF2B5EF4-FFF2-40B4-BE49-F238E27FC236}">
-                <a16:creationId xmlns:a16="http://schemas.microsoft.com/office/drawing/2014/main" id="{1CB0904F-C8C2-D159-478E-FB2730A4BB51}"/>
+                <a16:creationId xmlns:a16="http://schemas.microsoft.com/office/drawing/2014/main" id="{CE9CEA5E-1685-40D1-0ACC-3E9B32CDA0EB}"/>
               </a:ext>
             </a:extLst>
           </p:cNvPr>
@@ -8038,7 +8038,7 @@
           <p:cNvPr id="12" name="Straight Connector 11">
             <a:extLst>
               <a:ext uri="{FF2B5EF4-FFF2-40B4-BE49-F238E27FC236}">
-                <a16:creationId xmlns:a16="http://schemas.microsoft.com/office/drawing/2014/main" id="{400B2E88-65AB-EFE0-DBDE-0691AC8654A1}"/>
+                <a16:creationId xmlns:a16="http://schemas.microsoft.com/office/drawing/2014/main" id="{32D1925D-6BA5-0CF5-579C-EEFE9BDDAEAC}"/>
               </a:ext>
             </a:extLst>
           </p:cNvPr>
@@ -8079,7 +8079,7 @@
           <p:cNvPr id="13" name="Rectangle: Rounded Corners 12">
             <a:extLst>
               <a:ext uri="{FF2B5EF4-FFF2-40B4-BE49-F238E27FC236}">
-                <a16:creationId xmlns:a16="http://schemas.microsoft.com/office/drawing/2014/main" id="{36B761ED-2C0D-A9CB-E9F0-2A9A2DB1EFC7}"/>
+                <a16:creationId xmlns:a16="http://schemas.microsoft.com/office/drawing/2014/main" id="{2307CB6B-6747-DACB-E14A-5AFD62162DAF}"/>
               </a:ext>
             </a:extLst>
           </p:cNvPr>
@@ -8155,7 +8155,7 @@
           <p:cNvPr id="14" name="Straight Connector 13">
             <a:extLst>
               <a:ext uri="{FF2B5EF4-FFF2-40B4-BE49-F238E27FC236}">
-                <a16:creationId xmlns:a16="http://schemas.microsoft.com/office/drawing/2014/main" id="{85E5A26D-8FB5-A711-E992-F37C6C612716}"/>
+                <a16:creationId xmlns:a16="http://schemas.microsoft.com/office/drawing/2014/main" id="{8D66CB4A-2264-E453-09E3-AB32E9298A09}"/>
               </a:ext>
             </a:extLst>
           </p:cNvPr>
@@ -8196,7 +8196,7 @@
           <p:cNvPr id="15" name="Rectangle: Rounded Corners 14">
             <a:extLst>
               <a:ext uri="{FF2B5EF4-FFF2-40B4-BE49-F238E27FC236}">
-                <a16:creationId xmlns:a16="http://schemas.microsoft.com/office/drawing/2014/main" id="{0338C9EE-DFC2-AFEC-36E9-F676DC241138}"/>
+                <a16:creationId xmlns:a16="http://schemas.microsoft.com/office/drawing/2014/main" id="{D9F6BB19-3B46-3112-5C32-95581E94DE04}"/>
               </a:ext>
             </a:extLst>
           </p:cNvPr>
@@ -8272,7 +8272,7 @@
           <p:cNvPr id="16" name="Straight Connector 15">
             <a:extLst>
               <a:ext uri="{FF2B5EF4-FFF2-40B4-BE49-F238E27FC236}">
-                <a16:creationId xmlns:a16="http://schemas.microsoft.com/office/drawing/2014/main" id="{B323CB1B-4D27-E7FA-70AA-C27D5CBF7535}"/>
+                <a16:creationId xmlns:a16="http://schemas.microsoft.com/office/drawing/2014/main" id="{721B9C6C-85D5-81BC-7D77-F0E639FC9534}"/>
               </a:ext>
             </a:extLst>
           </p:cNvPr>
@@ -8313,7 +8313,7 @@
           <p:cNvPr id="17" name="Rectangle: Rounded Corners 16">
             <a:extLst>
               <a:ext uri="{FF2B5EF4-FFF2-40B4-BE49-F238E27FC236}">
-                <a16:creationId xmlns:a16="http://schemas.microsoft.com/office/drawing/2014/main" id="{24687EEF-5E63-9E4C-520A-CF1CA6699E7C}"/>
+                <a16:creationId xmlns:a16="http://schemas.microsoft.com/office/drawing/2014/main" id="{A1B3F4D2-39F8-9868-3454-82B082EFA6A9}"/>
               </a:ext>
             </a:extLst>
           </p:cNvPr>
@@ -8389,7 +8389,7 @@
           <p:cNvPr id="18" name="Straight Connector 17">
             <a:extLst>
               <a:ext uri="{FF2B5EF4-FFF2-40B4-BE49-F238E27FC236}">
-                <a16:creationId xmlns:a16="http://schemas.microsoft.com/office/drawing/2014/main" id="{6B3C9770-FEC9-233F-6006-6DCC90A3F006}"/>
+                <a16:creationId xmlns:a16="http://schemas.microsoft.com/office/drawing/2014/main" id="{EA3F279C-3C5F-9580-A81D-0843CACCD5E0}"/>
               </a:ext>
             </a:extLst>
           </p:cNvPr>
@@ -8430,7 +8430,7 @@
           <p:cNvPr id="19" name="Rectangle: Rounded Corners 18">
             <a:extLst>
               <a:ext uri="{FF2B5EF4-FFF2-40B4-BE49-F238E27FC236}">
-                <a16:creationId xmlns:a16="http://schemas.microsoft.com/office/drawing/2014/main" id="{FAF6BF8F-36B7-D142-C980-57B7027B52DC}"/>
+                <a16:creationId xmlns:a16="http://schemas.microsoft.com/office/drawing/2014/main" id="{F48C9AEE-E17D-8C0A-752E-DE851A344926}"/>
               </a:ext>
             </a:extLst>
           </p:cNvPr>
@@ -8506,7 +8506,7 @@
           <p:cNvPr id="20" name="Rectangle: Rounded Corners 19">
             <a:extLst>
               <a:ext uri="{FF2B5EF4-FFF2-40B4-BE49-F238E27FC236}">
-                <a16:creationId xmlns:a16="http://schemas.microsoft.com/office/drawing/2014/main" id="{B3D4E9A8-1A24-F6BE-DE01-5D86E5AB3833}"/>
+                <a16:creationId xmlns:a16="http://schemas.microsoft.com/office/drawing/2014/main" id="{032C3052-3627-87BC-2BDF-C60E86E4E37F}"/>
               </a:ext>
             </a:extLst>
           </p:cNvPr>
@@ -8557,8 +8557,8 @@
                 </a:solidFill>
                 <a:latin typeface="Segoe UI" panose="020B0502040204020203" pitchFamily="34" charset="0"/>
               </a:rPr>
-              <a:t>Defense point
-The team does not rely on pass-fail labels alone. Every significant result is backed by a visible evidence file and, when failing, by a live GitHub issue with severity and priority.</a:t>
+              <a:t>Review point
+The deck does not rely on summary labels alone. Each important result is backed by a visible runtime artifact and, when failing, by a tracked GitHub issue with severity and priority.</a:t>
             </a:r>
           </a:p>
         </p:txBody>
@@ -8566,7 +8566,7 @@
     </p:spTree>
     <p:extLst>
       <p:ext uri="{BB962C8B-B14F-4D97-AF65-F5344CB8AC3E}">
-        <p14:creationId xmlns:p14="http://schemas.microsoft.com/office/powerpoint/2010/main" val="2225479625"/>
+        <p14:creationId xmlns:p14="http://schemas.microsoft.com/office/powerpoint/2010/main" val="3293001902"/>
       </p:ext>
     </p:extLst>
   </p:cSld>
@@ -8598,7 +8598,7 @@
           <p:cNvPr id="2" name="Rectangle 1">
             <a:extLst>
               <a:ext uri="{FF2B5EF4-FFF2-40B4-BE49-F238E27FC236}">
-                <a16:creationId xmlns:a16="http://schemas.microsoft.com/office/drawing/2014/main" id="{48202C07-CB21-6282-2A80-422E3417B17C}"/>
+                <a16:creationId xmlns:a16="http://schemas.microsoft.com/office/drawing/2014/main" id="{7A46816B-D432-A769-8437-379636A527C6}"/>
               </a:ext>
             </a:extLst>
           </p:cNvPr>
@@ -8666,7 +8666,7 @@
           <p:cNvPr id="3" name="Rectangle 2">
             <a:extLst>
               <a:ext uri="{FF2B5EF4-FFF2-40B4-BE49-F238E27FC236}">
-                <a16:creationId xmlns:a16="http://schemas.microsoft.com/office/drawing/2014/main" id="{73603721-BF65-90B5-2B10-DC0658211ABF}"/>
+                <a16:creationId xmlns:a16="http://schemas.microsoft.com/office/drawing/2014/main" id="{A9F0C578-A546-DD7C-A0C3-2977EEA28AA4}"/>
               </a:ext>
             </a:extLst>
           </p:cNvPr>
@@ -8734,7 +8734,7 @@
           <p:cNvPr id="4" name="TextBox 3">
             <a:extLst>
               <a:ext uri="{FF2B5EF4-FFF2-40B4-BE49-F238E27FC236}">
-                <a16:creationId xmlns:a16="http://schemas.microsoft.com/office/drawing/2014/main" id="{C5E05CE1-9E9B-7B0C-0AC1-7AB91CF61AFE}"/>
+                <a16:creationId xmlns:a16="http://schemas.microsoft.com/office/drawing/2014/main" id="{DBE7A697-6D90-4A41-982A-C92FAE953FD8}"/>
               </a:ext>
             </a:extLst>
           </p:cNvPr>
@@ -8774,7 +8774,7 @@
           <p:cNvPr id="5" name="TextBox 4">
             <a:extLst>
               <a:ext uri="{FF2B5EF4-FFF2-40B4-BE49-F238E27FC236}">
-                <a16:creationId xmlns:a16="http://schemas.microsoft.com/office/drawing/2014/main" id="{4CFF65D0-0107-3AB1-6551-8AD8B0BDDDED}"/>
+                <a16:creationId xmlns:a16="http://schemas.microsoft.com/office/drawing/2014/main" id="{3EA67D89-2233-0267-8C23-EBE36D1049F3}"/>
               </a:ext>
             </a:extLst>
           </p:cNvPr>
@@ -8804,7 +8804,7 @@
                 </a:solidFill>
                 <a:latin typeface="Bahnschrift SemiBold" panose="020B0502040204020203" pitchFamily="34" charset="0"/>
               </a:rPr>
-              <a:t>Coverage Is Complete, Ownership Is Traceable</a:t>
+              <a:t>Coverage Is Complete, Ownership Is Clear</a:t>
             </a:r>
           </a:p>
         </p:txBody>
@@ -8814,7 +8814,7 @@
           <p:cNvPr id="6" name="TextBox 5">
             <a:extLst>
               <a:ext uri="{FF2B5EF4-FFF2-40B4-BE49-F238E27FC236}">
-                <a16:creationId xmlns:a16="http://schemas.microsoft.com/office/drawing/2014/main" id="{820891AF-D70A-8D7E-CC75-52C922338F09}"/>
+                <a16:creationId xmlns:a16="http://schemas.microsoft.com/office/drawing/2014/main" id="{4213C502-E803-CB73-11B3-0B90CC791A36}"/>
               </a:ext>
             </a:extLst>
           </p:cNvPr>
@@ -8844,7 +8844,7 @@
                 </a:solidFill>
                 <a:latin typeface="Segoe UI" panose="020B0502040204020203" pitchFamily="34" charset="0"/>
               </a:rPr>
-              <a:t>The design baseline is wide enough for rubric coverage and explicit enough to prove that the UI workload was split without overlap.</a:t>
+              <a:t>The case set is wide enough to cover the required scope and explicit enough to show that the UI workload was split without overlap.</a:t>
             </a:r>
           </a:p>
         </p:txBody>
@@ -8854,7 +8854,7 @@
           <p:cNvPr id="7" name="Rectangle: Rounded Corners 6">
             <a:extLst>
               <a:ext uri="{FF2B5EF4-FFF2-40B4-BE49-F238E27FC236}">
-                <a16:creationId xmlns:a16="http://schemas.microsoft.com/office/drawing/2014/main" id="{08A0A04D-0E48-AB97-FE1A-67CAC9A9A636}"/>
+                <a16:creationId xmlns:a16="http://schemas.microsoft.com/office/drawing/2014/main" id="{D0B99CB5-12FE-D497-E401-D6D17EEEE856}"/>
               </a:ext>
             </a:extLst>
           </p:cNvPr>
@@ -8908,7 +8908,7 @@
           <p:cNvPr id="8" name="Rectangle: Rounded Corners 7">
             <a:extLst>
               <a:ext uri="{FF2B5EF4-FFF2-40B4-BE49-F238E27FC236}">
-                <a16:creationId xmlns:a16="http://schemas.microsoft.com/office/drawing/2014/main" id="{521CD89F-D918-50EB-B9FC-AF4E37D97453}"/>
+                <a16:creationId xmlns:a16="http://schemas.microsoft.com/office/drawing/2014/main" id="{4AF5BED4-DE77-716E-FEC7-5A60809BC688}"/>
               </a:ext>
             </a:extLst>
           </p:cNvPr>
@@ -8976,7 +8976,7 @@
           <p:cNvPr id="9" name="TextBox 8">
             <a:extLst>
               <a:ext uri="{FF2B5EF4-FFF2-40B4-BE49-F238E27FC236}">
-                <a16:creationId xmlns:a16="http://schemas.microsoft.com/office/drawing/2014/main" id="{ED7F047B-4A48-83A9-475A-DA875A267559}"/>
+                <a16:creationId xmlns:a16="http://schemas.microsoft.com/office/drawing/2014/main" id="{AB39D86A-A828-9C42-6572-36337BA5E516}"/>
               </a:ext>
             </a:extLst>
           </p:cNvPr>
@@ -9016,7 +9016,7 @@
           <p:cNvPr id="10" name="TextBox 9">
             <a:extLst>
               <a:ext uri="{FF2B5EF4-FFF2-40B4-BE49-F238E27FC236}">
-                <a16:creationId xmlns:a16="http://schemas.microsoft.com/office/drawing/2014/main" id="{29884B61-35BA-A278-3607-C3BCAF57E7F5}"/>
+                <a16:creationId xmlns:a16="http://schemas.microsoft.com/office/drawing/2014/main" id="{3AA56CC1-7527-FF38-90F3-AE62FF651A5B}"/>
               </a:ext>
             </a:extLst>
           </p:cNvPr>
@@ -9056,7 +9056,7 @@
           <p:cNvPr id="11" name="Rectangle: Rounded Corners 10">
             <a:extLst>
               <a:ext uri="{FF2B5EF4-FFF2-40B4-BE49-F238E27FC236}">
-                <a16:creationId xmlns:a16="http://schemas.microsoft.com/office/drawing/2014/main" id="{79D1EE9B-1357-B3BD-9C76-DE5494BD2818}"/>
+                <a16:creationId xmlns:a16="http://schemas.microsoft.com/office/drawing/2014/main" id="{76B9F284-CBC6-24F6-8DC1-FC793D174C10}"/>
               </a:ext>
             </a:extLst>
           </p:cNvPr>
@@ -9110,7 +9110,7 @@
           <p:cNvPr id="12" name="Rectangle: Rounded Corners 11">
             <a:extLst>
               <a:ext uri="{FF2B5EF4-FFF2-40B4-BE49-F238E27FC236}">
-                <a16:creationId xmlns:a16="http://schemas.microsoft.com/office/drawing/2014/main" id="{B6C38F84-3E54-00CA-5956-0EDEE6BB7511}"/>
+                <a16:creationId xmlns:a16="http://schemas.microsoft.com/office/drawing/2014/main" id="{C4854B24-5EC4-6088-C28B-19BC25DC23A6}"/>
               </a:ext>
             </a:extLst>
           </p:cNvPr>
@@ -9178,7 +9178,7 @@
           <p:cNvPr id="13" name="TextBox 12">
             <a:extLst>
               <a:ext uri="{FF2B5EF4-FFF2-40B4-BE49-F238E27FC236}">
-                <a16:creationId xmlns:a16="http://schemas.microsoft.com/office/drawing/2014/main" id="{496EF026-08BF-C24D-98DE-76AE4B39ABBD}"/>
+                <a16:creationId xmlns:a16="http://schemas.microsoft.com/office/drawing/2014/main" id="{F1FF3A50-CF4D-A1DF-D313-766628C77CFF}"/>
               </a:ext>
             </a:extLst>
           </p:cNvPr>
@@ -9218,7 +9218,7 @@
           <p:cNvPr id="14" name="TextBox 13">
             <a:extLst>
               <a:ext uri="{FF2B5EF4-FFF2-40B4-BE49-F238E27FC236}">
-                <a16:creationId xmlns:a16="http://schemas.microsoft.com/office/drawing/2014/main" id="{AD59BDA0-3242-F6E7-82D8-BAD7FDDF2C7C}"/>
+                <a16:creationId xmlns:a16="http://schemas.microsoft.com/office/drawing/2014/main" id="{E58DB17B-68A7-2D75-BEDB-E0E5ED23ACC9}"/>
               </a:ext>
             </a:extLst>
           </p:cNvPr>
@@ -9258,7 +9258,7 @@
           <p:cNvPr id="15" name="Rectangle: Rounded Corners 14">
             <a:extLst>
               <a:ext uri="{FF2B5EF4-FFF2-40B4-BE49-F238E27FC236}">
-                <a16:creationId xmlns:a16="http://schemas.microsoft.com/office/drawing/2014/main" id="{0DCD6951-8C59-D46E-4E73-FF96A8E3D2C8}"/>
+                <a16:creationId xmlns:a16="http://schemas.microsoft.com/office/drawing/2014/main" id="{4786FED7-7D4E-81F4-80A5-53A07AC2A740}"/>
               </a:ext>
             </a:extLst>
           </p:cNvPr>
@@ -9312,7 +9312,7 @@
           <p:cNvPr id="16" name="Rectangle: Rounded Corners 15">
             <a:extLst>
               <a:ext uri="{FF2B5EF4-FFF2-40B4-BE49-F238E27FC236}">
-                <a16:creationId xmlns:a16="http://schemas.microsoft.com/office/drawing/2014/main" id="{2AF3722D-A94A-5AF3-4F15-CF5733428716}"/>
+                <a16:creationId xmlns:a16="http://schemas.microsoft.com/office/drawing/2014/main" id="{429EB368-C2FB-ACF1-EFC0-E290A6BF6D37}"/>
               </a:ext>
             </a:extLst>
           </p:cNvPr>
@@ -9380,7 +9380,7 @@
           <p:cNvPr id="17" name="TextBox 16">
             <a:extLst>
               <a:ext uri="{FF2B5EF4-FFF2-40B4-BE49-F238E27FC236}">
-                <a16:creationId xmlns:a16="http://schemas.microsoft.com/office/drawing/2014/main" id="{2E5EEA06-06B2-4CEF-AD60-C08FDD74E969}"/>
+                <a16:creationId xmlns:a16="http://schemas.microsoft.com/office/drawing/2014/main" id="{69886B0C-B4DC-280E-A0FC-7A622A823E6A}"/>
               </a:ext>
             </a:extLst>
           </p:cNvPr>
@@ -9420,7 +9420,7 @@
           <p:cNvPr id="18" name="TextBox 17">
             <a:extLst>
               <a:ext uri="{FF2B5EF4-FFF2-40B4-BE49-F238E27FC236}">
-                <a16:creationId xmlns:a16="http://schemas.microsoft.com/office/drawing/2014/main" id="{F34B5E44-1204-9F8F-38F5-192773B07702}"/>
+                <a16:creationId xmlns:a16="http://schemas.microsoft.com/office/drawing/2014/main" id="{DC141521-EBEC-D462-EB8A-70A132BD8450}"/>
               </a:ext>
             </a:extLst>
           </p:cNvPr>
@@ -9460,7 +9460,7 @@
           <p:cNvPr id="19" name="Rectangle: Rounded Corners 18">
             <a:extLst>
               <a:ext uri="{FF2B5EF4-FFF2-40B4-BE49-F238E27FC236}">
-                <a16:creationId xmlns:a16="http://schemas.microsoft.com/office/drawing/2014/main" id="{0614BE6A-3064-B1C0-DFFC-6086FC1FA567}"/>
+                <a16:creationId xmlns:a16="http://schemas.microsoft.com/office/drawing/2014/main" id="{EB1ADC8B-0670-616D-9F3B-D33BBD4E94EA}"/>
               </a:ext>
             </a:extLst>
           </p:cNvPr>
@@ -9514,7 +9514,7 @@
           <p:cNvPr id="20" name="Rectangle: Rounded Corners 19">
             <a:extLst>
               <a:ext uri="{FF2B5EF4-FFF2-40B4-BE49-F238E27FC236}">
-                <a16:creationId xmlns:a16="http://schemas.microsoft.com/office/drawing/2014/main" id="{F54FD853-6AF9-1B21-5F35-403B16A14B1D}"/>
+                <a16:creationId xmlns:a16="http://schemas.microsoft.com/office/drawing/2014/main" id="{6BF76078-E795-2F04-35AB-DEEF3A29F6D5}"/>
               </a:ext>
             </a:extLst>
           </p:cNvPr>
@@ -9582,7 +9582,7 @@
           <p:cNvPr id="21" name="TextBox 20">
             <a:extLst>
               <a:ext uri="{FF2B5EF4-FFF2-40B4-BE49-F238E27FC236}">
-                <a16:creationId xmlns:a16="http://schemas.microsoft.com/office/drawing/2014/main" id="{DC37C5B4-096D-2D52-BD46-B0236CC14E1B}"/>
+                <a16:creationId xmlns:a16="http://schemas.microsoft.com/office/drawing/2014/main" id="{9CE5947B-8BCB-B737-FF9D-DB9099A2BF72}"/>
               </a:ext>
             </a:extLst>
           </p:cNvPr>
@@ -9622,7 +9622,7 @@
           <p:cNvPr id="22" name="TextBox 21">
             <a:extLst>
               <a:ext uri="{FF2B5EF4-FFF2-40B4-BE49-F238E27FC236}">
-                <a16:creationId xmlns:a16="http://schemas.microsoft.com/office/drawing/2014/main" id="{47B69671-45C5-F984-A6D4-6F4E07DE5CFE}"/>
+                <a16:creationId xmlns:a16="http://schemas.microsoft.com/office/drawing/2014/main" id="{F1D3E9BC-8173-3D0F-6A6F-AB3599F90FCF}"/>
               </a:ext>
             </a:extLst>
           </p:cNvPr>
@@ -9662,7 +9662,7 @@
           <p:cNvPr id="23" name="TextBox 22">
             <a:extLst>
               <a:ext uri="{FF2B5EF4-FFF2-40B4-BE49-F238E27FC236}">
-                <a16:creationId xmlns:a16="http://schemas.microsoft.com/office/drawing/2014/main" id="{135EF46F-892D-FC71-622A-5F9A78E08317}"/>
+                <a16:creationId xmlns:a16="http://schemas.microsoft.com/office/drawing/2014/main" id="{B85A9026-22A2-A838-2591-EBECCA96288E}"/>
               </a:ext>
             </a:extLst>
           </p:cNvPr>
@@ -9702,7 +9702,7 @@
           <p:cNvPr id="24" name="TextBox 23">
             <a:extLst>
               <a:ext uri="{FF2B5EF4-FFF2-40B4-BE49-F238E27FC236}">
-                <a16:creationId xmlns:a16="http://schemas.microsoft.com/office/drawing/2014/main" id="{0009EEDE-B11E-9DC6-0981-6D480008C7EB}"/>
+                <a16:creationId xmlns:a16="http://schemas.microsoft.com/office/drawing/2014/main" id="{0791DEC8-6EEF-AE3B-5902-49D69C5C177F}"/>
               </a:ext>
             </a:extLst>
           </p:cNvPr>
@@ -9742,7 +9742,7 @@
           <p:cNvPr id="25" name="Rectangle: Rounded Corners 24">
             <a:extLst>
               <a:ext uri="{FF2B5EF4-FFF2-40B4-BE49-F238E27FC236}">
-                <a16:creationId xmlns:a16="http://schemas.microsoft.com/office/drawing/2014/main" id="{30072405-6658-D98B-A6D0-76C580EAFC60}"/>
+                <a16:creationId xmlns:a16="http://schemas.microsoft.com/office/drawing/2014/main" id="{51875259-7A7D-F790-CA7C-B66403A6AEE8}"/>
               </a:ext>
             </a:extLst>
           </p:cNvPr>
@@ -9810,7 +9810,7 @@
           <p:cNvPr id="26" name="Rectangle: Rounded Corners 25">
             <a:extLst>
               <a:ext uri="{FF2B5EF4-FFF2-40B4-BE49-F238E27FC236}">
-                <a16:creationId xmlns:a16="http://schemas.microsoft.com/office/drawing/2014/main" id="{56D9E4D2-4FC7-2774-6E3C-4FA4E1F35E2B}"/>
+                <a16:creationId xmlns:a16="http://schemas.microsoft.com/office/drawing/2014/main" id="{594AD3EC-DA69-36F2-9B0F-EC59FCF52720}"/>
               </a:ext>
             </a:extLst>
           </p:cNvPr>
@@ -9878,7 +9878,7 @@
           <p:cNvPr id="27" name="TextBox 26">
             <a:extLst>
               <a:ext uri="{FF2B5EF4-FFF2-40B4-BE49-F238E27FC236}">
-                <a16:creationId xmlns:a16="http://schemas.microsoft.com/office/drawing/2014/main" id="{7055E31E-C8BF-BD0A-3A5E-1C29A72D9F47}"/>
+                <a16:creationId xmlns:a16="http://schemas.microsoft.com/office/drawing/2014/main" id="{3DD4669F-EC8F-B337-660D-14E96BCC9D2D}"/>
               </a:ext>
             </a:extLst>
           </p:cNvPr>
@@ -9919,7 +9919,7 @@
           <p:cNvPr id="28" name="TextBox 27">
             <a:extLst>
               <a:ext uri="{FF2B5EF4-FFF2-40B4-BE49-F238E27FC236}">
-                <a16:creationId xmlns:a16="http://schemas.microsoft.com/office/drawing/2014/main" id="{C1422E1D-B939-296B-759B-EF0352DBF8EC}"/>
+                <a16:creationId xmlns:a16="http://schemas.microsoft.com/office/drawing/2014/main" id="{9B76EDDB-25C5-2BFF-0B2D-FA357CF34AE0}"/>
               </a:ext>
             </a:extLst>
           </p:cNvPr>
@@ -9959,7 +9959,7 @@
           <p:cNvPr id="29" name="Rectangle: Rounded Corners 28">
             <a:extLst>
               <a:ext uri="{FF2B5EF4-FFF2-40B4-BE49-F238E27FC236}">
-                <a16:creationId xmlns:a16="http://schemas.microsoft.com/office/drawing/2014/main" id="{4FAE3EF7-6D02-2A5F-AB73-279C29797E1E}"/>
+                <a16:creationId xmlns:a16="http://schemas.microsoft.com/office/drawing/2014/main" id="{1F0D733A-03D9-3D0D-32EF-EE7C5B1648B5}"/>
               </a:ext>
             </a:extLst>
           </p:cNvPr>
@@ -10027,7 +10027,7 @@
           <p:cNvPr id="30" name="Rectangle: Rounded Corners 29">
             <a:extLst>
               <a:ext uri="{FF2B5EF4-FFF2-40B4-BE49-F238E27FC236}">
-                <a16:creationId xmlns:a16="http://schemas.microsoft.com/office/drawing/2014/main" id="{7087CBF9-86FE-54ED-27EA-BC49DBB172AC}"/>
+                <a16:creationId xmlns:a16="http://schemas.microsoft.com/office/drawing/2014/main" id="{64BA0921-D9F4-EFC3-04E1-702030807FE8}"/>
               </a:ext>
             </a:extLst>
           </p:cNvPr>
@@ -10095,7 +10095,7 @@
           <p:cNvPr id="31" name="TextBox 30">
             <a:extLst>
               <a:ext uri="{FF2B5EF4-FFF2-40B4-BE49-F238E27FC236}">
-                <a16:creationId xmlns:a16="http://schemas.microsoft.com/office/drawing/2014/main" id="{865B3520-8C76-8A4D-C4D0-D4E2EFE6D306}"/>
+                <a16:creationId xmlns:a16="http://schemas.microsoft.com/office/drawing/2014/main" id="{EA2E0D84-23F0-41BC-EEA3-F68FFC4DAC92}"/>
               </a:ext>
             </a:extLst>
           </p:cNvPr>
@@ -10136,7 +10136,7 @@
           <p:cNvPr id="32" name="TextBox 31">
             <a:extLst>
               <a:ext uri="{FF2B5EF4-FFF2-40B4-BE49-F238E27FC236}">
-                <a16:creationId xmlns:a16="http://schemas.microsoft.com/office/drawing/2014/main" id="{6F0B7958-24CA-E420-AC17-B18D3BD405B3}"/>
+                <a16:creationId xmlns:a16="http://schemas.microsoft.com/office/drawing/2014/main" id="{D354E843-1A8F-6DDA-AAA2-EF59DEFEB3AE}"/>
               </a:ext>
             </a:extLst>
           </p:cNvPr>
@@ -10176,7 +10176,7 @@
           <p:cNvPr id="33" name="Rectangle: Rounded Corners 32">
             <a:extLst>
               <a:ext uri="{FF2B5EF4-FFF2-40B4-BE49-F238E27FC236}">
-                <a16:creationId xmlns:a16="http://schemas.microsoft.com/office/drawing/2014/main" id="{EBAA4CB2-3C89-CA98-83A9-81049F4F6503}"/>
+                <a16:creationId xmlns:a16="http://schemas.microsoft.com/office/drawing/2014/main" id="{023AF248-2C29-F5B0-42A0-5731E7B86E85}"/>
               </a:ext>
             </a:extLst>
           </p:cNvPr>
@@ -10244,7 +10244,7 @@
           <p:cNvPr id="34" name="Rectangle: Rounded Corners 33">
             <a:extLst>
               <a:ext uri="{FF2B5EF4-FFF2-40B4-BE49-F238E27FC236}">
-                <a16:creationId xmlns:a16="http://schemas.microsoft.com/office/drawing/2014/main" id="{1C505B94-E4D1-F5BB-AD20-6645618780D4}"/>
+                <a16:creationId xmlns:a16="http://schemas.microsoft.com/office/drawing/2014/main" id="{5884E080-5A79-C7E5-1122-0FC1527A4167}"/>
               </a:ext>
             </a:extLst>
           </p:cNvPr>
@@ -10312,7 +10312,7 @@
           <p:cNvPr id="35" name="TextBox 34">
             <a:extLst>
               <a:ext uri="{FF2B5EF4-FFF2-40B4-BE49-F238E27FC236}">
-                <a16:creationId xmlns:a16="http://schemas.microsoft.com/office/drawing/2014/main" id="{7C1FA7B2-DF1A-53B8-B479-6FABF2B9657D}"/>
+                <a16:creationId xmlns:a16="http://schemas.microsoft.com/office/drawing/2014/main" id="{9233AA81-1AA9-7864-5D46-2CA6D5EE7A6F}"/>
               </a:ext>
             </a:extLst>
           </p:cNvPr>
@@ -10353,7 +10353,7 @@
           <p:cNvPr id="36" name="TextBox 35">
             <a:extLst>
               <a:ext uri="{FF2B5EF4-FFF2-40B4-BE49-F238E27FC236}">
-                <a16:creationId xmlns:a16="http://schemas.microsoft.com/office/drawing/2014/main" id="{813891F4-3284-1F31-F883-AB0A9BFD25EF}"/>
+                <a16:creationId xmlns:a16="http://schemas.microsoft.com/office/drawing/2014/main" id="{91988EAB-05D7-4BDB-3619-7A1207CFC437}"/>
               </a:ext>
             </a:extLst>
           </p:cNvPr>
@@ -10391,7 +10391,7 @@
     </p:spTree>
     <p:extLst>
       <p:ext uri="{BB962C8B-B14F-4D97-AF65-F5344CB8AC3E}">
-        <p14:creationId xmlns:p14="http://schemas.microsoft.com/office/powerpoint/2010/main" val="3238962035"/>
+        <p14:creationId xmlns:p14="http://schemas.microsoft.com/office/powerpoint/2010/main" val="2286629126"/>
       </p:ext>
     </p:extLst>
   </p:cSld>
@@ -10423,7 +10423,7 @@
           <p:cNvPr id="2" name="Rectangle 1">
             <a:extLst>
               <a:ext uri="{FF2B5EF4-FFF2-40B4-BE49-F238E27FC236}">
-                <a16:creationId xmlns:a16="http://schemas.microsoft.com/office/drawing/2014/main" id="{B38429EA-9A31-F8FF-8F0D-0C877AC8C338}"/>
+                <a16:creationId xmlns:a16="http://schemas.microsoft.com/office/drawing/2014/main" id="{CBBD7DBA-4FA8-FDC7-2F3A-3BB01365F2E1}"/>
               </a:ext>
             </a:extLst>
           </p:cNvPr>
@@ -10491,7 +10491,7 @@
           <p:cNvPr id="3" name="Rectangle 2">
             <a:extLst>
               <a:ext uri="{FF2B5EF4-FFF2-40B4-BE49-F238E27FC236}">
-                <a16:creationId xmlns:a16="http://schemas.microsoft.com/office/drawing/2014/main" id="{B1978446-F500-63D5-E495-239AC85E9ADB}"/>
+                <a16:creationId xmlns:a16="http://schemas.microsoft.com/office/drawing/2014/main" id="{A5CDB207-AA30-4BE1-4CD1-33577852897E}"/>
               </a:ext>
             </a:extLst>
           </p:cNvPr>
@@ -10559,7 +10559,7 @@
           <p:cNvPr id="4" name="TextBox 3">
             <a:extLst>
               <a:ext uri="{FF2B5EF4-FFF2-40B4-BE49-F238E27FC236}">
-                <a16:creationId xmlns:a16="http://schemas.microsoft.com/office/drawing/2014/main" id="{7B0E0960-C595-575F-31BD-4473FAF13BE1}"/>
+                <a16:creationId xmlns:a16="http://schemas.microsoft.com/office/drawing/2014/main" id="{EA37FB81-66C9-E06A-1969-D15F425004E4}"/>
               </a:ext>
             </a:extLst>
           </p:cNvPr>
@@ -10599,7 +10599,7 @@
           <p:cNvPr id="5" name="TextBox 4">
             <a:extLst>
               <a:ext uri="{FF2B5EF4-FFF2-40B4-BE49-F238E27FC236}">
-                <a16:creationId xmlns:a16="http://schemas.microsoft.com/office/drawing/2014/main" id="{B3286D00-722A-1C67-04BE-E268F65AE156}"/>
+                <a16:creationId xmlns:a16="http://schemas.microsoft.com/office/drawing/2014/main" id="{F324C4F4-1A74-596F-7CAB-5B0BF30EFE16}"/>
               </a:ext>
             </a:extLst>
           </p:cNvPr>
@@ -10639,7 +10639,7 @@
           <p:cNvPr id="6" name="TextBox 5">
             <a:extLst>
               <a:ext uri="{FF2B5EF4-FFF2-40B4-BE49-F238E27FC236}">
-                <a16:creationId xmlns:a16="http://schemas.microsoft.com/office/drawing/2014/main" id="{47244CC4-7348-4258-5959-51DA22812046}"/>
+                <a16:creationId xmlns:a16="http://schemas.microsoft.com/office/drawing/2014/main" id="{39EF96B9-0B88-F67E-1B8F-F92D609F915A}"/>
               </a:ext>
             </a:extLst>
           </p:cNvPr>
@@ -10669,7 +10669,7 @@
                 </a:solidFill>
                 <a:latin typeface="Segoe UI" panose="020B0502040204020203" pitchFamily="34" charset="0"/>
               </a:rPr>
-              <a:t>The automation layer proves basic repeatability, visible tooling, and result traceability for both UI and API execution.</a:t>
+              <a:t>The automation layer adds repeatable UI and API checks while final status still depends on recorded runtime behavior.</a:t>
             </a:r>
           </a:p>
         </p:txBody>
@@ -10679,7 +10679,7 @@
           <p:cNvPr id="7" name="Rectangle: Rounded Corners 6">
             <a:extLst>
               <a:ext uri="{FF2B5EF4-FFF2-40B4-BE49-F238E27FC236}">
-                <a16:creationId xmlns:a16="http://schemas.microsoft.com/office/drawing/2014/main" id="{0A58B07A-1FD1-E43A-E089-F58FD8D7897A}"/>
+                <a16:creationId xmlns:a16="http://schemas.microsoft.com/office/drawing/2014/main" id="{1AF9E182-23B6-9787-9C36-BF98E171834F}"/>
               </a:ext>
             </a:extLst>
           </p:cNvPr>
@@ -10743,7 +10743,7 @@
           <p:cNvPr id="8" name="Rectangle: Rounded Corners 7">
             <a:extLst>
               <a:ext uri="{FF2B5EF4-FFF2-40B4-BE49-F238E27FC236}">
-                <a16:creationId xmlns:a16="http://schemas.microsoft.com/office/drawing/2014/main" id="{4E63443B-E6A9-172D-B79F-0F768E651A88}"/>
+                <a16:creationId xmlns:a16="http://schemas.microsoft.com/office/drawing/2014/main" id="{C9CDF92C-5112-31AB-BB87-544C83F84A84}"/>
               </a:ext>
             </a:extLst>
           </p:cNvPr>
@@ -10807,7 +10807,7 @@
           <p:cNvPr id="9" name="Rectangle: Rounded Corners 8">
             <a:extLst>
               <a:ext uri="{FF2B5EF4-FFF2-40B4-BE49-F238E27FC236}">
-                <a16:creationId xmlns:a16="http://schemas.microsoft.com/office/drawing/2014/main" id="{69B0C729-A25B-527C-981F-884873E9EAB1}"/>
+                <a16:creationId xmlns:a16="http://schemas.microsoft.com/office/drawing/2014/main" id="{37AAD528-8516-8B8F-8DF8-F8D3133EB1A2}"/>
               </a:ext>
             </a:extLst>
           </p:cNvPr>
@@ -10872,7 +10872,7 @@
           <p:cNvPr id="10" name="Rectangle: Rounded Corners 9">
             <a:extLst>
               <a:ext uri="{FF2B5EF4-FFF2-40B4-BE49-F238E27FC236}">
-                <a16:creationId xmlns:a16="http://schemas.microsoft.com/office/drawing/2014/main" id="{CC8A8AF3-200B-B2F0-97A0-159898EFD0A2}"/>
+                <a16:creationId xmlns:a16="http://schemas.microsoft.com/office/drawing/2014/main" id="{146BA3AE-F60A-A112-EFE3-AD301FE274FC}"/>
               </a:ext>
             </a:extLst>
           </p:cNvPr>
@@ -10932,7 +10932,7 @@
     </p:spTree>
     <p:extLst>
       <p:ext uri="{BB962C8B-B14F-4D97-AF65-F5344CB8AC3E}">
-        <p14:creationId xmlns:p14="http://schemas.microsoft.com/office/powerpoint/2010/main" val="1480778620"/>
+        <p14:creationId xmlns:p14="http://schemas.microsoft.com/office/powerpoint/2010/main" val="2672266661"/>
       </p:ext>
     </p:extLst>
   </p:cSld>
@@ -10964,7 +10964,7 @@
           <p:cNvPr id="2" name="Rectangle 1">
             <a:extLst>
               <a:ext uri="{FF2B5EF4-FFF2-40B4-BE49-F238E27FC236}">
-                <a16:creationId xmlns:a16="http://schemas.microsoft.com/office/drawing/2014/main" id="{676706EB-C76D-6D84-3D11-C62006D550A6}"/>
+                <a16:creationId xmlns:a16="http://schemas.microsoft.com/office/drawing/2014/main" id="{2320007B-DA26-57EB-8FED-55800983B93C}"/>
               </a:ext>
             </a:extLst>
           </p:cNvPr>
@@ -11032,7 +11032,7 @@
           <p:cNvPr id="3" name="Rectangle 2">
             <a:extLst>
               <a:ext uri="{FF2B5EF4-FFF2-40B4-BE49-F238E27FC236}">
-                <a16:creationId xmlns:a16="http://schemas.microsoft.com/office/drawing/2014/main" id="{DE086093-128F-D46F-4D5D-9F44F4BBE174}"/>
+                <a16:creationId xmlns:a16="http://schemas.microsoft.com/office/drawing/2014/main" id="{DBD5CB16-EC6E-5A20-D38B-8E455C1E758C}"/>
               </a:ext>
             </a:extLst>
           </p:cNvPr>
@@ -11100,7 +11100,7 @@
           <p:cNvPr id="4" name="TextBox 3">
             <a:extLst>
               <a:ext uri="{FF2B5EF4-FFF2-40B4-BE49-F238E27FC236}">
-                <a16:creationId xmlns:a16="http://schemas.microsoft.com/office/drawing/2014/main" id="{97ABB4F4-91EA-0C94-3697-5B0E56A4A7B2}"/>
+                <a16:creationId xmlns:a16="http://schemas.microsoft.com/office/drawing/2014/main" id="{1452A85D-22EB-9980-B1A5-9CC3AD3AEBFE}"/>
               </a:ext>
             </a:extLst>
           </p:cNvPr>
@@ -11140,7 +11140,7 @@
           <p:cNvPr id="5" name="TextBox 4">
             <a:extLst>
               <a:ext uri="{FF2B5EF4-FFF2-40B4-BE49-F238E27FC236}">
-                <a16:creationId xmlns:a16="http://schemas.microsoft.com/office/drawing/2014/main" id="{82CD77E4-C041-99B0-DC64-7ACCCD56AA6E}"/>
+                <a16:creationId xmlns:a16="http://schemas.microsoft.com/office/drawing/2014/main" id="{6954C140-5D5B-ADFC-1383-AF48C1AF874D}"/>
               </a:ext>
             </a:extLst>
           </p:cNvPr>
@@ -11180,7 +11180,7 @@
           <p:cNvPr id="6" name="TextBox 5">
             <a:extLst>
               <a:ext uri="{FF2B5EF4-FFF2-40B4-BE49-F238E27FC236}">
-                <a16:creationId xmlns:a16="http://schemas.microsoft.com/office/drawing/2014/main" id="{B9CB8C22-A6C7-2A9A-4AD6-E97C9037F160}"/>
+                <a16:creationId xmlns:a16="http://schemas.microsoft.com/office/drawing/2014/main" id="{9AA8284C-26E7-B65C-FAE6-ACA9F8591B80}"/>
               </a:ext>
             </a:extLst>
           </p:cNvPr>
@@ -11220,7 +11220,7 @@
           <p:cNvPr id="7" name="Rectangle: Rounded Corners 6">
             <a:extLst>
               <a:ext uri="{FF2B5EF4-FFF2-40B4-BE49-F238E27FC236}">
-                <a16:creationId xmlns:a16="http://schemas.microsoft.com/office/drawing/2014/main" id="{E768557F-A03A-0D48-479D-A0BD2F9F0814}"/>
+                <a16:creationId xmlns:a16="http://schemas.microsoft.com/office/drawing/2014/main" id="{E1C97725-EE88-B2B9-D46D-49891493E097}"/>
               </a:ext>
             </a:extLst>
           </p:cNvPr>
@@ -11274,7 +11274,7 @@
           <p:cNvPr id="9" name="Picture 8">
             <a:extLst>
               <a:ext uri="{FF2B5EF4-FFF2-40B4-BE49-F238E27FC236}">
-                <a16:creationId xmlns:a16="http://schemas.microsoft.com/office/drawing/2014/main" id="{B124BA87-EF5E-7CFF-210F-08C75857D324}"/>
+                <a16:creationId xmlns:a16="http://schemas.microsoft.com/office/drawing/2014/main" id="{A2354B65-C4D0-F538-CE12-B8729FD59CD4}"/>
               </a:ext>
             </a:extLst>
           </p:cNvPr>
@@ -11310,7 +11310,7 @@
           <p:cNvPr id="10" name="TextBox 9">
             <a:extLst>
               <a:ext uri="{FF2B5EF4-FFF2-40B4-BE49-F238E27FC236}">
-                <a16:creationId xmlns:a16="http://schemas.microsoft.com/office/drawing/2014/main" id="{81DD28EC-CD62-97F4-9CC2-6BA763F46523}"/>
+                <a16:creationId xmlns:a16="http://schemas.microsoft.com/office/drawing/2014/main" id="{ED3C4725-D245-F1FE-B120-2EDF47B4376C}"/>
               </a:ext>
             </a:extLst>
           </p:cNvPr>
@@ -11350,7 +11350,7 @@
           <p:cNvPr id="11" name="Rectangle: Rounded Corners 10">
             <a:extLst>
               <a:ext uri="{FF2B5EF4-FFF2-40B4-BE49-F238E27FC236}">
-                <a16:creationId xmlns:a16="http://schemas.microsoft.com/office/drawing/2014/main" id="{74B779C5-66D3-0CC0-EF70-C5DE746D9051}"/>
+                <a16:creationId xmlns:a16="http://schemas.microsoft.com/office/drawing/2014/main" id="{49512246-7C58-45DA-872B-F232B0E5B546}"/>
               </a:ext>
             </a:extLst>
           </p:cNvPr>
@@ -11404,7 +11404,7 @@
           <p:cNvPr id="13" name="Picture 12">
             <a:extLst>
               <a:ext uri="{FF2B5EF4-FFF2-40B4-BE49-F238E27FC236}">
-                <a16:creationId xmlns:a16="http://schemas.microsoft.com/office/drawing/2014/main" id="{299807F6-F9D8-6379-1754-DE2D66482410}"/>
+                <a16:creationId xmlns:a16="http://schemas.microsoft.com/office/drawing/2014/main" id="{44614A09-A46B-6FED-0FB1-372D65E520D0}"/>
               </a:ext>
             </a:extLst>
           </p:cNvPr>
@@ -11440,7 +11440,7 @@
           <p:cNvPr id="14" name="TextBox 13">
             <a:extLst>
               <a:ext uri="{FF2B5EF4-FFF2-40B4-BE49-F238E27FC236}">
-                <a16:creationId xmlns:a16="http://schemas.microsoft.com/office/drawing/2014/main" id="{6C533377-8223-6AA5-A240-71DD6D8EAD88}"/>
+                <a16:creationId xmlns:a16="http://schemas.microsoft.com/office/drawing/2014/main" id="{201894CC-29B2-45CC-E3C2-DA5ACD966F90}"/>
               </a:ext>
             </a:extLst>
           </p:cNvPr>
@@ -11480,7 +11480,7 @@
           <p:cNvPr id="15" name="Rectangle: Rounded Corners 14">
             <a:extLst>
               <a:ext uri="{FF2B5EF4-FFF2-40B4-BE49-F238E27FC236}">
-                <a16:creationId xmlns:a16="http://schemas.microsoft.com/office/drawing/2014/main" id="{0B826BF1-2DB8-E283-0946-E2BF4FE58AD0}"/>
+                <a16:creationId xmlns:a16="http://schemas.microsoft.com/office/drawing/2014/main" id="{9DC80D1A-FE46-969C-3640-9A19409F23E6}"/>
               </a:ext>
             </a:extLst>
           </p:cNvPr>
@@ -11534,7 +11534,7 @@
           <p:cNvPr id="17" name="Picture 16">
             <a:extLst>
               <a:ext uri="{FF2B5EF4-FFF2-40B4-BE49-F238E27FC236}">
-                <a16:creationId xmlns:a16="http://schemas.microsoft.com/office/drawing/2014/main" id="{9AF1C35E-4257-93A5-E9D6-7B94AA14AA2D}"/>
+                <a16:creationId xmlns:a16="http://schemas.microsoft.com/office/drawing/2014/main" id="{9E367B3D-70F6-0CDA-52BC-F20D89E96D29}"/>
               </a:ext>
             </a:extLst>
           </p:cNvPr>
@@ -11570,7 +11570,7 @@
           <p:cNvPr id="18" name="TextBox 17">
             <a:extLst>
               <a:ext uri="{FF2B5EF4-FFF2-40B4-BE49-F238E27FC236}">
-                <a16:creationId xmlns:a16="http://schemas.microsoft.com/office/drawing/2014/main" id="{080BAB11-C1C4-EC30-FCC5-87E1DDEDFA79}"/>
+                <a16:creationId xmlns:a16="http://schemas.microsoft.com/office/drawing/2014/main" id="{881D5F4E-CA29-F06D-508A-0041E07F2795}"/>
               </a:ext>
             </a:extLst>
           </p:cNvPr>
@@ -11610,7 +11610,7 @@
           <p:cNvPr id="19" name="Rectangle: Rounded Corners 18">
             <a:extLst>
               <a:ext uri="{FF2B5EF4-FFF2-40B4-BE49-F238E27FC236}">
-                <a16:creationId xmlns:a16="http://schemas.microsoft.com/office/drawing/2014/main" id="{A7399316-E4A9-28FB-7927-51F4482A3782}"/>
+                <a16:creationId xmlns:a16="http://schemas.microsoft.com/office/drawing/2014/main" id="{C76B6BE1-073D-E090-1E09-2372FF879A83}"/>
               </a:ext>
             </a:extLst>
           </p:cNvPr>
@@ -11678,7 +11678,7 @@
     </p:spTree>
     <p:extLst>
       <p:ext uri="{BB962C8B-B14F-4D97-AF65-F5344CB8AC3E}">
-        <p14:creationId xmlns:p14="http://schemas.microsoft.com/office/powerpoint/2010/main" val="2609931836"/>
+        <p14:creationId xmlns:p14="http://schemas.microsoft.com/office/powerpoint/2010/main" val="325109154"/>
       </p:ext>
     </p:extLst>
   </p:cSld>
@@ -11710,7 +11710,7 @@
           <p:cNvPr id="2" name="Rectangle 1">
             <a:extLst>
               <a:ext uri="{FF2B5EF4-FFF2-40B4-BE49-F238E27FC236}">
-                <a16:creationId xmlns:a16="http://schemas.microsoft.com/office/drawing/2014/main" id="{E04193B1-E0F5-7626-B126-9C62031D2FC9}"/>
+                <a16:creationId xmlns:a16="http://schemas.microsoft.com/office/drawing/2014/main" id="{DFFD63F4-A353-9C9F-EA69-A389ED036628}"/>
               </a:ext>
             </a:extLst>
           </p:cNvPr>
@@ -11778,7 +11778,7 @@
           <p:cNvPr id="3" name="Rectangle 2">
             <a:extLst>
               <a:ext uri="{FF2B5EF4-FFF2-40B4-BE49-F238E27FC236}">
-                <a16:creationId xmlns:a16="http://schemas.microsoft.com/office/drawing/2014/main" id="{11F7B183-C91F-85FB-EE6B-DD967CC999A2}"/>
+                <a16:creationId xmlns:a16="http://schemas.microsoft.com/office/drawing/2014/main" id="{EDC34CF2-FD7E-541D-682B-94153A5E2110}"/>
               </a:ext>
             </a:extLst>
           </p:cNvPr>
@@ -11846,7 +11846,7 @@
           <p:cNvPr id="4" name="TextBox 3">
             <a:extLst>
               <a:ext uri="{FF2B5EF4-FFF2-40B4-BE49-F238E27FC236}">
-                <a16:creationId xmlns:a16="http://schemas.microsoft.com/office/drawing/2014/main" id="{086C0573-BE6C-ADC2-1D32-7D06E0B3F941}"/>
+                <a16:creationId xmlns:a16="http://schemas.microsoft.com/office/drawing/2014/main" id="{CB61CE21-F13A-0547-593D-38EB623D3538}"/>
               </a:ext>
             </a:extLst>
           </p:cNvPr>
@@ -11886,7 +11886,7 @@
           <p:cNvPr id="5" name="TextBox 4">
             <a:extLst>
               <a:ext uri="{FF2B5EF4-FFF2-40B4-BE49-F238E27FC236}">
-                <a16:creationId xmlns:a16="http://schemas.microsoft.com/office/drawing/2014/main" id="{8EC1223F-13AD-F6AC-5680-79A1684D122F}"/>
+                <a16:creationId xmlns:a16="http://schemas.microsoft.com/office/drawing/2014/main" id="{BF9CAE98-B431-B00F-F4A5-61ACE8EFC505}"/>
               </a:ext>
             </a:extLst>
           </p:cNvPr>
@@ -11926,7 +11926,7 @@
           <p:cNvPr id="6" name="TextBox 5">
             <a:extLst>
               <a:ext uri="{FF2B5EF4-FFF2-40B4-BE49-F238E27FC236}">
-                <a16:creationId xmlns:a16="http://schemas.microsoft.com/office/drawing/2014/main" id="{87CA1E56-FF4E-7EAB-C8F1-E4BD57954DF8}"/>
+                <a16:creationId xmlns:a16="http://schemas.microsoft.com/office/drawing/2014/main" id="{E803B408-392A-B5EB-3363-2CD6546B107F}"/>
               </a:ext>
             </a:extLst>
           </p:cNvPr>
@@ -11956,7 +11956,7 @@
                 </a:solidFill>
                 <a:latin typeface="Segoe UI" panose="020B0502040204020203" pitchFamily="34" charset="0"/>
               </a:rPr>
-              <a:t>This is the critical grading slide: the team defends each status through outcome comparison instead of relying on pass-fail labels alone.</a:t>
+              <a:t>This slide shows how each status in the final workbook was justified through runtime behavior rather than summary labels alone.</a:t>
             </a:r>
           </a:p>
         </p:txBody>
@@ -11966,7 +11966,7 @@
           <p:cNvPr id="7" name="Rectangle: Rounded Corners 6">
             <a:extLst>
               <a:ext uri="{FF2B5EF4-FFF2-40B4-BE49-F238E27FC236}">
-                <a16:creationId xmlns:a16="http://schemas.microsoft.com/office/drawing/2014/main" id="{3171FF99-3FED-DCDF-AB79-954615D5B248}"/>
+                <a16:creationId xmlns:a16="http://schemas.microsoft.com/office/drawing/2014/main" id="{390BB8AC-8456-7C51-C740-A5FE3D077834}"/>
               </a:ext>
             </a:extLst>
           </p:cNvPr>
@@ -12020,7 +12020,7 @@
           <p:cNvPr id="8" name="Rectangle: Rounded Corners 7">
             <a:extLst>
               <a:ext uri="{FF2B5EF4-FFF2-40B4-BE49-F238E27FC236}">
-                <a16:creationId xmlns:a16="http://schemas.microsoft.com/office/drawing/2014/main" id="{CDBE4FEC-EF05-C2BA-ECE5-4C9C76799559}"/>
+                <a16:creationId xmlns:a16="http://schemas.microsoft.com/office/drawing/2014/main" id="{79BDFA1C-F8E1-0F2F-35BE-159E9E7A8E6A}"/>
               </a:ext>
             </a:extLst>
           </p:cNvPr>
@@ -12088,7 +12088,7 @@
           <p:cNvPr id="9" name="TextBox 8">
             <a:extLst>
               <a:ext uri="{FF2B5EF4-FFF2-40B4-BE49-F238E27FC236}">
-                <a16:creationId xmlns:a16="http://schemas.microsoft.com/office/drawing/2014/main" id="{F101DCA3-4972-A9CB-1C43-7C1A725A0B45}"/>
+                <a16:creationId xmlns:a16="http://schemas.microsoft.com/office/drawing/2014/main" id="{04DAD0DA-95E9-8467-EC07-04043255DAC0}"/>
               </a:ext>
             </a:extLst>
           </p:cNvPr>
@@ -12128,7 +12128,7 @@
           <p:cNvPr id="10" name="Rectangle: Rounded Corners 9">
             <a:extLst>
               <a:ext uri="{FF2B5EF4-FFF2-40B4-BE49-F238E27FC236}">
-                <a16:creationId xmlns:a16="http://schemas.microsoft.com/office/drawing/2014/main" id="{4E7FC287-03D0-7CDE-206C-82993B90A2EF}"/>
+                <a16:creationId xmlns:a16="http://schemas.microsoft.com/office/drawing/2014/main" id="{4261CCCE-7DDB-9DE8-589E-06A1B892B004}"/>
               </a:ext>
             </a:extLst>
           </p:cNvPr>
@@ -12204,7 +12204,7 @@
           <p:cNvPr id="11" name="TextBox 10">
             <a:extLst>
               <a:ext uri="{FF2B5EF4-FFF2-40B4-BE49-F238E27FC236}">
-                <a16:creationId xmlns:a16="http://schemas.microsoft.com/office/drawing/2014/main" id="{AD3F0D5D-4B53-96A3-CEF3-8591741362D5}"/>
+                <a16:creationId xmlns:a16="http://schemas.microsoft.com/office/drawing/2014/main" id="{26E07001-10ED-22FF-8DF9-6D7AF18BDBA3}"/>
               </a:ext>
             </a:extLst>
           </p:cNvPr>
@@ -12244,7 +12244,7 @@
           <p:cNvPr id="12" name="TextBox 11">
             <a:extLst>
               <a:ext uri="{FF2B5EF4-FFF2-40B4-BE49-F238E27FC236}">
-                <a16:creationId xmlns:a16="http://schemas.microsoft.com/office/drawing/2014/main" id="{5305DAC7-B50B-CB9B-277E-8280CB5FF548}"/>
+                <a16:creationId xmlns:a16="http://schemas.microsoft.com/office/drawing/2014/main" id="{D0798369-72F0-084A-6F06-B128A7DF8459}"/>
               </a:ext>
             </a:extLst>
           </p:cNvPr>
@@ -12285,7 +12285,7 @@
           <p:cNvPr id="13" name="TextBox 12">
             <a:extLst>
               <a:ext uri="{FF2B5EF4-FFF2-40B4-BE49-F238E27FC236}">
-                <a16:creationId xmlns:a16="http://schemas.microsoft.com/office/drawing/2014/main" id="{92B8C2B9-4048-5493-C4AA-76360BAE1189}"/>
+                <a16:creationId xmlns:a16="http://schemas.microsoft.com/office/drawing/2014/main" id="{4CC66FAC-F1CD-CC1A-F22E-B17B24DBAF18}"/>
               </a:ext>
             </a:extLst>
           </p:cNvPr>
@@ -12326,7 +12326,7 @@
           <p:cNvPr id="14" name="TextBox 13">
             <a:extLst>
               <a:ext uri="{FF2B5EF4-FFF2-40B4-BE49-F238E27FC236}">
-                <a16:creationId xmlns:a16="http://schemas.microsoft.com/office/drawing/2014/main" id="{CEF66642-CD3D-48F9-D8F9-78020DD57F3E}"/>
+                <a16:creationId xmlns:a16="http://schemas.microsoft.com/office/drawing/2014/main" id="{3C6008F2-EA84-2462-519F-203D4020B420}"/>
               </a:ext>
             </a:extLst>
           </p:cNvPr>
@@ -12366,7 +12366,7 @@
           <p:cNvPr id="15" name="Rectangle: Rounded Corners 14">
             <a:extLst>
               <a:ext uri="{FF2B5EF4-FFF2-40B4-BE49-F238E27FC236}">
-                <a16:creationId xmlns:a16="http://schemas.microsoft.com/office/drawing/2014/main" id="{68EF1917-6EB7-8714-B417-A2DA12D0B77D}"/>
+                <a16:creationId xmlns:a16="http://schemas.microsoft.com/office/drawing/2014/main" id="{0E9D7755-3F3B-2797-3DDB-B71053C382E9}"/>
               </a:ext>
             </a:extLst>
           </p:cNvPr>
@@ -12420,7 +12420,7 @@
           <p:cNvPr id="16" name="Rectangle: Rounded Corners 15">
             <a:extLst>
               <a:ext uri="{FF2B5EF4-FFF2-40B4-BE49-F238E27FC236}">
-                <a16:creationId xmlns:a16="http://schemas.microsoft.com/office/drawing/2014/main" id="{ABF78015-900D-E8B3-CEFF-066546A294F7}"/>
+                <a16:creationId xmlns:a16="http://schemas.microsoft.com/office/drawing/2014/main" id="{AFDB1F32-AF07-5843-A69C-4E0781CB5DCF}"/>
               </a:ext>
             </a:extLst>
           </p:cNvPr>
@@ -12488,7 +12488,7 @@
           <p:cNvPr id="17" name="TextBox 16">
             <a:extLst>
               <a:ext uri="{FF2B5EF4-FFF2-40B4-BE49-F238E27FC236}">
-                <a16:creationId xmlns:a16="http://schemas.microsoft.com/office/drawing/2014/main" id="{AFD7AFD3-C9B2-1E58-43ED-119194844275}"/>
+                <a16:creationId xmlns:a16="http://schemas.microsoft.com/office/drawing/2014/main" id="{BE3E4D18-F186-36F5-81AE-99D5F58316C5}"/>
               </a:ext>
             </a:extLst>
           </p:cNvPr>
@@ -12528,7 +12528,7 @@
           <p:cNvPr id="18" name="Rectangle: Rounded Corners 17">
             <a:extLst>
               <a:ext uri="{FF2B5EF4-FFF2-40B4-BE49-F238E27FC236}">
-                <a16:creationId xmlns:a16="http://schemas.microsoft.com/office/drawing/2014/main" id="{E2C2C5DD-0304-F6B9-59ED-CE92A4807C42}"/>
+                <a16:creationId xmlns:a16="http://schemas.microsoft.com/office/drawing/2014/main" id="{FFC657CF-348D-5FEC-49D3-14101E16E802}"/>
               </a:ext>
             </a:extLst>
           </p:cNvPr>
@@ -12604,7 +12604,7 @@
           <p:cNvPr id="19" name="TextBox 18">
             <a:extLst>
               <a:ext uri="{FF2B5EF4-FFF2-40B4-BE49-F238E27FC236}">
-                <a16:creationId xmlns:a16="http://schemas.microsoft.com/office/drawing/2014/main" id="{1637258E-3AC6-1392-B9BF-989A1F11F548}"/>
+                <a16:creationId xmlns:a16="http://schemas.microsoft.com/office/drawing/2014/main" id="{A34BF8F1-A6DA-D98B-2B1D-E68F763FF405}"/>
               </a:ext>
             </a:extLst>
           </p:cNvPr>
@@ -12644,7 +12644,7 @@
           <p:cNvPr id="20" name="TextBox 19">
             <a:extLst>
               <a:ext uri="{FF2B5EF4-FFF2-40B4-BE49-F238E27FC236}">
-                <a16:creationId xmlns:a16="http://schemas.microsoft.com/office/drawing/2014/main" id="{6EF72E53-BB47-166C-DF2A-0491E3E9EC61}"/>
+                <a16:creationId xmlns:a16="http://schemas.microsoft.com/office/drawing/2014/main" id="{451FF4F1-0FCC-FC28-7FA0-D9A23A568D0F}"/>
               </a:ext>
             </a:extLst>
           </p:cNvPr>
@@ -12685,7 +12685,7 @@
           <p:cNvPr id="21" name="TextBox 20">
             <a:extLst>
               <a:ext uri="{FF2B5EF4-FFF2-40B4-BE49-F238E27FC236}">
-                <a16:creationId xmlns:a16="http://schemas.microsoft.com/office/drawing/2014/main" id="{F4C1093D-B141-96A7-69C4-D28B93896603}"/>
+                <a16:creationId xmlns:a16="http://schemas.microsoft.com/office/drawing/2014/main" id="{EBBA4C63-48A5-2637-924A-987A3DED68D2}"/>
               </a:ext>
             </a:extLst>
           </p:cNvPr>
@@ -12726,7 +12726,7 @@
           <p:cNvPr id="22" name="TextBox 21">
             <a:extLst>
               <a:ext uri="{FF2B5EF4-FFF2-40B4-BE49-F238E27FC236}">
-                <a16:creationId xmlns:a16="http://schemas.microsoft.com/office/drawing/2014/main" id="{03C001C4-0393-AF5F-CAE8-4BA4E4608156}"/>
+                <a16:creationId xmlns:a16="http://schemas.microsoft.com/office/drawing/2014/main" id="{2F5E3E66-2D8A-AE1F-602E-B574328FF55B}"/>
               </a:ext>
             </a:extLst>
           </p:cNvPr>
@@ -12766,7 +12766,7 @@
           <p:cNvPr id="23" name="Rectangle: Rounded Corners 22">
             <a:extLst>
               <a:ext uri="{FF2B5EF4-FFF2-40B4-BE49-F238E27FC236}">
-                <a16:creationId xmlns:a16="http://schemas.microsoft.com/office/drawing/2014/main" id="{CF3F10CB-EF6F-8F5A-7983-ACD0537CEC96}"/>
+                <a16:creationId xmlns:a16="http://schemas.microsoft.com/office/drawing/2014/main" id="{2556D11B-99CB-119E-5FEF-64F96FC704EA}"/>
               </a:ext>
             </a:extLst>
           </p:cNvPr>
@@ -12820,7 +12820,7 @@
           <p:cNvPr id="24" name="Rectangle: Rounded Corners 23">
             <a:extLst>
               <a:ext uri="{FF2B5EF4-FFF2-40B4-BE49-F238E27FC236}">
-                <a16:creationId xmlns:a16="http://schemas.microsoft.com/office/drawing/2014/main" id="{2DA9C333-1242-1F19-7856-A29E347C5BAF}"/>
+                <a16:creationId xmlns:a16="http://schemas.microsoft.com/office/drawing/2014/main" id="{4280F3BD-6AB5-B24C-281E-2867501BBEDE}"/>
               </a:ext>
             </a:extLst>
           </p:cNvPr>
@@ -12888,7 +12888,7 @@
           <p:cNvPr id="25" name="TextBox 24">
             <a:extLst>
               <a:ext uri="{FF2B5EF4-FFF2-40B4-BE49-F238E27FC236}">
-                <a16:creationId xmlns:a16="http://schemas.microsoft.com/office/drawing/2014/main" id="{93503DB7-EAD5-6A19-81C1-75C673005B09}"/>
+                <a16:creationId xmlns:a16="http://schemas.microsoft.com/office/drawing/2014/main" id="{841B8F0E-AC7B-58FD-C92E-E66358F26DBF}"/>
               </a:ext>
             </a:extLst>
           </p:cNvPr>
@@ -12928,7 +12928,7 @@
           <p:cNvPr id="26" name="Rectangle: Rounded Corners 25">
             <a:extLst>
               <a:ext uri="{FF2B5EF4-FFF2-40B4-BE49-F238E27FC236}">
-                <a16:creationId xmlns:a16="http://schemas.microsoft.com/office/drawing/2014/main" id="{FE076A39-3D93-1C14-0A0A-35AAF2CEDC14}"/>
+                <a16:creationId xmlns:a16="http://schemas.microsoft.com/office/drawing/2014/main" id="{87D64B38-3214-7E57-87B6-515232672069}"/>
               </a:ext>
             </a:extLst>
           </p:cNvPr>
@@ -13004,7 +13004,7 @@
           <p:cNvPr id="27" name="TextBox 26">
             <a:extLst>
               <a:ext uri="{FF2B5EF4-FFF2-40B4-BE49-F238E27FC236}">
-                <a16:creationId xmlns:a16="http://schemas.microsoft.com/office/drawing/2014/main" id="{662F50A8-51A6-F141-D30F-4570A2F1E58D}"/>
+                <a16:creationId xmlns:a16="http://schemas.microsoft.com/office/drawing/2014/main" id="{AE07F2DC-6CD5-8D63-8DC2-26430ECC6032}"/>
               </a:ext>
             </a:extLst>
           </p:cNvPr>
@@ -13044,7 +13044,7 @@
           <p:cNvPr id="28" name="TextBox 27">
             <a:extLst>
               <a:ext uri="{FF2B5EF4-FFF2-40B4-BE49-F238E27FC236}">
-                <a16:creationId xmlns:a16="http://schemas.microsoft.com/office/drawing/2014/main" id="{BC0CBB51-3467-BA9E-F2F2-19413C6046F2}"/>
+                <a16:creationId xmlns:a16="http://schemas.microsoft.com/office/drawing/2014/main" id="{7B00D01B-1192-F264-0CC6-6B7D5E3652E4}"/>
               </a:ext>
             </a:extLst>
           </p:cNvPr>
@@ -13085,7 +13085,7 @@
           <p:cNvPr id="29" name="TextBox 28">
             <a:extLst>
               <a:ext uri="{FF2B5EF4-FFF2-40B4-BE49-F238E27FC236}">
-                <a16:creationId xmlns:a16="http://schemas.microsoft.com/office/drawing/2014/main" id="{9493C1E9-FC52-A62F-9675-9B49E72021E6}"/>
+                <a16:creationId xmlns:a16="http://schemas.microsoft.com/office/drawing/2014/main" id="{EC43ACCD-22E5-6C4A-1C2B-4800FCCCA47A}"/>
               </a:ext>
             </a:extLst>
           </p:cNvPr>
@@ -13126,7 +13126,7 @@
           <p:cNvPr id="30" name="TextBox 29">
             <a:extLst>
               <a:ext uri="{FF2B5EF4-FFF2-40B4-BE49-F238E27FC236}">
-                <a16:creationId xmlns:a16="http://schemas.microsoft.com/office/drawing/2014/main" id="{4E9F45EA-969C-CB11-D682-D02F78F4B7D9}"/>
+                <a16:creationId xmlns:a16="http://schemas.microsoft.com/office/drawing/2014/main" id="{BFAE8B5C-9428-D022-502D-7B79C6C58F24}"/>
               </a:ext>
             </a:extLst>
           </p:cNvPr>
@@ -13166,7 +13166,7 @@
           <p:cNvPr id="31" name="Rectangle: Rounded Corners 30">
             <a:extLst>
               <a:ext uri="{FF2B5EF4-FFF2-40B4-BE49-F238E27FC236}">
-                <a16:creationId xmlns:a16="http://schemas.microsoft.com/office/drawing/2014/main" id="{6A69B22A-BCAD-1701-EF97-933DAD5AF2BB}"/>
+                <a16:creationId xmlns:a16="http://schemas.microsoft.com/office/drawing/2014/main" id="{358F38E0-4C30-D7DD-6B16-5632E723200C}"/>
               </a:ext>
             </a:extLst>
           </p:cNvPr>
@@ -13220,7 +13220,7 @@
           <p:cNvPr id="32" name="Rectangle: Rounded Corners 31">
             <a:extLst>
               <a:ext uri="{FF2B5EF4-FFF2-40B4-BE49-F238E27FC236}">
-                <a16:creationId xmlns:a16="http://schemas.microsoft.com/office/drawing/2014/main" id="{1033B327-F192-5AA2-6D73-92E481DF65C9}"/>
+                <a16:creationId xmlns:a16="http://schemas.microsoft.com/office/drawing/2014/main" id="{D5484257-4B31-00A1-2E55-4CB445D9344E}"/>
               </a:ext>
             </a:extLst>
           </p:cNvPr>
@@ -13288,7 +13288,7 @@
           <p:cNvPr id="33" name="TextBox 32">
             <a:extLst>
               <a:ext uri="{FF2B5EF4-FFF2-40B4-BE49-F238E27FC236}">
-                <a16:creationId xmlns:a16="http://schemas.microsoft.com/office/drawing/2014/main" id="{7C043507-1470-2BF5-EE61-F109E9148A8C}"/>
+                <a16:creationId xmlns:a16="http://schemas.microsoft.com/office/drawing/2014/main" id="{C3218A09-F542-CE7C-9DB1-C58541A32933}"/>
               </a:ext>
             </a:extLst>
           </p:cNvPr>
@@ -13328,7 +13328,7 @@
           <p:cNvPr id="34" name="Rectangle: Rounded Corners 33">
             <a:extLst>
               <a:ext uri="{FF2B5EF4-FFF2-40B4-BE49-F238E27FC236}">
-                <a16:creationId xmlns:a16="http://schemas.microsoft.com/office/drawing/2014/main" id="{ACC1532C-9A78-D17A-8541-EBF8A27817F4}"/>
+                <a16:creationId xmlns:a16="http://schemas.microsoft.com/office/drawing/2014/main" id="{4D0271C4-B490-D039-D3D9-AF686ADA01F2}"/>
               </a:ext>
             </a:extLst>
           </p:cNvPr>
@@ -13404,7 +13404,7 @@
           <p:cNvPr id="35" name="TextBox 34">
             <a:extLst>
               <a:ext uri="{FF2B5EF4-FFF2-40B4-BE49-F238E27FC236}">
-                <a16:creationId xmlns:a16="http://schemas.microsoft.com/office/drawing/2014/main" id="{88AF712D-787D-AE9D-21E4-052073089B20}"/>
+                <a16:creationId xmlns:a16="http://schemas.microsoft.com/office/drawing/2014/main" id="{44441833-E40D-931A-3FCD-5DB6534FE1F1}"/>
               </a:ext>
             </a:extLst>
           </p:cNvPr>
@@ -13444,7 +13444,7 @@
           <p:cNvPr id="36" name="TextBox 35">
             <a:extLst>
               <a:ext uri="{FF2B5EF4-FFF2-40B4-BE49-F238E27FC236}">
-                <a16:creationId xmlns:a16="http://schemas.microsoft.com/office/drawing/2014/main" id="{CBCD42EA-4FC9-F2AA-7F8C-26FB1C8956B7}"/>
+                <a16:creationId xmlns:a16="http://schemas.microsoft.com/office/drawing/2014/main" id="{B244D068-B249-14F1-22ED-7CB0FF1B165A}"/>
               </a:ext>
             </a:extLst>
           </p:cNvPr>
@@ -13485,7 +13485,7 @@
           <p:cNvPr id="37" name="TextBox 36">
             <a:extLst>
               <a:ext uri="{FF2B5EF4-FFF2-40B4-BE49-F238E27FC236}">
-                <a16:creationId xmlns:a16="http://schemas.microsoft.com/office/drawing/2014/main" id="{8B5C2AF4-9505-074B-D3EA-6D1F55F30BB9}"/>
+                <a16:creationId xmlns:a16="http://schemas.microsoft.com/office/drawing/2014/main" id="{FF49DE18-F9A9-2EE7-725A-1A98ACC19407}"/>
               </a:ext>
             </a:extLst>
           </p:cNvPr>
@@ -13526,7 +13526,7 @@
           <p:cNvPr id="38" name="TextBox 37">
             <a:extLst>
               <a:ext uri="{FF2B5EF4-FFF2-40B4-BE49-F238E27FC236}">
-                <a16:creationId xmlns:a16="http://schemas.microsoft.com/office/drawing/2014/main" id="{D8A3731C-F656-F5D7-566C-DD30EE8E828C}"/>
+                <a16:creationId xmlns:a16="http://schemas.microsoft.com/office/drawing/2014/main" id="{C8BEECDD-B4B6-B6E5-8C33-20F1FE093DDC}"/>
               </a:ext>
             </a:extLst>
           </p:cNvPr>
@@ -13564,7 +13564,7 @@
     </p:spTree>
     <p:extLst>
       <p:ext uri="{BB962C8B-B14F-4D97-AF65-F5344CB8AC3E}">
-        <p14:creationId xmlns:p14="http://schemas.microsoft.com/office/powerpoint/2010/main" val="787579900"/>
+        <p14:creationId xmlns:p14="http://schemas.microsoft.com/office/powerpoint/2010/main" val="1943592697"/>
       </p:ext>
     </p:extLst>
   </p:cSld>
@@ -13596,7 +13596,7 @@
           <p:cNvPr id="2" name="Rectangle 1">
             <a:extLst>
               <a:ext uri="{FF2B5EF4-FFF2-40B4-BE49-F238E27FC236}">
-                <a16:creationId xmlns:a16="http://schemas.microsoft.com/office/drawing/2014/main" id="{B1C0347D-66D2-0CC4-8B95-62AD5CC42C86}"/>
+                <a16:creationId xmlns:a16="http://schemas.microsoft.com/office/drawing/2014/main" id="{FCEF75B2-45D1-3432-5A81-DFDAD581796F}"/>
               </a:ext>
             </a:extLst>
           </p:cNvPr>
@@ -13664,7 +13664,7 @@
           <p:cNvPr id="3" name="Rectangle 2">
             <a:extLst>
               <a:ext uri="{FF2B5EF4-FFF2-40B4-BE49-F238E27FC236}">
-                <a16:creationId xmlns:a16="http://schemas.microsoft.com/office/drawing/2014/main" id="{00A0C082-F29A-28DD-61B2-3AE749129087}"/>
+                <a16:creationId xmlns:a16="http://schemas.microsoft.com/office/drawing/2014/main" id="{9F9A658A-6963-8344-82D5-90054D66D1E7}"/>
               </a:ext>
             </a:extLst>
           </p:cNvPr>
@@ -13732,7 +13732,7 @@
           <p:cNvPr id="4" name="TextBox 3">
             <a:extLst>
               <a:ext uri="{FF2B5EF4-FFF2-40B4-BE49-F238E27FC236}">
-                <a16:creationId xmlns:a16="http://schemas.microsoft.com/office/drawing/2014/main" id="{2CBA1DFF-0C8C-1EEF-35FD-A86A06D4AC2D}"/>
+                <a16:creationId xmlns:a16="http://schemas.microsoft.com/office/drawing/2014/main" id="{1B91CC6D-7A9E-7064-4F5A-9B6ECA9E4004}"/>
               </a:ext>
             </a:extLst>
           </p:cNvPr>
@@ -13772,7 +13772,7 @@
           <p:cNvPr id="5" name="TextBox 4">
             <a:extLst>
               <a:ext uri="{FF2B5EF4-FFF2-40B4-BE49-F238E27FC236}">
-                <a16:creationId xmlns:a16="http://schemas.microsoft.com/office/drawing/2014/main" id="{ED110A83-06D6-D539-DE94-A124B58EC1E7}"/>
+                <a16:creationId xmlns:a16="http://schemas.microsoft.com/office/drawing/2014/main" id="{2C756D8B-EF42-A526-B011-EB21684756AB}"/>
               </a:ext>
             </a:extLst>
           </p:cNvPr>
@@ -13812,7 +13812,7 @@
           <p:cNvPr id="6" name="TextBox 5">
             <a:extLst>
               <a:ext uri="{FF2B5EF4-FFF2-40B4-BE49-F238E27FC236}">
-                <a16:creationId xmlns:a16="http://schemas.microsoft.com/office/drawing/2014/main" id="{4D060BAC-1928-B830-423E-520257C8ED3A}"/>
+                <a16:creationId xmlns:a16="http://schemas.microsoft.com/office/drawing/2014/main" id="{80CD4E0D-3134-4F42-D918-E55C91944BDF}"/>
               </a:ext>
             </a:extLst>
           </p:cNvPr>
@@ -13842,7 +13842,7 @@
                 </a:solidFill>
                 <a:latin typeface="Segoe UI" panose="020B0502040204020203" pitchFamily="34" charset="0"/>
               </a:rPr>
-              <a:t>The metric view is strong because it distinguishes coverage from product quality instead of merging them into a single conclusion.</a:t>
+              <a:t>The metrics separate test coverage from product quality so the conclusion stays rigorous and evidence-based.</a:t>
             </a:r>
           </a:p>
         </p:txBody>
@@ -13852,7 +13852,7 @@
           <p:cNvPr id="7" name="Rectangle: Rounded Corners 6">
             <a:extLst>
               <a:ext uri="{FF2B5EF4-FFF2-40B4-BE49-F238E27FC236}">
-                <a16:creationId xmlns:a16="http://schemas.microsoft.com/office/drawing/2014/main" id="{F6237548-8E50-6754-14B5-7995B1DF1EA3}"/>
+                <a16:creationId xmlns:a16="http://schemas.microsoft.com/office/drawing/2014/main" id="{920136EB-BF54-05E5-343B-74BDB1ED5991}"/>
               </a:ext>
             </a:extLst>
           </p:cNvPr>
@@ -13906,7 +13906,7 @@
           <p:cNvPr id="9" name="Picture 8">
             <a:extLst>
               <a:ext uri="{FF2B5EF4-FFF2-40B4-BE49-F238E27FC236}">
-                <a16:creationId xmlns:a16="http://schemas.microsoft.com/office/drawing/2014/main" id="{6F38F548-A9EE-C2B4-03AA-6AD629DF0E57}"/>
+                <a16:creationId xmlns:a16="http://schemas.microsoft.com/office/drawing/2014/main" id="{85EA50A8-B96D-9653-E05E-83789C29AE5E}"/>
               </a:ext>
             </a:extLst>
           </p:cNvPr>
@@ -13942,7 +13942,7 @@
           <p:cNvPr id="10" name="TextBox 9">
             <a:extLst>
               <a:ext uri="{FF2B5EF4-FFF2-40B4-BE49-F238E27FC236}">
-                <a16:creationId xmlns:a16="http://schemas.microsoft.com/office/drawing/2014/main" id="{3FCE4832-1988-4C9B-A05D-265B2759E15D}"/>
+                <a16:creationId xmlns:a16="http://schemas.microsoft.com/office/drawing/2014/main" id="{E8325A92-ACC9-AD4D-8D68-6993D931B549}"/>
               </a:ext>
             </a:extLst>
           </p:cNvPr>
@@ -13982,7 +13982,7 @@
           <p:cNvPr id="11" name="Rectangle: Rounded Corners 10">
             <a:extLst>
               <a:ext uri="{FF2B5EF4-FFF2-40B4-BE49-F238E27FC236}">
-                <a16:creationId xmlns:a16="http://schemas.microsoft.com/office/drawing/2014/main" id="{616875E6-D2CD-403C-96FB-E57BCAE055E3}"/>
+                <a16:creationId xmlns:a16="http://schemas.microsoft.com/office/drawing/2014/main" id="{B48A5011-466D-499B-D79E-A4F003EBF9AF}"/>
               </a:ext>
             </a:extLst>
           </p:cNvPr>
@@ -14036,7 +14036,7 @@
           <p:cNvPr id="12" name="Rectangle: Rounded Corners 11">
             <a:extLst>
               <a:ext uri="{FF2B5EF4-FFF2-40B4-BE49-F238E27FC236}">
-                <a16:creationId xmlns:a16="http://schemas.microsoft.com/office/drawing/2014/main" id="{819D2BFF-5371-6BC4-5D33-39C378EEBF5E}"/>
+                <a16:creationId xmlns:a16="http://schemas.microsoft.com/office/drawing/2014/main" id="{7A163924-91D4-D01C-1926-AFB11C8E3925}"/>
               </a:ext>
             </a:extLst>
           </p:cNvPr>
@@ -14104,7 +14104,7 @@
           <p:cNvPr id="13" name="TextBox 12">
             <a:extLst>
               <a:ext uri="{FF2B5EF4-FFF2-40B4-BE49-F238E27FC236}">
-                <a16:creationId xmlns:a16="http://schemas.microsoft.com/office/drawing/2014/main" id="{4451C462-D5C8-7756-585A-C20C5B9AD05E}"/>
+                <a16:creationId xmlns:a16="http://schemas.microsoft.com/office/drawing/2014/main" id="{EB6AA45E-EBF1-2B79-6229-BCE3A2EF961A}"/>
               </a:ext>
             </a:extLst>
           </p:cNvPr>
@@ -14144,7 +14144,7 @@
           <p:cNvPr id="14" name="TextBox 13">
             <a:extLst>
               <a:ext uri="{FF2B5EF4-FFF2-40B4-BE49-F238E27FC236}">
-                <a16:creationId xmlns:a16="http://schemas.microsoft.com/office/drawing/2014/main" id="{57524164-6499-BDD7-D9D3-2DBD866ED258}"/>
+                <a16:creationId xmlns:a16="http://schemas.microsoft.com/office/drawing/2014/main" id="{6463E7EC-C5AA-BAF4-1E54-11ECC6074315}"/>
               </a:ext>
             </a:extLst>
           </p:cNvPr>
@@ -14184,7 +14184,7 @@
           <p:cNvPr id="15" name="Rectangle: Rounded Corners 14">
             <a:extLst>
               <a:ext uri="{FF2B5EF4-FFF2-40B4-BE49-F238E27FC236}">
-                <a16:creationId xmlns:a16="http://schemas.microsoft.com/office/drawing/2014/main" id="{86F7667B-B712-4BE5-4FFD-99586374C5F6}"/>
+                <a16:creationId xmlns:a16="http://schemas.microsoft.com/office/drawing/2014/main" id="{F03671B9-12F3-4D84-B98E-B053ABA0869F}"/>
               </a:ext>
             </a:extLst>
           </p:cNvPr>
@@ -14238,7 +14238,7 @@
           <p:cNvPr id="16" name="Rectangle: Rounded Corners 15">
             <a:extLst>
               <a:ext uri="{FF2B5EF4-FFF2-40B4-BE49-F238E27FC236}">
-                <a16:creationId xmlns:a16="http://schemas.microsoft.com/office/drawing/2014/main" id="{1B392AD8-204A-951B-A856-4D0740ACF254}"/>
+                <a16:creationId xmlns:a16="http://schemas.microsoft.com/office/drawing/2014/main" id="{727DF457-B90B-64FF-E6FB-9B68F0CFCB52}"/>
               </a:ext>
             </a:extLst>
           </p:cNvPr>
@@ -14306,7 +14306,7 @@
           <p:cNvPr id="17" name="TextBox 16">
             <a:extLst>
               <a:ext uri="{FF2B5EF4-FFF2-40B4-BE49-F238E27FC236}">
-                <a16:creationId xmlns:a16="http://schemas.microsoft.com/office/drawing/2014/main" id="{86BECC8F-0A92-369A-D21A-4E3C8DD378B1}"/>
+                <a16:creationId xmlns:a16="http://schemas.microsoft.com/office/drawing/2014/main" id="{7642B109-6685-3EB8-1D9D-E1D306251FD9}"/>
               </a:ext>
             </a:extLst>
           </p:cNvPr>
@@ -14346,7 +14346,7 @@
           <p:cNvPr id="18" name="TextBox 17">
             <a:extLst>
               <a:ext uri="{FF2B5EF4-FFF2-40B4-BE49-F238E27FC236}">
-                <a16:creationId xmlns:a16="http://schemas.microsoft.com/office/drawing/2014/main" id="{96FDD20F-48D9-6C46-0B89-0CFC611AD6A1}"/>
+                <a16:creationId xmlns:a16="http://schemas.microsoft.com/office/drawing/2014/main" id="{96F19A19-771B-1786-E029-0364A8C942D5}"/>
               </a:ext>
             </a:extLst>
           </p:cNvPr>
@@ -14386,7 +14386,7 @@
           <p:cNvPr id="19" name="Rectangle: Rounded Corners 18">
             <a:extLst>
               <a:ext uri="{FF2B5EF4-FFF2-40B4-BE49-F238E27FC236}">
-                <a16:creationId xmlns:a16="http://schemas.microsoft.com/office/drawing/2014/main" id="{73FA135E-7CF3-1E94-3C11-4B1B712B77CF}"/>
+                <a16:creationId xmlns:a16="http://schemas.microsoft.com/office/drawing/2014/main" id="{217BB2DD-3580-8244-44E4-3ADC1F0E101A}"/>
               </a:ext>
             </a:extLst>
           </p:cNvPr>
@@ -14440,7 +14440,7 @@
           <p:cNvPr id="20" name="Rectangle: Rounded Corners 19">
             <a:extLst>
               <a:ext uri="{FF2B5EF4-FFF2-40B4-BE49-F238E27FC236}">
-                <a16:creationId xmlns:a16="http://schemas.microsoft.com/office/drawing/2014/main" id="{29344522-4574-0862-3130-505B0F2FDF6E}"/>
+                <a16:creationId xmlns:a16="http://schemas.microsoft.com/office/drawing/2014/main" id="{E943FA5B-B528-540C-D552-DDD37BAF405B}"/>
               </a:ext>
             </a:extLst>
           </p:cNvPr>
@@ -14508,7 +14508,7 @@
           <p:cNvPr id="21" name="TextBox 20">
             <a:extLst>
               <a:ext uri="{FF2B5EF4-FFF2-40B4-BE49-F238E27FC236}">
-                <a16:creationId xmlns:a16="http://schemas.microsoft.com/office/drawing/2014/main" id="{66D3FECF-489B-E3A7-2052-AA3699C77D49}"/>
+                <a16:creationId xmlns:a16="http://schemas.microsoft.com/office/drawing/2014/main" id="{4E17681A-00FB-C254-1DC0-FEC28460FCD6}"/>
               </a:ext>
             </a:extLst>
           </p:cNvPr>
@@ -14548,7 +14548,7 @@
           <p:cNvPr id="22" name="TextBox 21">
             <a:extLst>
               <a:ext uri="{FF2B5EF4-FFF2-40B4-BE49-F238E27FC236}">
-                <a16:creationId xmlns:a16="http://schemas.microsoft.com/office/drawing/2014/main" id="{FB993D1C-69FA-2B12-7C1F-76D5F33DDB1F}"/>
+                <a16:creationId xmlns:a16="http://schemas.microsoft.com/office/drawing/2014/main" id="{B3EC02DE-89D8-A3BD-A89D-7B13CCD01C60}"/>
               </a:ext>
             </a:extLst>
           </p:cNvPr>
@@ -14588,7 +14588,7 @@
           <p:cNvPr id="23" name="Rectangle: Rounded Corners 22">
             <a:extLst>
               <a:ext uri="{FF2B5EF4-FFF2-40B4-BE49-F238E27FC236}">
-                <a16:creationId xmlns:a16="http://schemas.microsoft.com/office/drawing/2014/main" id="{7CB162F7-46C4-4A3B-3F9C-1AA4C1B6FFA3}"/>
+                <a16:creationId xmlns:a16="http://schemas.microsoft.com/office/drawing/2014/main" id="{760A408C-706B-3C11-AAA9-08CA3E0905A1}"/>
               </a:ext>
             </a:extLst>
           </p:cNvPr>
@@ -14642,7 +14642,7 @@
           <p:cNvPr id="24" name="Rectangle: Rounded Corners 23">
             <a:extLst>
               <a:ext uri="{FF2B5EF4-FFF2-40B4-BE49-F238E27FC236}">
-                <a16:creationId xmlns:a16="http://schemas.microsoft.com/office/drawing/2014/main" id="{E882014E-74B5-2F92-459C-6D1B3372C216}"/>
+                <a16:creationId xmlns:a16="http://schemas.microsoft.com/office/drawing/2014/main" id="{45C534F1-2707-79BE-EC09-3D1F0DCD2180}"/>
               </a:ext>
             </a:extLst>
           </p:cNvPr>
@@ -14710,7 +14710,7 @@
           <p:cNvPr id="25" name="TextBox 24">
             <a:extLst>
               <a:ext uri="{FF2B5EF4-FFF2-40B4-BE49-F238E27FC236}">
-                <a16:creationId xmlns:a16="http://schemas.microsoft.com/office/drawing/2014/main" id="{523EAAA4-F14C-673A-AFDB-C7B90D813B79}"/>
+                <a16:creationId xmlns:a16="http://schemas.microsoft.com/office/drawing/2014/main" id="{9FD2C95A-899B-9DF1-A10F-8F94F7AC47E6}"/>
               </a:ext>
             </a:extLst>
           </p:cNvPr>
@@ -14750,7 +14750,7 @@
           <p:cNvPr id="26" name="TextBox 25">
             <a:extLst>
               <a:ext uri="{FF2B5EF4-FFF2-40B4-BE49-F238E27FC236}">
-                <a16:creationId xmlns:a16="http://schemas.microsoft.com/office/drawing/2014/main" id="{53DB23AA-1CCC-E44C-7754-7EB6E5BC4065}"/>
+                <a16:creationId xmlns:a16="http://schemas.microsoft.com/office/drawing/2014/main" id="{05FCA919-41CD-1E10-4DDB-998144CC2007}"/>
               </a:ext>
             </a:extLst>
           </p:cNvPr>
@@ -14790,7 +14790,7 @@
           <p:cNvPr id="27" name="Rectangle: Rounded Corners 26">
             <a:extLst>
               <a:ext uri="{FF2B5EF4-FFF2-40B4-BE49-F238E27FC236}">
-                <a16:creationId xmlns:a16="http://schemas.microsoft.com/office/drawing/2014/main" id="{7F6125BD-BE0A-4F25-7D7E-1D9920D8DF1E}"/>
+                <a16:creationId xmlns:a16="http://schemas.microsoft.com/office/drawing/2014/main" id="{7C6010DD-4258-477B-092C-A006910515C4}"/>
               </a:ext>
             </a:extLst>
           </p:cNvPr>
@@ -14854,7 +14854,7 @@
     </p:spTree>
     <p:extLst>
       <p:ext uri="{BB962C8B-B14F-4D97-AF65-F5344CB8AC3E}">
-        <p14:creationId xmlns:p14="http://schemas.microsoft.com/office/powerpoint/2010/main" val="3454684118"/>
+        <p14:creationId xmlns:p14="http://schemas.microsoft.com/office/powerpoint/2010/main" val="2820725562"/>
       </p:ext>
     </p:extLst>
   </p:cSld>
@@ -14886,7 +14886,7 @@
           <p:cNvPr id="2" name="Rectangle 1">
             <a:extLst>
               <a:ext uri="{FF2B5EF4-FFF2-40B4-BE49-F238E27FC236}">
-                <a16:creationId xmlns:a16="http://schemas.microsoft.com/office/drawing/2014/main" id="{C7A66ABB-2CEE-9747-6A63-9B33979E30E5}"/>
+                <a16:creationId xmlns:a16="http://schemas.microsoft.com/office/drawing/2014/main" id="{2339AA99-F293-A857-BF45-C18453C34370}"/>
               </a:ext>
             </a:extLst>
           </p:cNvPr>
@@ -14954,7 +14954,7 @@
           <p:cNvPr id="3" name="Rectangle 2">
             <a:extLst>
               <a:ext uri="{FF2B5EF4-FFF2-40B4-BE49-F238E27FC236}">
-                <a16:creationId xmlns:a16="http://schemas.microsoft.com/office/drawing/2014/main" id="{E10A237A-2819-556C-45F5-6B4FF97FA434}"/>
+                <a16:creationId xmlns:a16="http://schemas.microsoft.com/office/drawing/2014/main" id="{0406DC9D-78C5-C37A-FCB6-5C95366DEEF1}"/>
               </a:ext>
             </a:extLst>
           </p:cNvPr>
@@ -15022,7 +15022,7 @@
           <p:cNvPr id="4" name="TextBox 3">
             <a:extLst>
               <a:ext uri="{FF2B5EF4-FFF2-40B4-BE49-F238E27FC236}">
-                <a16:creationId xmlns:a16="http://schemas.microsoft.com/office/drawing/2014/main" id="{F8452F79-736C-91CA-FEF3-8BA9E4AD7134}"/>
+                <a16:creationId xmlns:a16="http://schemas.microsoft.com/office/drawing/2014/main" id="{00D0A5AA-1F51-CDFA-AF62-02B011984252}"/>
               </a:ext>
             </a:extLst>
           </p:cNvPr>
@@ -15062,7 +15062,7 @@
           <p:cNvPr id="5" name="TextBox 4">
             <a:extLst>
               <a:ext uri="{FF2B5EF4-FFF2-40B4-BE49-F238E27FC236}">
-                <a16:creationId xmlns:a16="http://schemas.microsoft.com/office/drawing/2014/main" id="{8AA80DDD-8987-090A-E81D-DA641F4025D6}"/>
+                <a16:creationId xmlns:a16="http://schemas.microsoft.com/office/drawing/2014/main" id="{65A3EC77-3A12-707B-E829-5D5E5A2EED4B}"/>
               </a:ext>
             </a:extLst>
           </p:cNvPr>
@@ -15102,7 +15102,7 @@
           <p:cNvPr id="6" name="TextBox 5">
             <a:extLst>
               <a:ext uri="{FF2B5EF4-FFF2-40B4-BE49-F238E27FC236}">
-                <a16:creationId xmlns:a16="http://schemas.microsoft.com/office/drawing/2014/main" id="{4CE1692F-308C-37AA-E588-78F1932678A2}"/>
+                <a16:creationId xmlns:a16="http://schemas.microsoft.com/office/drawing/2014/main" id="{E4976F71-7DB8-EC29-CB82-967C122D4958}"/>
               </a:ext>
             </a:extLst>
           </p:cNvPr>
@@ -15132,7 +15132,7 @@
                 </a:solidFill>
                 <a:latin typeface="Segoe UI" panose="020B0502040204020203" pitchFamily="34" charset="0"/>
               </a:rPr>
-              <a:t>The submission now includes visible issue-tracker evidence with severity and priority, which is a direct grading requirement.</a:t>
+              <a:t>Each confirmed defect is supported by reproducible evidence and a live GitHub issue with visible severity and priority labels.</a:t>
             </a:r>
           </a:p>
         </p:txBody>
@@ -15142,7 +15142,7 @@
           <p:cNvPr id="7" name="Rectangle: Rounded Corners 6">
             <a:extLst>
               <a:ext uri="{FF2B5EF4-FFF2-40B4-BE49-F238E27FC236}">
-                <a16:creationId xmlns:a16="http://schemas.microsoft.com/office/drawing/2014/main" id="{68843DFA-0647-E230-78BF-DAEFF405912E}"/>
+                <a16:creationId xmlns:a16="http://schemas.microsoft.com/office/drawing/2014/main" id="{2239ACC8-A994-6AF1-850A-2822BC742C62}"/>
               </a:ext>
             </a:extLst>
           </p:cNvPr>
@@ -15196,7 +15196,7 @@
           <p:cNvPr id="9" name="Picture 8">
             <a:extLst>
               <a:ext uri="{FF2B5EF4-FFF2-40B4-BE49-F238E27FC236}">
-                <a16:creationId xmlns:a16="http://schemas.microsoft.com/office/drawing/2014/main" id="{FF8AA70D-37BB-1C33-9726-BA3D7E8B5B2B}"/>
+                <a16:creationId xmlns:a16="http://schemas.microsoft.com/office/drawing/2014/main" id="{732F85F2-CE0A-97F6-1F71-F19495C2D983}"/>
               </a:ext>
             </a:extLst>
           </p:cNvPr>
@@ -15232,7 +15232,7 @@
           <p:cNvPr id="10" name="TextBox 9">
             <a:extLst>
               <a:ext uri="{FF2B5EF4-FFF2-40B4-BE49-F238E27FC236}">
-                <a16:creationId xmlns:a16="http://schemas.microsoft.com/office/drawing/2014/main" id="{0FCC6F4F-972E-C2F5-8800-ABCD6542A8DD}"/>
+                <a16:creationId xmlns:a16="http://schemas.microsoft.com/office/drawing/2014/main" id="{F6058A35-02C6-F62B-91DF-E400F45C20EF}"/>
               </a:ext>
             </a:extLst>
           </p:cNvPr>
@@ -15272,7 +15272,7 @@
           <p:cNvPr id="11" name="Rectangle: Rounded Corners 10">
             <a:extLst>
               <a:ext uri="{FF2B5EF4-FFF2-40B4-BE49-F238E27FC236}">
-                <a16:creationId xmlns:a16="http://schemas.microsoft.com/office/drawing/2014/main" id="{65557E2E-9D98-4786-4C3E-FE30306B219B}"/>
+                <a16:creationId xmlns:a16="http://schemas.microsoft.com/office/drawing/2014/main" id="{7F599250-F9C5-D2E0-41DF-C3FDAEA52CF8}"/>
               </a:ext>
             </a:extLst>
           </p:cNvPr>
@@ -15335,7 +15335,7 @@
           <p:cNvPr id="12" name="Rectangle: Rounded Corners 11">
             <a:extLst>
               <a:ext uri="{FF2B5EF4-FFF2-40B4-BE49-F238E27FC236}">
-                <a16:creationId xmlns:a16="http://schemas.microsoft.com/office/drawing/2014/main" id="{D6712448-C7B5-A01B-A2EE-70AD51927C83}"/>
+                <a16:creationId xmlns:a16="http://schemas.microsoft.com/office/drawing/2014/main" id="{BBAA16F4-56BA-941A-E45B-F388E3B25C49}"/>
               </a:ext>
             </a:extLst>
           </p:cNvPr>
@@ -15398,7 +15398,7 @@
           <p:cNvPr id="13" name="Rectangle: Rounded Corners 12">
             <a:extLst>
               <a:ext uri="{FF2B5EF4-FFF2-40B4-BE49-F238E27FC236}">
-                <a16:creationId xmlns:a16="http://schemas.microsoft.com/office/drawing/2014/main" id="{D2C8B1DC-397F-763F-A2D0-7CB07FCB7804}"/>
+                <a16:creationId xmlns:a16="http://schemas.microsoft.com/office/drawing/2014/main" id="{353D8F2E-C95E-5F48-66F4-9693B34678BB}"/>
               </a:ext>
             </a:extLst>
           </p:cNvPr>
@@ -15461,7 +15461,7 @@
           <p:cNvPr id="14" name="Rectangle: Rounded Corners 13">
             <a:extLst>
               <a:ext uri="{FF2B5EF4-FFF2-40B4-BE49-F238E27FC236}">
-                <a16:creationId xmlns:a16="http://schemas.microsoft.com/office/drawing/2014/main" id="{7D7322F6-A4B6-1E20-E538-BE3A91F1EFF7}"/>
+                <a16:creationId xmlns:a16="http://schemas.microsoft.com/office/drawing/2014/main" id="{1D7E84DC-77DA-D33A-62AA-89C463DE3D54}"/>
               </a:ext>
             </a:extLst>
           </p:cNvPr>
@@ -15524,7 +15524,7 @@
           <p:cNvPr id="15" name="TextBox 14">
             <a:extLst>
               <a:ext uri="{FF2B5EF4-FFF2-40B4-BE49-F238E27FC236}">
-                <a16:creationId xmlns:a16="http://schemas.microsoft.com/office/drawing/2014/main" id="{4C40B4B1-08DF-2073-447E-766F21E4DEDB}"/>
+                <a16:creationId xmlns:a16="http://schemas.microsoft.com/office/drawing/2014/main" id="{4877E229-54A3-8E47-47BC-85C5A91EFD23}"/>
               </a:ext>
             </a:extLst>
           </p:cNvPr>
@@ -15554,7 +15554,7 @@
                 </a:solidFill>
                 <a:latin typeface="Segoe UI" panose="020B0502040204020203" pitchFamily="34" charset="0"/>
               </a:rPr>
-              <a:t>All four confirmed defects were rerun on 2026-04-11 and still reproduced, so the current issue state remains open and justified.</a:t>
+              <a:t>All four confirmed defects were rerun on 2026-04-11 and still reproduced. The severity split remains 3 High and 1 Medium.</a:t>
             </a:r>
           </a:p>
         </p:txBody>
@@ -15562,7 +15562,7 @@
     </p:spTree>
     <p:extLst>
       <p:ext uri="{BB962C8B-B14F-4D97-AF65-F5344CB8AC3E}">
-        <p14:creationId xmlns:p14="http://schemas.microsoft.com/office/powerpoint/2010/main" val="215228046"/>
+        <p14:creationId xmlns:p14="http://schemas.microsoft.com/office/powerpoint/2010/main" val="1205865430"/>
       </p:ext>
     </p:extLst>
   </p:cSld>
